--- a/sample-report.pptx
+++ b/sample-report.pptx
@@ -8,9 +8,13 @@
     <p:sldId id="256" r:id="rId2"/>
     <p:sldId id="257" r:id="rId3"/>
     <p:sldId id="258" r:id="rId4"/>
+    <p:sldId id="259" r:id="rId5"/>
+    <p:sldId id="260" r:id="rId6"/>
+    <p:sldId id="261" r:id="rId7"/>
+    <p:sldId id="262" r:id="rId8"/>
   </p:sldIdLst>
   <p:notesMasterIdLst>
-    <p:notesMasterId r:id="rId5"/>
+    <p:notesMasterId r:id="rId9"/>
   </p:notesMasterIdLst>
   <p:sldSz cx="9144000" cy="5143500"/>
   <p:notesSz cx="5143500" cy="9144000"/>
@@ -114,36 +118,7 @@
   <c:date1904 val="0"/>
   <c:roundedCorners val="1"/>
   <c:chart>
-    <c:title>
-      <c:tx>
-        <c:rich>
-          <a:bodyPr/>
-          <a:lstStyle/>
-          <a:p>
-            <a:pPr>
-              <a:defRPr sz="900" b="0" i="0" u="none" strike="noStrike">
-                <a:solidFill>
-                  <a:srgbClr val="B7C6D2"/>
-                </a:solidFill>
-                <a:latin typeface="Arial"/>
-              </a:defRPr>
-            </a:pPr>
-            <a:r>
-              <a:rPr sz="900" b="0" i="0" u="none" strike="noStrike">
-                <a:solidFill>
-                  <a:srgbClr val="B7C6D2"/>
-                </a:solidFill>
-                <a:latin typeface="Arial"/>
-              </a:rPr>
-              <a:t>Median years from research to change, for milestones landing in each preceding ten years</a:t>
-            </a:r>
-          </a:p>
-        </c:rich>
-      </c:tx>
-      <c:layout/>
-      <c:overlay val="0"/>
-    </c:title>
-    <c:autoTitleDeleted val="0"/>
+    <c:autoTitleDeleted val="1"/>
     <c:plotArea>
       <c:layout/>
       <c:lineChart>
@@ -157,7 +132,7 @@
               <c:strCache>
                 <c:ptCount val="1"/>
                 <c:pt idx="0">
-                  <c:v>Median years, rolling ten-year window</c:v>
+                  <c:v>Median gap (years)</c:v>
                 </c:pt>
               </c:strCache>
             </c:strRef>
@@ -166,7 +141,7 @@
             <a:solidFill>
               <a:srgbClr val="F7C04A"/>
             </a:solidFill>
-            <a:ln w="25400" cap="flat">
+            <a:ln w="31750" cap="flat">
               <a:solidFill>
                 <a:srgbClr val="F7C04A"/>
               </a:solidFill>
@@ -219,63 +194,147 @@
           </c:marker>
           <c:cat>
             <c:multiLvlStrRef>
-              <c:f>Sheet1!$A$2:$A$19</c:f>
+              <c:f>Sheet1!$A$2:$A$47</c:f>
               <c:multiLvlStrCache>
-                <c:ptCount val="18"/>
+                <c:ptCount val="46"/>
                 <c:lvl>
                   <c:pt idx="0">
+                    <c:v>1936</c:v>
+                  </c:pt>
+                  <c:pt idx="1">
+                    <c:v>1938</c:v>
+                  </c:pt>
+                  <c:pt idx="2">
                     <c:v>1940</c:v>
                   </c:pt>
-                  <c:pt idx="1">
-                    <c:v>1945</c:v>
+                  <c:pt idx="3">
+                    <c:v>1942</c:v>
                   </c:pt>
-                  <c:pt idx="2">
+                  <c:pt idx="4">
+                    <c:v>1944</c:v>
+                  </c:pt>
+                  <c:pt idx="5">
+                    <c:v>1946</c:v>
+                  </c:pt>
+                  <c:pt idx="6">
+                    <c:v>1948</c:v>
+                  </c:pt>
+                  <c:pt idx="7">
                     <c:v>1950</c:v>
                   </c:pt>
-                  <c:pt idx="3">
-                    <c:v>1955</c:v>
+                  <c:pt idx="8">
+                    <c:v>1952</c:v>
                   </c:pt>
-                  <c:pt idx="4">
+                  <c:pt idx="9">
+                    <c:v>1954</c:v>
+                  </c:pt>
+                  <c:pt idx="10">
+                    <c:v>1956</c:v>
+                  </c:pt>
+                  <c:pt idx="11">
+                    <c:v>1958</c:v>
+                  </c:pt>
+                  <c:pt idx="12">
                     <c:v>1960</c:v>
                   </c:pt>
-                  <c:pt idx="5">
-                    <c:v>1965</c:v>
+                  <c:pt idx="13">
+                    <c:v>1962</c:v>
                   </c:pt>
-                  <c:pt idx="6">
+                  <c:pt idx="14">
+                    <c:v>1964</c:v>
+                  </c:pt>
+                  <c:pt idx="15">
+                    <c:v>1966</c:v>
+                  </c:pt>
+                  <c:pt idx="16">
+                    <c:v>1968</c:v>
+                  </c:pt>
+                  <c:pt idx="17">
                     <c:v>1970</c:v>
                   </c:pt>
-                  <c:pt idx="7">
-                    <c:v>1975</c:v>
+                  <c:pt idx="18">
+                    <c:v>1972</c:v>
                   </c:pt>
-                  <c:pt idx="8">
+                  <c:pt idx="19">
+                    <c:v>1974</c:v>
+                  </c:pt>
+                  <c:pt idx="20">
+                    <c:v>1976</c:v>
+                  </c:pt>
+                  <c:pt idx="21">
+                    <c:v>1978</c:v>
+                  </c:pt>
+                  <c:pt idx="22">
                     <c:v>1980</c:v>
                   </c:pt>
-                  <c:pt idx="9">
-                    <c:v>1985</c:v>
+                  <c:pt idx="23">
+                    <c:v>1982</c:v>
                   </c:pt>
-                  <c:pt idx="10">
+                  <c:pt idx="24">
+                    <c:v>1984</c:v>
+                  </c:pt>
+                  <c:pt idx="25">
+                    <c:v>1986</c:v>
+                  </c:pt>
+                  <c:pt idx="26">
+                    <c:v>1988</c:v>
+                  </c:pt>
+                  <c:pt idx="27">
                     <c:v>1990</c:v>
                   </c:pt>
-                  <c:pt idx="11">
-                    <c:v>1995</c:v>
+                  <c:pt idx="28">
+                    <c:v>1992</c:v>
                   </c:pt>
-                  <c:pt idx="12">
+                  <c:pt idx="29">
+                    <c:v>1994</c:v>
+                  </c:pt>
+                  <c:pt idx="30">
+                    <c:v>1996</c:v>
+                  </c:pt>
+                  <c:pt idx="31">
+                    <c:v>1998</c:v>
+                  </c:pt>
+                  <c:pt idx="32">
                     <c:v>2000</c:v>
                   </c:pt>
-                  <c:pt idx="13">
-                    <c:v>2005</c:v>
+                  <c:pt idx="33">
+                    <c:v>2002</c:v>
                   </c:pt>
-                  <c:pt idx="14">
+                  <c:pt idx="34">
+                    <c:v>2004</c:v>
+                  </c:pt>
+                  <c:pt idx="35">
+                    <c:v>2006</c:v>
+                  </c:pt>
+                  <c:pt idx="36">
+                    <c:v>2008</c:v>
+                  </c:pt>
+                  <c:pt idx="37">
                     <c:v>2010</c:v>
                   </c:pt>
-                  <c:pt idx="15">
-                    <c:v>2015</c:v>
+                  <c:pt idx="38">
+                    <c:v>2012</c:v>
                   </c:pt>
-                  <c:pt idx="16">
+                  <c:pt idx="39">
+                    <c:v>2014</c:v>
+                  </c:pt>
+                  <c:pt idx="40">
+                    <c:v>2016</c:v>
+                  </c:pt>
+                  <c:pt idx="41">
+                    <c:v>2018</c:v>
+                  </c:pt>
+                  <c:pt idx="42">
                     <c:v>2020</c:v>
                   </c:pt>
-                  <c:pt idx="17">
-                    <c:v>2025</c:v>
+                  <c:pt idx="43">
+                    <c:v>2022</c:v>
+                  </c:pt>
+                  <c:pt idx="44">
+                    <c:v>2024</c:v>
+                  </c:pt>
+                  <c:pt idx="45">
+                    <c:v>2026</c:v>
                   </c:pt>
                 </c:lvl>
               </c:multiLvlStrCache>
@@ -283,39 +342,39 @@
           </c:cat>
           <c:val>
             <c:numRef>
-              <c:f>Sheet1!$B$2:$B$19</c:f>
+              <c:f>Sheet1!$B$2:$B$47</c:f>
               <c:numCache>
                 <c:formatCode>General</c:formatCode>
-                <c:ptCount val="18"/>
+                <c:ptCount val="46"/>
                 <c:pt idx="0">
+                  <c:v>10</c:v>
+                </c:pt>
+                <c:pt idx="1">
                   <c:v>3</c:v>
                 </c:pt>
-                <c:pt idx="1">
+                <c:pt idx="2">
+                  <c:v>3</c:v>
+                </c:pt>
+                <c:pt idx="3">
+                  <c:v>3</c:v>
+                </c:pt>
+                <c:pt idx="4">
                   <c:v>5</c:v>
                 </c:pt>
-                <c:pt idx="2">
-                  <c:v>8</c:v>
-                </c:pt>
-                <c:pt idx="3">
-                  <c:v>7</c:v>
-                </c:pt>
-                <c:pt idx="4">
-                  <c:v>7</c:v>
-                </c:pt>
                 <c:pt idx="5">
-                  <c:v>6</c:v>
+                  <c:v>3</c:v>
                 </c:pt>
                 <c:pt idx="6">
                   <c:v>6</c:v>
                 </c:pt>
                 <c:pt idx="7">
-                  <c:v>6</c:v>
+                  <c:v>8</c:v>
                 </c:pt>
                 <c:pt idx="8">
-                  <c:v>7</c:v>
+                  <c:v>8</c:v>
                 </c:pt>
                 <c:pt idx="9">
-                  <c:v>7</c:v>
+                  <c:v>8</c:v>
                 </c:pt>
                 <c:pt idx="10">
                   <c:v>7</c:v>
@@ -324,21 +383,105 @@
                   <c:v>7</c:v>
                 </c:pt>
                 <c:pt idx="12">
+                  <c:v>7</c:v>
+                </c:pt>
+                <c:pt idx="13">
                   <c:v>6</c:v>
                 </c:pt>
-                <c:pt idx="13">
-                  <c:v>7</c:v>
-                </c:pt>
                 <c:pt idx="14">
-                  <c:v>6</c:v>
+                  <c:v>5</c:v>
                 </c:pt>
                 <c:pt idx="15">
                   <c:v>6</c:v>
                 </c:pt>
                 <c:pt idx="16">
+                  <c:v>6</c:v>
+                </c:pt>
+                <c:pt idx="17">
+                  <c:v>6</c:v>
+                </c:pt>
+                <c:pt idx="18">
+                  <c:v>6</c:v>
+                </c:pt>
+                <c:pt idx="19">
+                  <c:v>6</c:v>
+                </c:pt>
+                <c:pt idx="20">
                   <c:v>7</c:v>
                 </c:pt>
-                <c:pt idx="17">
+                <c:pt idx="21">
+                  <c:v>7</c:v>
+                </c:pt>
+                <c:pt idx="22">
+                  <c:v>8</c:v>
+                </c:pt>
+                <c:pt idx="23">
+                  <c:v>8</c:v>
+                </c:pt>
+                <c:pt idx="24">
+                  <c:v>8</c:v>
+                </c:pt>
+                <c:pt idx="25">
+                  <c:v>7</c:v>
+                </c:pt>
+                <c:pt idx="26">
+                  <c:v>7</c:v>
+                </c:pt>
+                <c:pt idx="27">
+                  <c:v>7</c:v>
+                </c:pt>
+                <c:pt idx="28">
+                  <c:v>7</c:v>
+                </c:pt>
+                <c:pt idx="29">
+                  <c:v>7</c:v>
+                </c:pt>
+                <c:pt idx="30">
+                  <c:v>6</c:v>
+                </c:pt>
+                <c:pt idx="31">
+                  <c:v>7</c:v>
+                </c:pt>
+                <c:pt idx="32">
+                  <c:v>6</c:v>
+                </c:pt>
+                <c:pt idx="33">
+                  <c:v>7</c:v>
+                </c:pt>
+                <c:pt idx="34">
+                  <c:v>7</c:v>
+                </c:pt>
+                <c:pt idx="35">
+                  <c:v>8</c:v>
+                </c:pt>
+                <c:pt idx="36">
+                  <c:v>6</c:v>
+                </c:pt>
+                <c:pt idx="37">
+                  <c:v>6</c:v>
+                </c:pt>
+                <c:pt idx="38">
+                  <c:v>6</c:v>
+                </c:pt>
+                <c:pt idx="39">
+                  <c:v>6</c:v>
+                </c:pt>
+                <c:pt idx="40">
+                  <c:v>6</c:v>
+                </c:pt>
+                <c:pt idx="41">
+                  <c:v>6</c:v>
+                </c:pt>
+                <c:pt idx="42">
+                  <c:v>7</c:v>
+                </c:pt>
+                <c:pt idx="43">
+                  <c:v>6</c:v>
+                </c:pt>
+                <c:pt idx="44">
+                  <c:v>6</c:v>
+                </c:pt>
+                <c:pt idx="45">
                   <c:v>6</c:v>
                 </c:pt>
               </c:numCache>
@@ -400,7 +543,7 @@
             <a:pPr>
               <a:defRPr sz="800" b="0" i="0" u="none" strike="noStrike">
                 <a:solidFill>
-                  <a:srgbClr val="B7C6D2"/>
+                  <a:srgbClr val="8FA6B8"/>
                 </a:solidFill>
                 <a:latin typeface="Arial"/>
               </a:defRPr>
@@ -413,12 +556,13 @@
         <c:auto val="1"/>
         <c:lblAlgn val="ctr"/>
         <c:noMultiLvlLbl val="1"/>
-        <c:tickLblSkip val="2"/>
+        <c:tickLblSkip val="5"/>
       </c:catAx>
       <c:valAx>
         <c:axId val="2094734552"/>
         <c:scaling>
           <c:orientation val="minMax"/>
+          <c:min val="0"/>
         </c:scaling>
         <c:delete val="0"/>
         <c:axPos val="l"/>
@@ -494,36 +638,7 @@
   <c:date1904 val="0"/>
   <c:roundedCorners val="1"/>
   <c:chart>
-    <c:title>
-      <c:tx>
-        <c:rich>
-          <a:bodyPr/>
-          <a:lstStyle/>
-          <a:p>
-            <a:pPr>
-              <a:defRPr sz="900" b="0" i="0" u="none" strike="noStrike">
-                <a:solidFill>
-                  <a:srgbClr val="B7C6D2"/>
-                </a:solidFill>
-                <a:latin typeface="Arial"/>
-              </a:defRPr>
-            </a:pPr>
-            <a:r>
-              <a:rPr sz="900" b="0" i="0" u="none" strike="noStrike">
-                <a:solidFill>
-                  <a:srgbClr val="B7C6D2"/>
-                </a:solidFill>
-                <a:latin typeface="Arial"/>
-              </a:rPr>
-              <a:t>Median years from research to change</a:t>
-            </a:r>
-          </a:p>
-        </c:rich>
-      </c:tx>
-      <c:layout/>
-      <c:overlay val="0"/>
-    </c:title>
-    <c:autoTitleDeleted val="0"/>
+    <c:autoTitleDeleted val="1"/>
     <c:plotArea>
       <c:layout/>
       <c:barChart>
@@ -539,14 +654,14 @@
               <c:strCache>
                 <c:ptCount val="1"/>
                 <c:pt idx="0">
-                  <c:v>Landed before 2000</c:v>
+                  <c:v>Recent gap</c:v>
                 </c:pt>
               </c:strCache>
             </c:strRef>
           </c:tx>
           <c:spPr>
             <a:solidFill>
-              <a:srgbClr val="5D7486"/>
+              <a:srgbClr val="8FA6B8"/>
             </a:solidFill>
             <a:effectLst/>
           </c:spPr>
@@ -558,9 +673,9 @@
               <a:lstStyle/>
               <a:p>
                 <a:pPr>
-                  <a:defRPr b="0" i="0" strike="noStrike" sz="700" u="none">
+                  <a:defRPr b="0" i="0" strike="noStrike" sz="1200" u="none">
                     <a:solidFill>
-                      <a:srgbClr val="E9F2FF"/>
+                      <a:srgbClr val="000000"/>
                     </a:solidFill>
                     <a:latin typeface="Arial"/>
                   </a:defRPr>
@@ -568,7 +683,7 @@
               </a:p>
             </c:txPr>
             <c:showLegendKey val="0"/>
-            <c:showVal val="1"/>
+            <c:showVal val="0"/>
             <c:showCatName val="0"/>
             <c:showSerName val="0"/>
             <c:showPercent val="0"/>
@@ -577,42 +692,36 @@
           </c:dLbls>
           <c:cat>
             <c:multiLvlStrRef>
-              <c:f>Sheet1!$A$2:$A$12</c:f>
+              <c:f>Sheet1!$A$2:$A$10</c:f>
               <c:multiLvlStrCache>
-                <c:ptCount val="11"/>
+                <c:ptCount val="9"/>
                 <c:lvl>
                   <c:pt idx="0">
+                    <c:v>Energy</c:v>
+                  </c:pt>
+                  <c:pt idx="1">
+                    <c:v>Computing hardware</c:v>
+                  </c:pt>
+                  <c:pt idx="2">
+                    <c:v>Computing software</c:v>
+                  </c:pt>
+                  <c:pt idx="3">
+                    <c:v>Artificial intelligence</c:v>
+                  </c:pt>
+                  <c:pt idx="4">
                     <c:v>Quantum</c:v>
                   </c:pt>
-                  <c:pt idx="1">
-                    <c:v>Materials science</c:v>
-                  </c:pt>
-                  <c:pt idx="2">
-                    <c:v>Life sciences</c:v>
-                  </c:pt>
-                  <c:pt idx="3">
-                    <c:v>Space</c:v>
-                  </c:pt>
-                  <c:pt idx="4">
-                    <c:v>Robotics &amp; autonomy</c:v>
-                  </c:pt>
                   <c:pt idx="5">
-                    <c:v>Energy</c:v>
+                    <c:v>Cyber security</c:v>
                   </c:pt>
                   <c:pt idx="6">
                     <c:v>Communications</c:v>
                   </c:pt>
                   <c:pt idx="7">
-                    <c:v>Computing software</c:v>
+                    <c:v>Materials science</c:v>
                   </c:pt>
                   <c:pt idx="8">
-                    <c:v>Cyber security</c:v>
-                  </c:pt>
-                  <c:pt idx="9">
-                    <c:v>Computing hardware</c:v>
-                  </c:pt>
-                  <c:pt idx="10">
-                    <c:v>Artificial intelligence</c:v>
+                    <c:v>Space</c:v>
                   </c:pt>
                 </c:lvl>
               </c:multiLvlStrCache>
@@ -620,21 +729,21 @@
           </c:cat>
           <c:val>
             <c:numRef>
-              <c:f>Sheet1!$B$2:$B$12</c:f>
+              <c:f>Sheet1!$B$2:$B$10</c:f>
               <c:numCache>
                 <c:formatCode>General</c:formatCode>
-                <c:ptCount val="11"/>
+                <c:ptCount val="9"/>
                 <c:pt idx="0">
-                  <c:v>9</c:v>
+                  <c:v>7</c:v>
                 </c:pt>
                 <c:pt idx="1">
                   <c:v>6</c:v>
                 </c:pt>
                 <c:pt idx="2">
-                  <c:v>7</c:v>
+                  <c:v>6.5</c:v>
                 </c:pt>
                 <c:pt idx="3">
-                  <c:v>15</c:v>
+                  <c:v>2</c:v>
                 </c:pt>
                 <c:pt idx="4">
                   <c:v>7</c:v>
@@ -643,19 +752,13 @@
                   <c:v>7</c:v>
                 </c:pt>
                 <c:pt idx="6">
-                  <c:v>9</c:v>
+                  <c:v>4</c:v>
                 </c:pt>
                 <c:pt idx="7">
-                  <c:v>5</c:v>
+                  <c:v>12</c:v>
                 </c:pt>
                 <c:pt idx="8">
-                  <c:v>5</c:v>
-                </c:pt>
-                <c:pt idx="9">
-                  <c:v>5</c:v>
-                </c:pt>
-                <c:pt idx="10">
-                  <c:v>8.5</c:v>
+                  <c:v>9.5</c:v>
                 </c:pt>
               </c:numCache>
             </c:numRef>
@@ -670,7 +773,7 @@
               <c:strCache>
                 <c:ptCount val="1"/>
                 <c:pt idx="0">
-                  <c:v>Landed since 2000</c:v>
+                  <c:v>With AI (scenario)</c:v>
                 </c:pt>
               </c:strCache>
             </c:strRef>
@@ -689,9 +792,9 @@
               <a:lstStyle/>
               <a:p>
                 <a:pPr>
-                  <a:defRPr b="0" i="0" strike="noStrike" sz="700" u="none">
+                  <a:defRPr b="0" i="0" strike="noStrike" sz="1200" u="none">
                     <a:solidFill>
-                      <a:srgbClr val="E9F2FF"/>
+                      <a:srgbClr val="000000"/>
                     </a:solidFill>
                     <a:latin typeface="Arial"/>
                   </a:defRPr>
@@ -699,7 +802,7 @@
               </a:p>
             </c:txPr>
             <c:showLegendKey val="0"/>
-            <c:showVal val="1"/>
+            <c:showVal val="0"/>
             <c:showCatName val="0"/>
             <c:showSerName val="0"/>
             <c:showPercent val="0"/>
@@ -708,42 +811,36 @@
           </c:dLbls>
           <c:cat>
             <c:multiLvlStrRef>
-              <c:f>Sheet1!$A$2:$A$12</c:f>
+              <c:f>Sheet1!$A$2:$A$10</c:f>
               <c:multiLvlStrCache>
-                <c:ptCount val="11"/>
+                <c:ptCount val="9"/>
                 <c:lvl>
                   <c:pt idx="0">
+                    <c:v>Energy</c:v>
+                  </c:pt>
+                  <c:pt idx="1">
+                    <c:v>Computing hardware</c:v>
+                  </c:pt>
+                  <c:pt idx="2">
+                    <c:v>Computing software</c:v>
+                  </c:pt>
+                  <c:pt idx="3">
+                    <c:v>Artificial intelligence</c:v>
+                  </c:pt>
+                  <c:pt idx="4">
                     <c:v>Quantum</c:v>
                   </c:pt>
-                  <c:pt idx="1">
-                    <c:v>Materials science</c:v>
-                  </c:pt>
-                  <c:pt idx="2">
-                    <c:v>Life sciences</c:v>
-                  </c:pt>
-                  <c:pt idx="3">
-                    <c:v>Space</c:v>
-                  </c:pt>
-                  <c:pt idx="4">
-                    <c:v>Robotics &amp; autonomy</c:v>
-                  </c:pt>
                   <c:pt idx="5">
-                    <c:v>Energy</c:v>
+                    <c:v>Cyber security</c:v>
                   </c:pt>
                   <c:pt idx="6">
                     <c:v>Communications</c:v>
                   </c:pt>
                   <c:pt idx="7">
-                    <c:v>Computing software</c:v>
+                    <c:v>Materials science</c:v>
                   </c:pt>
                   <c:pt idx="8">
-                    <c:v>Cyber security</c:v>
-                  </c:pt>
-                  <c:pt idx="9">
-                    <c:v>Computing hardware</c:v>
-                  </c:pt>
-                  <c:pt idx="10">
-                    <c:v>Artificial intelligence</c:v>
+                    <c:v>Space</c:v>
                   </c:pt>
                 </c:lvl>
               </c:multiLvlStrCache>
@@ -751,42 +848,36 @@
           </c:cat>
           <c:val>
             <c:numRef>
-              <c:f>Sheet1!$C$2:$C$12</c:f>
+              <c:f>Sheet1!$C$2:$C$10</c:f>
               <c:numCache>
                 <c:formatCode>General</c:formatCode>
-                <c:ptCount val="11"/>
+                <c:ptCount val="9"/>
                 <c:pt idx="0">
-                  <c:v>17</c:v>
+                  <c:v>5.1</c:v>
                 </c:pt>
                 <c:pt idx="1">
-                  <c:v>17</c:v>
+                  <c:v>4.2</c:v>
                 </c:pt>
                 <c:pt idx="2">
-                  <c:v>15</c:v>
+                  <c:v>2.9</c:v>
                 </c:pt>
                 <c:pt idx="3">
-                  <c:v>14</c:v>
+                  <c:v>1.1</c:v>
                 </c:pt>
                 <c:pt idx="4">
-                  <c:v>11</c:v>
+                  <c:v>6</c:v>
                 </c:pt>
                 <c:pt idx="5">
-                  <c:v>9</c:v>
+                  <c:v>4.6</c:v>
                 </c:pt>
                 <c:pt idx="6">
-                  <c:v>9</c:v>
+                  <c:v>3.3</c:v>
                 </c:pt>
                 <c:pt idx="7">
-                  <c:v>8</c:v>
+                  <c:v>7.5</c:v>
                 </c:pt>
                 <c:pt idx="8">
-                  <c:v>7</c:v>
-                </c:pt>
-                <c:pt idx="9">
-                  <c:v>6</c:v>
-                </c:pt>
-                <c:pt idx="10">
-                  <c:v>4</c:v>
+                  <c:v>7.6</c:v>
                 </c:pt>
               </c:numCache>
             </c:numRef>
@@ -799,9 +890,9 @@
             <a:lstStyle/>
             <a:p>
               <a:pPr>
-                <a:defRPr b="0" i="0" strike="noStrike" sz="700" u="none">
+                <a:defRPr b="0" i="0" strike="noStrike" sz="1200" u="none">
                   <a:solidFill>
-                    <a:srgbClr val="E9F2FF"/>
+                    <a:srgbClr val="000000"/>
                   </a:solidFill>
                   <a:latin typeface="Arial"/>
                 </a:defRPr>
@@ -809,7 +900,7 @@
             </a:p>
           </c:txPr>
           <c:showLegendKey val="0"/>
-          <c:showVal val="1"/>
+          <c:showVal val="0"/>
           <c:showCatName val="0"/>
           <c:showSerName val="0"/>
           <c:showPercent val="0"/>
@@ -825,7 +916,7 @@
       <c:catAx>
         <c:axId val="2094734554"/>
         <c:scaling>
-          <c:orientation val="minMax"/>
+          <c:orientation val="maxMin"/>
         </c:scaling>
         <c:delete val="0"/>
         <c:axPos val="l"/>
@@ -835,7 +926,9 @@
         <c:tickLblPos val="nextTo"/>
         <c:spPr>
           <a:ln w="12700" cap="flat">
-            <a:noFill/>
+            <a:solidFill>
+              <a:srgbClr val="888888"/>
+            </a:solidFill>
             <a:prstDash val="solid"/>
             <a:round/>
           </a:ln>
@@ -847,7 +940,7 @@
             <a:pPr>
               <a:defRPr sz="800" b="0" i="0" u="none" strike="noStrike">
                 <a:solidFill>
-                  <a:srgbClr val="B7C6D2"/>
+                  <a:srgbClr val="E9F2FF"/>
                 </a:solidFill>
                 <a:latin typeface="Arial"/>
               </a:defRPr>
@@ -865,6 +958,7 @@
         <c:axId val="2094734552"/>
         <c:scaling>
           <c:orientation val="minMax"/>
+          <c:min val="0"/>
         </c:scaling>
         <c:delete val="0"/>
         <c:axPos val="b"/>
@@ -885,7 +979,9 @@
         <c:tickLblPos val="low"/>
         <c:spPr>
           <a:ln w="12700" cap="flat">
-            <a:noFill/>
+            <a:solidFill>
+              <a:srgbClr val="888888"/>
+            </a:solidFill>
             <a:prstDash val="solid"/>
             <a:round/>
           </a:ln>
@@ -929,476 +1025,8 @@
           <a:pPr>
             <a:defRPr sz="800">
               <a:solidFill>
-                <a:srgbClr val="B7C6D2"/>
+                <a:srgbClr val="8FA6B8"/>
               </a:solidFill>
-              <a:latin typeface="Arial"/>
-              <a:cs typeface="Arial"/>
-            </a:defRPr>
-          </a:pPr>
-          <a:endParaRPr lang="en-US"/>
-        </a:p>
-      </c:txPr>
-    </c:legend>
-    <c:plotVisOnly val="1"/>
-    <c:dispBlanksAs val="span"/>
-  </c:chart>
-  <c:spPr>
-    <a:noFill/>
-    <a:ln>
-      <a:noFill/>
-    </a:ln>
-    <a:effectLst/>
-  </c:spPr>
-  <c:externalData r:id="rId1">
-    <c:autoUpdate val="0"/>
-  </c:externalData>
-</c:chartSpace>
-</file>
-
-<file path=ppt/charts/chart3.xml><?xml version="1.0" encoding="utf-8"?>
-<c:chartSpace xmlns:c="http://schemas.openxmlformats.org/drawingml/2006/chart" xmlns:a="http://schemas.openxmlformats.org/drawingml/2006/main" xmlns:r="http://schemas.openxmlformats.org/officeDocument/2006/relationships">
-  <c:date1904 val="0"/>
-  <c:roundedCorners val="1"/>
-  <c:chart>
-    <c:title>
-      <c:tx>
-        <c:rich>
-          <a:bodyPr/>
-          <a:lstStyle/>
-          <a:p>
-            <a:pPr>
-              <a:defRPr sz="900" b="0" i="0" u="none" strike="noStrike">
-                <a:solidFill>
-                  <a:srgbClr val="B7C6D2"/>
-                </a:solidFill>
-                <a:latin typeface="Arial"/>
-              </a:defRPr>
-            </a:pPr>
-            <a:r>
-              <a:rPr sz="900" b="0" i="0" u="none" strike="noStrike">
-                <a:solidFill>
-                  <a:srgbClr val="B7C6D2"/>
-                </a:solidFill>
-                <a:latin typeface="Arial"/>
-              </a:rPr>
-              <a:t>Median years from research to change</a:t>
-            </a:r>
-          </a:p>
-        </c:rich>
-      </c:tx>
-      <c:layout/>
-      <c:overlay val="0"/>
-    </c:title>
-    <c:autoTitleDeleted val="0"/>
-    <c:plotArea>
-      <c:layout/>
-      <c:barChart>
-        <c:barDir val="bar"/>
-        <c:grouping val="clustered"/>
-        <c:varyColors val="0"/>
-        <c:ser>
-          <c:idx val="0"/>
-          <c:order val="0"/>
-          <c:tx>
-            <c:strRef>
-              <c:f>Sheet1!$B$1</c:f>
-              <c:strCache>
-                <c:ptCount val="1"/>
-                <c:pt idx="0">
-                  <c:v>Recent pace (research since 2000)</c:v>
-                </c:pt>
-              </c:strCache>
-            </c:strRef>
-          </c:tx>
-          <c:spPr>
-            <a:solidFill>
-              <a:srgbClr val="5D7486"/>
-            </a:solidFill>
-            <a:effectLst/>
-          </c:spPr>
-          <c:invertIfNegative val="0"/>
-          <c:dLbls>
-            <c:numFmt formatCode="#,##0" sourceLinked="0"/>
-            <c:txPr>
-              <a:bodyPr/>
-              <a:lstStyle/>
-              <a:p>
-                <a:pPr>
-                  <a:defRPr b="0" i="0" strike="noStrike" sz="700" u="none">
-                    <a:solidFill>
-                      <a:srgbClr val="E9F2FF"/>
-                    </a:solidFill>
-                    <a:latin typeface="Arial"/>
-                  </a:defRPr>
-                </a:pPr>
-              </a:p>
-            </c:txPr>
-            <c:showLegendKey val="0"/>
-            <c:showVal val="1"/>
-            <c:showCatName val="0"/>
-            <c:showSerName val="0"/>
-            <c:showPercent val="0"/>
-            <c:showBubbleSize val="0"/>
-            <c:showLeaderLines val="0"/>
-          </c:dLbls>
-          <c:cat>
-            <c:multiLvlStrRef>
-              <c:f>Sheet1!$A$2:$A$12</c:f>
-              <c:multiLvlStrCache>
-                <c:ptCount val="11"/>
-                <c:lvl>
-                  <c:pt idx="0">
-                    <c:v>Materials science</c:v>
-                  </c:pt>
-                  <c:pt idx="1">
-                    <c:v>Life sciences</c:v>
-                  </c:pt>
-                  <c:pt idx="2">
-                    <c:v>Space</c:v>
-                  </c:pt>
-                  <c:pt idx="3">
-                    <c:v>Robotics &amp; autonomy</c:v>
-                  </c:pt>
-                  <c:pt idx="4">
-                    <c:v>Energy</c:v>
-                  </c:pt>
-                  <c:pt idx="5">
-                    <c:v>Quantum</c:v>
-                  </c:pt>
-                  <c:pt idx="6">
-                    <c:v>Cyber security</c:v>
-                  </c:pt>
-                  <c:pt idx="7">
-                    <c:v>Computing software</c:v>
-                  </c:pt>
-                  <c:pt idx="8">
-                    <c:v>Computing hardware</c:v>
-                  </c:pt>
-                  <c:pt idx="9">
-                    <c:v>Communications</c:v>
-                  </c:pt>
-                  <c:pt idx="10">
-                    <c:v>Artificial intelligence</c:v>
-                  </c:pt>
-                </c:lvl>
-              </c:multiLvlStrCache>
-            </c:multiLvlStrRef>
-          </c:cat>
-          <c:val>
-            <c:numRef>
-              <c:f>Sheet1!$B$2:$B$12</c:f>
-              <c:numCache>
-                <c:formatCode>General</c:formatCode>
-                <c:ptCount val="11"/>
-                <c:pt idx="0">
-                  <c:v>11</c:v>
-                </c:pt>
-                <c:pt idx="1">
-                  <c:v>11</c:v>
-                </c:pt>
-                <c:pt idx="2">
-                  <c:v>10</c:v>
-                </c:pt>
-                <c:pt idx="3">
-                  <c:v>7.5</c:v>
-                </c:pt>
-                <c:pt idx="4">
-                  <c:v>7</c:v>
-                </c:pt>
-                <c:pt idx="5">
-                  <c:v>7</c:v>
-                </c:pt>
-                <c:pt idx="6">
-                  <c:v>7</c:v>
-                </c:pt>
-                <c:pt idx="7">
-                  <c:v>6.5</c:v>
-                </c:pt>
-                <c:pt idx="8">
-                  <c:v>6</c:v>
-                </c:pt>
-                <c:pt idx="9">
-                  <c:v>4.5</c:v>
-                </c:pt>
-                <c:pt idx="10">
-                  <c:v>2</c:v>
-                </c:pt>
-              </c:numCache>
-            </c:numRef>
-          </c:val>
-        </c:ser>
-        <c:ser>
-          <c:idx val="1"/>
-          <c:order val="1"/>
-          <c:tx>
-            <c:strRef>
-              <c:f>Sheet1!$C$1</c:f>
-              <c:strCache>
-                <c:ptCount val="1"/>
-                <c:pt idx="0">
-                  <c:v>With AI and digital twins (scenario midpoint)</c:v>
-                </c:pt>
-              </c:strCache>
-            </c:strRef>
-          </c:tx>
-          <c:spPr>
-            <a:solidFill>
-              <a:srgbClr val="F7C04A"/>
-            </a:solidFill>
-            <a:effectLst/>
-          </c:spPr>
-          <c:invertIfNegative val="0"/>
-          <c:dLbls>
-            <c:numFmt formatCode="#,##0" sourceLinked="0"/>
-            <c:txPr>
-              <a:bodyPr/>
-              <a:lstStyle/>
-              <a:p>
-                <a:pPr>
-                  <a:defRPr b="0" i="0" strike="noStrike" sz="700" u="none">
-                    <a:solidFill>
-                      <a:srgbClr val="E9F2FF"/>
-                    </a:solidFill>
-                    <a:latin typeface="Arial"/>
-                  </a:defRPr>
-                </a:pPr>
-              </a:p>
-            </c:txPr>
-            <c:showLegendKey val="0"/>
-            <c:showVal val="1"/>
-            <c:showCatName val="0"/>
-            <c:showSerName val="0"/>
-            <c:showPercent val="0"/>
-            <c:showBubbleSize val="0"/>
-            <c:showLeaderLines val="0"/>
-          </c:dLbls>
-          <c:cat>
-            <c:multiLvlStrRef>
-              <c:f>Sheet1!$A$2:$A$12</c:f>
-              <c:multiLvlStrCache>
-                <c:ptCount val="11"/>
-                <c:lvl>
-                  <c:pt idx="0">
-                    <c:v>Materials science</c:v>
-                  </c:pt>
-                  <c:pt idx="1">
-                    <c:v>Life sciences</c:v>
-                  </c:pt>
-                  <c:pt idx="2">
-                    <c:v>Space</c:v>
-                  </c:pt>
-                  <c:pt idx="3">
-                    <c:v>Robotics &amp; autonomy</c:v>
-                  </c:pt>
-                  <c:pt idx="4">
-                    <c:v>Energy</c:v>
-                  </c:pt>
-                  <c:pt idx="5">
-                    <c:v>Quantum</c:v>
-                  </c:pt>
-                  <c:pt idx="6">
-                    <c:v>Cyber security</c:v>
-                  </c:pt>
-                  <c:pt idx="7">
-                    <c:v>Computing software</c:v>
-                  </c:pt>
-                  <c:pt idx="8">
-                    <c:v>Computing hardware</c:v>
-                  </c:pt>
-                  <c:pt idx="9">
-                    <c:v>Communications</c:v>
-                  </c:pt>
-                  <c:pt idx="10">
-                    <c:v>Artificial intelligence</c:v>
-                  </c:pt>
-                </c:lvl>
-              </c:multiLvlStrCache>
-            </c:multiLvlStrRef>
-          </c:cat>
-          <c:val>
-            <c:numRef>
-              <c:f>Sheet1!$C$2:$C$12</c:f>
-              <c:numCache>
-                <c:formatCode>General</c:formatCode>
-                <c:ptCount val="11"/>
-                <c:pt idx="0">
-                  <c:v>6.9</c:v>
-                </c:pt>
-                <c:pt idx="1">
-                  <c:v>8.8</c:v>
-                </c:pt>
-                <c:pt idx="2">
-                  <c:v>8</c:v>
-                </c:pt>
-                <c:pt idx="3">
-                  <c:v>4.9</c:v>
-                </c:pt>
-                <c:pt idx="4">
-                  <c:v>5.1</c:v>
-                </c:pt>
-                <c:pt idx="5">
-                  <c:v>6</c:v>
-                </c:pt>
-                <c:pt idx="6">
-                  <c:v>4.6</c:v>
-                </c:pt>
-                <c:pt idx="7">
-                  <c:v>2.9</c:v>
-                </c:pt>
-                <c:pt idx="8">
-                  <c:v>4.2</c:v>
-                </c:pt>
-                <c:pt idx="9">
-                  <c:v>3.7</c:v>
-                </c:pt>
-                <c:pt idx="10">
-                  <c:v>1.1</c:v>
-                </c:pt>
-              </c:numCache>
-            </c:numRef>
-          </c:val>
-        </c:ser>
-        <c:dLbls>
-          <c:numFmt formatCode="#,##0" sourceLinked="0"/>
-          <c:txPr>
-            <a:bodyPr/>
-            <a:lstStyle/>
-            <a:p>
-              <a:pPr>
-                <a:defRPr b="0" i="0" strike="noStrike" sz="700" u="none">
-                  <a:solidFill>
-                    <a:srgbClr val="E9F2FF"/>
-                  </a:solidFill>
-                  <a:latin typeface="Arial"/>
-                </a:defRPr>
-              </a:pPr>
-            </a:p>
-          </c:txPr>
-          <c:showLegendKey val="0"/>
-          <c:showVal val="1"/>
-          <c:showCatName val="0"/>
-          <c:showSerName val="0"/>
-          <c:showPercent val="0"/>
-          <c:showBubbleSize val="0"/>
-          <c:showLeaderLines val="0"/>
-        </c:dLbls>
-        <c:gapWidth val="150"/>
-        <c:overlap val="0"/>
-        <c:axId val="2094734554"/>
-        <c:axId val="2094734552"/>
-        <c:axId val="2094734556"/>
-      </c:barChart>
-      <c:catAx>
-        <c:axId val="2094734554"/>
-        <c:scaling>
-          <c:orientation val="minMax"/>
-        </c:scaling>
-        <c:delete val="0"/>
-        <c:axPos val="l"/>
-        <c:numFmt formatCode="General" sourceLinked="1"/>
-        <c:majorTickMark val="out"/>
-        <c:minorTickMark val="none"/>
-        <c:tickLblPos val="nextTo"/>
-        <c:spPr>
-          <a:ln w="12700" cap="flat">
-            <a:noFill/>
-            <a:prstDash val="solid"/>
-            <a:round/>
-          </a:ln>
-        </c:spPr>
-        <c:txPr>
-          <a:bodyPr/>
-          <a:lstStyle/>
-          <a:p>
-            <a:pPr>
-              <a:defRPr sz="800" b="0" i="0" u="none" strike="noStrike">
-                <a:solidFill>
-                  <a:srgbClr val="B7C6D2"/>
-                </a:solidFill>
-                <a:latin typeface="Arial"/>
-              </a:defRPr>
-            </a:pPr>
-            <a:endParaRPr lang="en-US"/>
-          </a:p>
-        </c:txPr>
-        <c:crossAx val="2094734552"/>
-        <c:crosses val="autoZero"/>
-        <c:auto val="1"/>
-        <c:lblAlgn val="ctr"/>
-        <c:noMultiLvlLbl val="1"/>
-      </c:catAx>
-      <c:valAx>
-        <c:axId val="2094734552"/>
-        <c:scaling>
-          <c:orientation val="minMax"/>
-        </c:scaling>
-        <c:delete val="0"/>
-        <c:axPos val="b"/>
-        <c:majorGridlines>
-          <c:spPr>
-            <a:ln w="6350" cap="flat">
-              <a:solidFill>
-                <a:srgbClr val="22384A"/>
-              </a:solidFill>
-              <a:prstDash val="solid"/>
-              <a:round/>
-            </a:ln>
-          </c:spPr>
-        </c:majorGridlines>
-        <c:numFmt formatCode="General" sourceLinked="0"/>
-        <c:majorTickMark val="out"/>
-        <c:minorTickMark val="none"/>
-        <c:tickLblPos val="low"/>
-        <c:spPr>
-          <a:ln w="12700" cap="flat">
-            <a:noFill/>
-            <a:prstDash val="solid"/>
-            <a:round/>
-          </a:ln>
-        </c:spPr>
-        <c:txPr>
-          <a:bodyPr/>
-          <a:lstStyle/>
-          <a:p>
-            <a:pPr>
-              <a:defRPr sz="800" b="0" i="0" u="none" strike="noStrike">
-                <a:solidFill>
-                  <a:srgbClr val="8FA6B8"/>
-                </a:solidFill>
-                <a:latin typeface="Arial"/>
-              </a:defRPr>
-            </a:pPr>
-            <a:endParaRPr lang="en-US"/>
-          </a:p>
-        </c:txPr>
-        <c:crossAx val="2094734554"/>
-        <c:crosses val="autoZero"/>
-        <c:crossBetween val="between"/>
-      </c:valAx>
-      <c:spPr>
-        <a:solidFill>
-          <a:srgbClr val="0B1724"/>
-        </a:solidFill>
-        <a:ln>
-          <a:noFill/>
-        </a:ln>
-        <a:effectLst/>
-      </c:spPr>
-    </c:plotArea>
-    <c:legend>
-      <c:legendPos val="b"/>
-      <c:overlay val="0"/>
-      <c:txPr>
-        <a:bodyPr/>
-        <a:lstStyle/>
-        <a:p>
-          <a:pPr>
-            <a:defRPr sz="800">
-              <a:solidFill>
-                <a:srgbClr val="B7C6D2"/>
-              </a:solidFill>
-              <a:latin typeface="Arial"/>
-              <a:cs typeface="Arial"/>
             </a:defRPr>
           </a:pPr>
           <a:endParaRPr lang="en-US"/>
@@ -1816,7 +1444,7 @@
           <a:p>
             <a:r>
               <a:rPr lang="en-US" dirty="0"/>
-              <a:t>Headline: across the selection, the typical gap has moved from 6 years (before 1970) to 9 years (since 2000). AI-driven work since 2010 has taken a median 4 years against 6 for other work. Data is AI-maintained and may contain errors.</a:t>
+              <a:t>A visual introduction: each arc is one research breakthrough, rising when the research began and landing at its first real-world use. The picture shows the live model as it was when this deck was created.</a:t>
             </a:r>
             <a:endParaRPr lang="en-US" dirty="0"/>
           </a:p>
@@ -1904,7 +1532,7 @@
           <a:p>
             <a:r>
               <a:rPr lang="en-US" dirty="0"/>
-              <a:t>Software and AI compress fastest. Physical, safety-critical fields such as energy, materials and life sciences are limited by manufacturing, trials, safety cases and consent.</a:t>
+              <a:t>Overall, the typical gap from research to first product has grown: 6 years for research begun before 1970, 9 for research since 2000. But much recent research has not yet reached a first product. Counting that unfinished work, research since 2010 takes about 10 years, so it is not clearly quicker than research begun before 1970. (AI-generated narrative from the weekly agents; no human review.)</a:t>
             </a:r>
             <a:endParaRPr lang="en-US" dirty="0"/>
           </a:p>
@@ -1992,7 +1620,7 @@
           <a:p>
             <a:r>
               <a:rPr lang="en-US" dirty="0"/>
-              <a:t>The AI ranges are scenario assumptions stated in the dataset, not forecasts. The comparison uses technology arcs only, excluding policy milestones.</a:t>
+              <a:t>The line shows the typical gap for milestones landing in each preceding decade. The examples are the quickest recent arrivals in the selection, and the slowest since 2010.</a:t>
             </a:r>
             <a:endParaRPr lang="en-US" dirty="0"/>
           </a:p>
@@ -2016,6 +1644,358 @@
             <a:fld id="{F7021451-1387-4CA6-816F-3879F97B5CBC}" type="slidenum">
               <a:rPr lang="en-US"/>
               <a:t>3</a:t>
+            </a:fld>
+            <a:endParaRPr lang="en-US"/>
+          </a:p>
+        </p:txBody>
+      </p:sp>
+    </p:spTree>
+    <p:extLst>
+      <p:ext uri="{BB962C8B-B14F-4D97-AF65-F5344CB8AC3E}">
+        <p14:creationId xmlns:p14="http://schemas.microsoft.com/office/powerpoint/2010/main" val="1024086991"/>
+      </p:ext>
+    </p:extLst>
+  </p:cSld>
+  <p:clrMapOvr>
+    <a:masterClrMapping/>
+  </p:clrMapOvr>
+</p:notes>
+</file>
+
+<file path=ppt/notesSlides/notesSlide4.xml><?xml version="1.0" encoding="utf-8"?>
+<p:notes xmlns:a="http://schemas.openxmlformats.org/drawingml/2006/main" xmlns:r="http://schemas.openxmlformats.org/officeDocument/2006/relationships" xmlns:p="http://schemas.openxmlformats.org/presentationml/2006/main">
+  <p:cSld>
+    <p:spTree>
+      <p:nvGrpSpPr>
+        <p:cNvPr id="1" name=""/>
+        <p:cNvGrpSpPr/>
+        <p:nvPr/>
+      </p:nvGrpSpPr>
+      <p:grpSpPr>
+        <a:xfrm>
+          <a:off x="0" y="0"/>
+          <a:ext cx="0" cy="0"/>
+          <a:chOff x="0" y="0"/>
+          <a:chExt cx="0" cy="0"/>
+        </a:xfrm>
+      </p:grpSpPr>
+      <p:sp>
+        <p:nvSpPr>
+          <p:cNvPr id="2" name="Slide Image Placeholder 1"/>
+          <p:cNvSpPr>
+            <a:spLocks noGrp="1" noRot="1" noChangeAspect="1"/>
+          </p:cNvSpPr>
+          <p:nvPr>
+            <p:ph type="sldImg"/>
+          </p:nvPr>
+        </p:nvSpPr>
+        <p:spPr/>
+      </p:sp>
+      <p:sp>
+        <p:nvSpPr>
+          <p:cNvPr id="3" name="Notes Placeholder 2"/>
+          <p:cNvSpPr>
+            <a:spLocks noGrp="1"/>
+          </p:cNvSpPr>
+          <p:nvPr>
+            <p:ph type="body" idx="1"/>
+          </p:nvPr>
+        </p:nvSpPr>
+        <p:spPr/>
+        <p:txBody>
+          <a:bodyPr/>
+          <a:lstStyle/>
+          <a:p>
+            <a:r>
+              <a:rPr lang="en-US" dirty="0"/>
+              <a:t>Since 2010, AI-driven work has been quicker: 3 years, against 6 for the rest. Ahead, AI-assisted work is expected to be quicker: 9 years, against 11 for conventional work. Since 2000, AI itself is the fastest field, at about 4 years. With one field selected, its sub-fields get their own tracks. The AI ranges are scenario assumptions stated in the dataset, not forecasts.</a:t>
+            </a:r>
+            <a:endParaRPr lang="en-US" dirty="0"/>
+          </a:p>
+        </p:txBody>
+      </p:sp>
+      <p:sp>
+        <p:nvSpPr>
+          <p:cNvPr id="4" name="Slide Number Placeholder 3"/>
+          <p:cNvSpPr>
+            <a:spLocks noGrp="1"/>
+          </p:cNvSpPr>
+          <p:nvPr>
+            <p:ph type="sldNum" sz="quarter" idx="10"/>
+          </p:nvPr>
+        </p:nvSpPr>
+        <p:spPr/>
+        <p:txBody>
+          <a:bodyPr/>
+          <a:lstStyle/>
+          <a:p>
+            <a:fld id="{F7021451-1387-4CA6-816F-3879F97B5CBC}" type="slidenum">
+              <a:rPr lang="en-US"/>
+              <a:t>4</a:t>
+            </a:fld>
+            <a:endParaRPr lang="en-US"/>
+          </a:p>
+        </p:txBody>
+      </p:sp>
+    </p:spTree>
+    <p:extLst>
+      <p:ext uri="{BB962C8B-B14F-4D97-AF65-F5344CB8AC3E}">
+        <p14:creationId xmlns:p14="http://schemas.microsoft.com/office/powerpoint/2010/main" val="1024086991"/>
+      </p:ext>
+    </p:extLst>
+  </p:cSld>
+  <p:clrMapOvr>
+    <a:masterClrMapping/>
+  </p:clrMapOvr>
+</p:notes>
+</file>
+
+<file path=ppt/notesSlides/notesSlide5.xml><?xml version="1.0" encoding="utf-8"?>
+<p:notes xmlns:a="http://schemas.openxmlformats.org/drawingml/2006/main" xmlns:r="http://schemas.openxmlformats.org/officeDocument/2006/relationships" xmlns:p="http://schemas.openxmlformats.org/presentationml/2006/main">
+  <p:cSld>
+    <p:spTree>
+      <p:nvGrpSpPr>
+        <p:cNvPr id="1" name=""/>
+        <p:cNvGrpSpPr/>
+        <p:nvPr/>
+      </p:nvGrpSpPr>
+      <p:grpSpPr>
+        <a:xfrm>
+          <a:off x="0" y="0"/>
+          <a:ext cx="0" cy="0"/>
+          <a:chOff x="0" y="0"/>
+          <a:chExt cx="0" cy="0"/>
+        </a:xfrm>
+      </p:grpSpPr>
+      <p:sp>
+        <p:nvSpPr>
+          <p:cNvPr id="2" name="Slide Image Placeholder 1"/>
+          <p:cNvSpPr>
+            <a:spLocks noGrp="1" noRot="1" noChangeAspect="1"/>
+          </p:cNvSpPr>
+          <p:nvPr>
+            <p:ph type="sldImg"/>
+          </p:nvPr>
+        </p:nvSpPr>
+        <p:spPr/>
+      </p:sp>
+      <p:sp>
+        <p:nvSpPr>
+          <p:cNvPr id="3" name="Notes Placeholder 2"/>
+          <p:cNvSpPr>
+            <a:spLocks noGrp="1"/>
+          </p:cNvSpPr>
+          <p:nvPr>
+            <p:ph type="body" idx="1"/>
+          </p:nvPr>
+        </p:nvSpPr>
+        <p:spPr/>
+        <p:txBody>
+          <a:bodyPr/>
+          <a:lstStyle/>
+          <a:p>
+            <a:r>
+              <a:rPr lang="en-US" dirty="0"/>
+              <a:t>The Vision radar shows how close each area's technologies are to everyday use: 20 in research, 9 in pilots, 22 in early commercial use and 8 in wide use. 19 of these are already used in Great Britain. Expected within five years: 24, the soonest being AI in grid control rooms, around 2027. Security, assurance and governance has the most in the pipeline. Readiness stages and GB status are AI estimates.</a:t>
+            </a:r>
+            <a:endParaRPr lang="en-US" dirty="0"/>
+          </a:p>
+        </p:txBody>
+      </p:sp>
+      <p:sp>
+        <p:nvSpPr>
+          <p:cNvPr id="4" name="Slide Number Placeholder 3"/>
+          <p:cNvSpPr>
+            <a:spLocks noGrp="1"/>
+          </p:cNvSpPr>
+          <p:nvPr>
+            <p:ph type="sldNum" sz="quarter" idx="10"/>
+          </p:nvPr>
+        </p:nvSpPr>
+        <p:spPr/>
+        <p:txBody>
+          <a:bodyPr/>
+          <a:lstStyle/>
+          <a:p>
+            <a:fld id="{F7021451-1387-4CA6-816F-3879F97B5CBC}" type="slidenum">
+              <a:rPr lang="en-US"/>
+              <a:t>5</a:t>
+            </a:fld>
+            <a:endParaRPr lang="en-US"/>
+          </a:p>
+        </p:txBody>
+      </p:sp>
+    </p:spTree>
+    <p:extLst>
+      <p:ext uri="{BB962C8B-B14F-4D97-AF65-F5344CB8AC3E}">
+        <p14:creationId xmlns:p14="http://schemas.microsoft.com/office/powerpoint/2010/main" val="1024086991"/>
+      </p:ext>
+    </p:extLst>
+  </p:cSld>
+  <p:clrMapOvr>
+    <a:masterClrMapping/>
+  </p:clrMapOvr>
+</p:notes>
+</file>
+
+<file path=ppt/notesSlides/notesSlide6.xml><?xml version="1.0" encoding="utf-8"?>
+<p:notes xmlns:a="http://schemas.openxmlformats.org/drawingml/2006/main" xmlns:r="http://schemas.openxmlformats.org/officeDocument/2006/relationships" xmlns:p="http://schemas.openxmlformats.org/presentationml/2006/main">
+  <p:cSld>
+    <p:spTree>
+      <p:nvGrpSpPr>
+        <p:cNvPr id="1" name=""/>
+        <p:cNvGrpSpPr/>
+        <p:nvPr/>
+      </p:nvGrpSpPr>
+      <p:grpSpPr>
+        <a:xfrm>
+          <a:off x="0" y="0"/>
+          <a:ext cx="0" cy="0"/>
+          <a:chOff x="0" y="0"/>
+          <a:chExt cx="0" cy="0"/>
+        </a:xfrm>
+      </p:grpSpPr>
+      <p:sp>
+        <p:nvSpPr>
+          <p:cNvPr id="2" name="Slide Image Placeholder 1"/>
+          <p:cNvSpPr>
+            <a:spLocks noGrp="1" noRot="1" noChangeAspect="1"/>
+          </p:cNvSpPr>
+          <p:nvPr>
+            <p:ph type="sldImg"/>
+          </p:nvPr>
+        </p:nvSpPr>
+        <p:spPr/>
+      </p:sp>
+      <p:sp>
+        <p:nvSpPr>
+          <p:cNvPr id="3" name="Notes Placeholder 2"/>
+          <p:cNvSpPr>
+            <a:spLocks noGrp="1"/>
+          </p:cNvSpPr>
+          <p:nvPr>
+            <p:ph type="body" idx="1"/>
+          </p:nvPr>
+        </p:nvSpPr>
+        <p:spPr/>
+        <p:txBody>
+          <a:bodyPr/>
+          <a:lstStyle/>
+          <a:p>
+            <a:r>
+              <a:rPr lang="en-US" dirty="0"/>
+              <a:t>The Cyber lens shows how long security took to catch up: typically 3 years after a technology arrived. So, is security keeping pace? It is catching up faster than it used to.</a:t>
+            </a:r>
+            <a:endParaRPr lang="en-US" dirty="0"/>
+          </a:p>
+        </p:txBody>
+      </p:sp>
+      <p:sp>
+        <p:nvSpPr>
+          <p:cNvPr id="4" name="Slide Number Placeholder 3"/>
+          <p:cNvSpPr>
+            <a:spLocks noGrp="1"/>
+          </p:cNvSpPr>
+          <p:nvPr>
+            <p:ph type="sldNum" sz="quarter" idx="10"/>
+          </p:nvPr>
+        </p:nvSpPr>
+        <p:spPr/>
+        <p:txBody>
+          <a:bodyPr/>
+          <a:lstStyle/>
+          <a:p>
+            <a:fld id="{F7021451-1387-4CA6-816F-3879F97B5CBC}" type="slidenum">
+              <a:rPr lang="en-US"/>
+              <a:t>6</a:t>
+            </a:fld>
+            <a:endParaRPr lang="en-US"/>
+          </a:p>
+        </p:txBody>
+      </p:sp>
+    </p:spTree>
+    <p:extLst>
+      <p:ext uri="{BB962C8B-B14F-4D97-AF65-F5344CB8AC3E}">
+        <p14:creationId xmlns:p14="http://schemas.microsoft.com/office/powerpoint/2010/main" val="1024086991"/>
+      </p:ext>
+    </p:extLst>
+  </p:cSld>
+  <p:clrMapOvr>
+    <a:masterClrMapping/>
+  </p:clrMapOvr>
+</p:notes>
+</file>
+
+<file path=ppt/notesSlides/notesSlide7.xml><?xml version="1.0" encoding="utf-8"?>
+<p:notes xmlns:a="http://schemas.openxmlformats.org/drawingml/2006/main" xmlns:r="http://schemas.openxmlformats.org/officeDocument/2006/relationships" xmlns:p="http://schemas.openxmlformats.org/presentationml/2006/main">
+  <p:cSld>
+    <p:spTree>
+      <p:nvGrpSpPr>
+        <p:cNvPr id="1" name=""/>
+        <p:cNvGrpSpPr/>
+        <p:nvPr/>
+      </p:nvGrpSpPr>
+      <p:grpSpPr>
+        <a:xfrm>
+          <a:off x="0" y="0"/>
+          <a:ext cx="0" cy="0"/>
+          <a:chOff x="0" y="0"/>
+          <a:chExt cx="0" cy="0"/>
+        </a:xfrm>
+      </p:grpSpPr>
+      <p:sp>
+        <p:nvSpPr>
+          <p:cNvPr id="2" name="Slide Image Placeholder 1"/>
+          <p:cNvSpPr>
+            <a:spLocks noGrp="1" noRot="1" noChangeAspect="1"/>
+          </p:cNvSpPr>
+          <p:nvPr>
+            <p:ph type="sldImg"/>
+          </p:nvPr>
+        </p:nvSpPr>
+        <p:spPr/>
+      </p:sp>
+      <p:sp>
+        <p:nvSpPr>
+          <p:cNvPr id="3" name="Notes Placeholder 2"/>
+          <p:cNvSpPr>
+            <a:spLocks noGrp="1"/>
+          </p:cNvSpPr>
+          <p:nvPr>
+            <p:ph type="body" idx="1"/>
+          </p:nvPr>
+        </p:nvSpPr>
+        <p:spPr/>
+        <p:txBody>
+          <a:bodyPr/>
+          <a:lstStyle/>
+          <a:p>
+            <a:r>
+              <a:rPr lang="en-US" dirty="0"/>
+              <a:t>The road is getting shorter: about 12 years for companies founded before 1970, against about 3 years for those founded since 2015. Sort by speed: so far, the quickest journey from founding to fortune belongs to Thinking Machines Lab, taking under a year.</a:t>
+            </a:r>
+            <a:endParaRPr lang="en-US" dirty="0"/>
+          </a:p>
+        </p:txBody>
+      </p:sp>
+      <p:sp>
+        <p:nvSpPr>
+          <p:cNvPr id="4" name="Slide Number Placeholder 3"/>
+          <p:cNvSpPr>
+            <a:spLocks noGrp="1"/>
+          </p:cNvSpPr>
+          <p:nvPr>
+            <p:ph type="sldNum" sz="quarter" idx="10"/>
+          </p:nvPr>
+        </p:nvSpPr>
+        <p:spPr/>
+        <p:txBody>
+          <a:bodyPr/>
+          <a:lstStyle/>
+          <a:p>
+            <a:fld id="{F7021451-1387-4CA6-816F-3879F97B5CBC}" type="slidenum">
+              <a:rPr lang="en-US"/>
+              <a:t>7</a:t>
             </a:fld>
             <a:endParaRPr lang="en-US"/>
           </a:p>
@@ -2365,29 +2345,51 @@
           <a:chExt cx="0" cy="0"/>
         </a:xfrm>
       </p:grpSpPr>
-      <p:sp>
-        <p:nvSpPr>
-          <p:cNvPr id="2" name="Shape 0"/>
+      <p:pic>
+        <p:nvPicPr>
+          <p:cNvPr id="2" name="Image 0" descr="preencoded.png">    </p:cNvPr>
+          <p:cNvPicPr>
+            <a:picLocks noChangeAspect="1"/>
+          </p:cNvPicPr>
+          <p:nvPr/>
+        </p:nvPicPr>
+        <p:blipFill>
+          <a:blip r:embed="rId1"/>
+          <a:srcRect l="0" r="0" t="0" b="0"/>
+          <a:stretch/>
+        </p:blipFill>
+        <p:spPr>
+          <a:xfrm>
+            <a:off x="0" y="0"/>
+            <a:ext cx="9144000" cy="5143500"/>
+          </a:xfrm>
+          <a:prstGeom prst="rect">
+            <a:avLst/>
+          </a:prstGeom>
+        </p:spPr>
+      </p:pic>
+      <p:sp>
+        <p:nvSpPr>
+          <p:cNvPr id="3" name="Shape 0"/>
           <p:cNvSpPr/>
           <p:nvPr/>
         </p:nvSpPr>
         <p:spPr>
           <a:xfrm>
-            <a:off x="5120640" y="320040"/>
-            <a:ext cx="3840480" cy="2194560"/>
-          </a:xfrm>
-          <a:prstGeom prst="arc">
-            <a:avLst>
-              <a:gd name="adj1" fmla="val 10800000"/>
-              <a:gd name="adj2" fmla="val 21600000"/>
-            </a:avLst>
-          </a:prstGeom>
-          <a:noFill/>
-          <a:ln w="19050">
+            <a:off x="0" y="2788920"/>
+            <a:ext cx="9144000" cy="2354580"/>
+          </a:xfrm>
+          <a:prstGeom prst="rect">
+            <a:avLst/>
+          </a:prstGeom>
+          <a:solidFill>
+            <a:srgbClr val="0B1724">
+              <a:alpha val="88000"/>
+            </a:srgbClr>
+          </a:solidFill>
+          <a:ln w="12700">
             <a:solidFill>
-              <a:srgbClr val="F7C04A">
-                <a:alpha val="80000"/>
-              </a:srgbClr>
+              <a:srgbClr val="0B1724"/>
             </a:solidFill>
             <a:prstDash val="solid"/>
           </a:ln>
@@ -2395,70 +2397,14 @@
       </p:sp>
       <p:sp>
         <p:nvSpPr>
-          <p:cNvPr id="3" name="Shape 1"/>
-          <p:cNvSpPr/>
-          <p:nvPr/>
-        </p:nvSpPr>
-        <p:spPr>
-          <a:xfrm>
-            <a:off x="5440680" y="521208"/>
-            <a:ext cx="3200400" cy="1792224"/>
-          </a:xfrm>
-          <a:prstGeom prst="arc">
-            <a:avLst>
-              <a:gd name="adj1" fmla="val 10800000"/>
-              <a:gd name="adj2" fmla="val 21600000"/>
-            </a:avLst>
-          </a:prstGeom>
-          <a:noFill/>
-          <a:ln w="19050">
-            <a:solidFill>
-              <a:srgbClr val="4CD3C2">
-                <a:alpha val="68000"/>
-              </a:srgbClr>
-            </a:solidFill>
-            <a:prstDash val="solid"/>
-          </a:ln>
-        </p:spPr>
-      </p:sp>
-      <p:sp>
-        <p:nvSpPr>
-          <p:cNvPr id="4" name="Shape 2"/>
-          <p:cNvSpPr/>
-          <p:nvPr/>
-        </p:nvSpPr>
-        <p:spPr>
-          <a:xfrm>
-            <a:off x="5760720" y="722376"/>
-            <a:ext cx="2560320" cy="1389888"/>
-          </a:xfrm>
-          <a:prstGeom prst="arc">
-            <a:avLst>
-              <a:gd name="adj1" fmla="val 10800000"/>
-              <a:gd name="adj2" fmla="val 21600000"/>
-            </a:avLst>
-          </a:prstGeom>
-          <a:noFill/>
-          <a:ln w="19050">
-            <a:solidFill>
-              <a:srgbClr val="A891FF">
-                <a:alpha val="56000"/>
-              </a:srgbClr>
-            </a:solidFill>
-            <a:prstDash val="solid"/>
-          </a:ln>
-        </p:spPr>
-      </p:sp>
-      <p:sp>
-        <p:nvSpPr>
-          <p:cNvPr id="5" name="Text 3"/>
+          <p:cNvPr id="4" name="Text 1"/>
           <p:cNvSpPr txBox="1"/>
           <p:nvPr/>
         </p:nvSpPr>
         <p:spPr>
           <a:xfrm>
-            <a:off x="457200" y="320040"/>
-            <a:ext cx="6035040" cy="868680"/>
+            <a:off x="457200" y="2926080"/>
+            <a:ext cx="8229600" cy="566928"/>
           </a:xfrm>
           <a:prstGeom prst="rect">
             <a:avLst/>
@@ -2467,14 +2413,16 @@
           <a:ln/>
         </p:spPr>
         <p:txBody>
-          <a:bodyPr wrap="square" lIns="0" tIns="0" rIns="0" bIns="0" rtlCol="0" anchor="t"/>
-          <a:lstStyle/>
-          <a:p>
-            <a:pPr indent="0" marL="0">
-              <a:buNone/>
-            </a:pPr>
-            <a:r>
-              <a:rPr lang="en-US" sz="2400" dirty="0">
+          <a:bodyPr wrap="square" lIns="0" tIns="0" rIns="0" bIns="0" rtlCol="0" anchor="ctr">
+            <a:normAutofit/>
+          </a:bodyPr>
+          <a:lstStyle/>
+          <a:p>
+            <a:pPr indent="0" marL="0">
+              <a:buNone/>
+            </a:pPr>
+            <a:r>
+              <a:rPr lang="en-US" sz="2800" dirty="0">
                 <a:solidFill>
                   <a:srgbClr val="E9F2FF"/>
                 </a:solidFill>
@@ -2484,20 +2432,20 @@
               </a:rPr>
               <a:t>The Shrinking Gap from Research to Change</a:t>
             </a:r>
-            <a:endParaRPr lang="en-US" sz="2400" dirty="0"/>
-          </a:p>
-        </p:txBody>
-      </p:sp>
-      <p:sp>
-        <p:nvSpPr>
-          <p:cNvPr id="6" name="Text 4"/>
+            <a:endParaRPr lang="en-US" sz="2800" dirty="0"/>
+          </a:p>
+        </p:txBody>
+      </p:sp>
+      <p:sp>
+        <p:nvSpPr>
+          <p:cNvPr id="5" name="Text 2"/>
           <p:cNvSpPr txBox="1"/>
           <p:nvPr/>
         </p:nvSpPr>
         <p:spPr>
           <a:xfrm>
-            <a:off x="457200" y="1216152"/>
-            <a:ext cx="5852160" cy="274320"/>
+            <a:off x="457200" y="3611880"/>
+            <a:ext cx="8229600" cy="320040"/>
           </a:xfrm>
           <a:prstGeom prst="rect">
             <a:avLst/>
@@ -2513,7 +2461,7 @@
               <a:buNone/>
             </a:pPr>
             <a:r>
-              <a:rPr lang="en-US" sz="1200" dirty="0">
+              <a:rPr lang="en-US" sz="1300" dirty="0">
                 <a:solidFill>
                   <a:srgbClr val="8FA6B8"/>
                 </a:solidFill>
@@ -2521,49 +2469,22 @@
                 <a:ea typeface="Arial" pitchFamily="34" charset="-122"/>
                 <a:cs typeface="Arial" pitchFamily="34" charset="-120"/>
               </a:rPr>
-              <a:t>How long research takes to become real-world change, 1925–2036</a:t>
-            </a:r>
-            <a:endParaRPr lang="en-US" sz="1200" dirty="0"/>
-          </a:p>
-        </p:txBody>
-      </p:sp>
-      <p:sp>
-        <p:nvSpPr>
-          <p:cNvPr id="7" name="Shape 5"/>
-          <p:cNvSpPr/>
-          <p:nvPr/>
-        </p:nvSpPr>
-        <p:spPr>
-          <a:xfrm>
-            <a:off x="457200" y="1600200"/>
-            <a:ext cx="2606040" cy="1097280"/>
-          </a:xfrm>
-          <a:prstGeom prst="roundRect">
-            <a:avLst>
-              <a:gd name="adj" fmla="val 10000"/>
-            </a:avLst>
-          </a:prstGeom>
-          <a:solidFill>
-            <a:srgbClr val="13283A"/>
-          </a:solidFill>
-          <a:ln w="9525">
-            <a:solidFill>
-              <a:srgbClr val="22384A"/>
-            </a:solidFill>
-            <a:prstDash val="solid"/>
-          </a:ln>
-        </p:spPr>
-      </p:sp>
-      <p:sp>
-        <p:nvSpPr>
-          <p:cNvPr id="8" name="Text 6"/>
+              <a:t>How long it takes research to become real-world change, and whether AI is shortening the journey.</a:t>
+            </a:r>
+            <a:endParaRPr lang="en-US" sz="1300" dirty="0"/>
+          </a:p>
+        </p:txBody>
+      </p:sp>
+      <p:sp>
+        <p:nvSpPr>
+          <p:cNvPr id="6" name="Text 3"/>
           <p:cNvSpPr txBox="1"/>
           <p:nvPr/>
         </p:nvSpPr>
         <p:spPr>
           <a:xfrm>
-            <a:off x="640080" y="1709928"/>
-            <a:ext cx="2240280" cy="548640"/>
+            <a:off x="457200" y="4023360"/>
+            <a:ext cx="8229600" cy="274320"/>
           </a:xfrm>
           <a:prstGeom prst="rect">
             <a:avLst/>
@@ -2572,39 +2493,37 @@
           <a:ln/>
         </p:spPr>
         <p:txBody>
-          <a:bodyPr wrap="square" lIns="0" tIns="0" rIns="0" bIns="0" rtlCol="0" anchor="ctr">
-            <a:normAutofit/>
-          </a:bodyPr>
-          <a:lstStyle/>
-          <a:p>
-            <a:pPr indent="0" marL="0">
-              <a:buNone/>
-            </a:pPr>
-            <a:r>
-              <a:rPr lang="en-US" sz="2800" b="1" dirty="0">
+          <a:bodyPr wrap="square" lIns="0" tIns="0" rIns="0" bIns="0" rtlCol="0" anchor="ctr"/>
+          <a:lstStyle/>
+          <a:p>
+            <a:pPr indent="0" marL="0">
+              <a:buNone/>
+            </a:pPr>
+            <a:r>
+              <a:rPr lang="en-US" sz="1000" dirty="0">
                 <a:solidFill>
                   <a:srgbClr val="F7C04A"/>
                 </a:solidFill>
-                <a:latin typeface="Georgia" pitchFamily="34" charset="0"/>
-                <a:ea typeface="Georgia" pitchFamily="34" charset="-122"/>
-                <a:cs typeface="Georgia" pitchFamily="34" charset="-120"/>
-              </a:rPr>
-              <a:t>6 → 9 yrs</a:t>
-            </a:r>
-            <a:endParaRPr lang="en-US" sz="2800" dirty="0"/>
-          </a:p>
-        </p:txBody>
-      </p:sp>
-      <p:sp>
-        <p:nvSpPr>
-          <p:cNvPr id="9" name="Text 7"/>
+                <a:latin typeface="Arial" pitchFamily="34" charset="0"/>
+                <a:ea typeface="Arial" pitchFamily="34" charset="-122"/>
+                <a:cs typeface="Arial" pitchFamily="34" charset="-120"/>
+              </a:rPr>
+              <a:t>474 milestones across 11 fields, 1925 to 2036  •  29 October 2026</a:t>
+            </a:r>
+            <a:endParaRPr lang="en-US" sz="1000" dirty="0"/>
+          </a:p>
+        </p:txBody>
+      </p:sp>
+      <p:sp>
+        <p:nvSpPr>
+          <p:cNvPr id="8" name="Text 4"/>
           <p:cNvSpPr txBox="1"/>
           <p:nvPr/>
         </p:nvSpPr>
         <p:spPr>
           <a:xfrm>
-            <a:off x="640080" y="2276856"/>
-            <a:ext cx="2240280" cy="365760"/>
+            <a:off x="365760" y="4846320"/>
+            <a:ext cx="7955280" cy="201168"/>
           </a:xfrm>
           <a:prstGeom prst="rect">
             <a:avLst/>
@@ -2613,14 +2532,14 @@
           <a:ln/>
         </p:spPr>
         <p:txBody>
-          <a:bodyPr wrap="square" lIns="0" tIns="0" rIns="0" bIns="0" rtlCol="0" anchor="t"/>
-          <a:lstStyle/>
-          <a:p>
-            <a:pPr indent="0" marL="0">
-              <a:buNone/>
-            </a:pPr>
-            <a:r>
-              <a:rPr lang="en-US" sz="900" dirty="0">
+          <a:bodyPr wrap="square" lIns="0" tIns="0" rIns="0" bIns="0" rtlCol="0" anchor="ctr"/>
+          <a:lstStyle/>
+          <a:p>
+            <a:pPr indent="0" marL="0">
+              <a:buNone/>
+            </a:pPr>
+            <a:r>
+              <a:rPr lang="en-US" sz="650" dirty="0">
                 <a:solidFill>
                   <a:srgbClr val="8FA6B8"/>
                 </a:solidFill>
@@ -2628,49 +2547,22 @@
                 <a:ea typeface="Arial" pitchFamily="34" charset="-122"/>
                 <a:cs typeface="Arial" pitchFamily="34" charset="-120"/>
               </a:rPr>
-              <a:t>Median gap for milestones landing before 1970, and since 2000</a:t>
-            </a:r>
-            <a:endParaRPr lang="en-US" sz="900" dirty="0"/>
-          </a:p>
-        </p:txBody>
-      </p:sp>
-      <p:sp>
-        <p:nvSpPr>
-          <p:cNvPr id="10" name="Shape 8"/>
-          <p:cNvSpPr/>
-          <p:nvPr/>
-        </p:nvSpPr>
-        <p:spPr>
-          <a:xfrm>
-            <a:off x="3268980" y="1600200"/>
-            <a:ext cx="2606040" cy="1097280"/>
-          </a:xfrm>
-          <a:prstGeom prst="roundRect">
-            <a:avLst>
-              <a:gd name="adj" fmla="val 10000"/>
-            </a:avLst>
-          </a:prstGeom>
-          <a:solidFill>
-            <a:srgbClr val="13283A"/>
-          </a:solidFill>
-          <a:ln w="9525">
-            <a:solidFill>
-              <a:srgbClr val="22384A"/>
-            </a:solidFill>
-            <a:prstDash val="solid"/>
-          </a:ln>
-        </p:spPr>
-      </p:sp>
-      <p:sp>
-        <p:nvSpPr>
-          <p:cNvPr id="11" name="Text 9"/>
+              <a:t>Stuart Okin, personal project. Data revision 20 (2026-10-29), narrative version 12. AI-maintained data and narrative, no human review; may contain errors. Selection: All fields.</a:t>
+            </a:r>
+            <a:endParaRPr lang="en-US" sz="650" dirty="0"/>
+          </a:p>
+        </p:txBody>
+      </p:sp>
+      <p:sp>
+        <p:nvSpPr>
+          <p:cNvPr id="9" name="Text 5"/>
           <p:cNvSpPr txBox="1"/>
           <p:nvPr/>
         </p:nvSpPr>
         <p:spPr>
           <a:xfrm>
-            <a:off x="3451860" y="1709928"/>
-            <a:ext cx="2240280" cy="548640"/>
+            <a:off x="8412480" y="4846320"/>
+            <a:ext cx="365760" cy="201168"/>
           </a:xfrm>
           <a:prstGeom prst="rect">
             <a:avLst/>
@@ -2679,55 +2571,14 @@
           <a:ln/>
         </p:spPr>
         <p:txBody>
-          <a:bodyPr wrap="square" lIns="0" tIns="0" rIns="0" bIns="0" rtlCol="0" anchor="ctr">
-            <a:normAutofit/>
-          </a:bodyPr>
-          <a:lstStyle/>
-          <a:p>
-            <a:pPr indent="0" marL="0">
-              <a:buNone/>
-            </a:pPr>
-            <a:r>
-              <a:rPr lang="en-US" sz="2200" b="1" dirty="0">
-                <a:solidFill>
-                  <a:srgbClr val="4CD3C2"/>
-                </a:solidFill>
-                <a:latin typeface="Georgia" pitchFamily="34" charset="0"/>
-                <a:ea typeface="Georgia" pitchFamily="34" charset="-122"/>
-                <a:cs typeface="Georgia" pitchFamily="34" charset="-120"/>
-              </a:rPr>
-              <a:t>4 vs 6 yrs</a:t>
-            </a:r>
-            <a:endParaRPr lang="en-US" sz="2200" dirty="0"/>
-          </a:p>
-        </p:txBody>
-      </p:sp>
-      <p:sp>
-        <p:nvSpPr>
-          <p:cNvPr id="12" name="Text 10"/>
-          <p:cNvSpPr txBox="1"/>
-          <p:nvPr/>
-        </p:nvSpPr>
-        <p:spPr>
-          <a:xfrm>
-            <a:off x="3451860" y="2276856"/>
-            <a:ext cx="2240280" cy="365760"/>
-          </a:xfrm>
-          <a:prstGeom prst="rect">
-            <a:avLst/>
-          </a:prstGeom>
-          <a:noFill/>
-          <a:ln/>
-        </p:spPr>
-        <p:txBody>
-          <a:bodyPr wrap="square" lIns="0" tIns="0" rIns="0" bIns="0" rtlCol="0" anchor="t"/>
-          <a:lstStyle/>
-          <a:p>
-            <a:pPr indent="0" marL="0">
-              <a:buNone/>
-            </a:pPr>
-            <a:r>
-              <a:rPr lang="en-US" sz="900" dirty="0">
+          <a:bodyPr wrap="square" lIns="0" tIns="0" rIns="0" bIns="0" rtlCol="0" anchor="ctr"/>
+          <a:lstStyle/>
+          <a:p>
+            <a:pPr algn="r" indent="0" marL="0">
+              <a:buNone/>
+            </a:pPr>
+            <a:r>
+              <a:rPr lang="en-US" sz="700" dirty="0">
                 <a:solidFill>
                   <a:srgbClr val="8FA6B8"/>
                 </a:solidFill>
@@ -2735,210 +2586,9 @@
                 <a:ea typeface="Arial" pitchFamily="34" charset="-122"/>
                 <a:cs typeface="Arial" pitchFamily="34" charset="-120"/>
               </a:rPr>
-              <a:t>AI-driven work against everything else (research since 2010)</a:t>
-            </a:r>
-            <a:endParaRPr lang="en-US" sz="900" dirty="0"/>
-          </a:p>
-        </p:txBody>
-      </p:sp>
-      <p:sp>
-        <p:nvSpPr>
-          <p:cNvPr id="13" name="Shape 11"/>
-          <p:cNvSpPr/>
-          <p:nvPr/>
-        </p:nvSpPr>
-        <p:spPr>
-          <a:xfrm>
-            <a:off x="6080760" y="1600200"/>
-            <a:ext cx="2606040" cy="1097280"/>
-          </a:xfrm>
-          <a:prstGeom prst="roundRect">
-            <a:avLst>
-              <a:gd name="adj" fmla="val 10000"/>
-            </a:avLst>
-          </a:prstGeom>
-          <a:solidFill>
-            <a:srgbClr val="13283A"/>
-          </a:solidFill>
-          <a:ln w="9525">
-            <a:solidFill>
-              <a:srgbClr val="22384A"/>
-            </a:solidFill>
-            <a:prstDash val="solid"/>
-          </a:ln>
-        </p:spPr>
-      </p:sp>
-      <p:sp>
-        <p:nvSpPr>
-          <p:cNvPr id="14" name="Text 12"/>
-          <p:cNvSpPr txBox="1"/>
-          <p:nvPr/>
-        </p:nvSpPr>
-        <p:spPr>
-          <a:xfrm>
-            <a:off x="6263640" y="1709928"/>
-            <a:ext cx="2240280" cy="548640"/>
-          </a:xfrm>
-          <a:prstGeom prst="rect">
-            <a:avLst/>
-          </a:prstGeom>
-          <a:noFill/>
-          <a:ln/>
-        </p:spPr>
-        <p:txBody>
-          <a:bodyPr wrap="square" lIns="0" tIns="0" rIns="0" bIns="0" rtlCol="0" anchor="ctr">
-            <a:normAutofit/>
-          </a:bodyPr>
-          <a:lstStyle/>
-          <a:p>
-            <a:pPr indent="0" marL="0">
-              <a:buNone/>
-            </a:pPr>
-            <a:r>
-              <a:rPr lang="en-US" sz="2800" b="1" dirty="0">
-                <a:solidFill>
-                  <a:srgbClr val="A891FF"/>
-                </a:solidFill>
-                <a:latin typeface="Georgia" pitchFamily="34" charset="0"/>
-                <a:ea typeface="Georgia" pitchFamily="34" charset="-122"/>
-                <a:cs typeface="Georgia" pitchFamily="34" charset="-120"/>
-              </a:rPr>
-              <a:t>449</a:t>
-            </a:r>
-            <a:endParaRPr lang="en-US" sz="2800" dirty="0"/>
-          </a:p>
-        </p:txBody>
-      </p:sp>
-      <p:sp>
-        <p:nvSpPr>
-          <p:cNvPr id="15" name="Text 13"/>
-          <p:cNvSpPr txBox="1"/>
-          <p:nvPr/>
-        </p:nvSpPr>
-        <p:spPr>
-          <a:xfrm>
-            <a:off x="6263640" y="2276856"/>
-            <a:ext cx="2240280" cy="365760"/>
-          </a:xfrm>
-          <a:prstGeom prst="rect">
-            <a:avLst/>
-          </a:prstGeom>
-          <a:noFill/>
-          <a:ln/>
-        </p:spPr>
-        <p:txBody>
-          <a:bodyPr wrap="square" lIns="0" tIns="0" rIns="0" bIns="0" rtlCol="0" anchor="t"/>
-          <a:lstStyle/>
-          <a:p>
-            <a:pPr indent="0" marL="0">
-              <a:buNone/>
-            </a:pPr>
-            <a:r>
-              <a:rPr lang="en-US" sz="900" dirty="0">
-                <a:solidFill>
-                  <a:srgbClr val="8FA6B8"/>
-                </a:solidFill>
-                <a:latin typeface="Arial" pitchFamily="34" charset="0"/>
-                <a:ea typeface="Arial" pitchFamily="34" charset="-122"/>
-                <a:cs typeface="Arial" pitchFamily="34" charset="-120"/>
-              </a:rPr>
-              <a:t>Milestones in this selection, across 11 fields</a:t>
-            </a:r>
-            <a:endParaRPr lang="en-US" sz="900" dirty="0"/>
-          </a:p>
-        </p:txBody>
-      </p:sp>
-      <p:graphicFrame>
-        <p:nvGraphicFramePr>
-          <p:cNvPr id="16" name="Chart 0" descr=""/>
-          <p:cNvGraphicFramePr/>
-          <p:nvPr/>
-        </p:nvGraphicFramePr>
-        <p:xfrm>
-          <a:off x="365760" y="2834640"/>
-          <a:ext cx="8412480" cy="1828800"/>
-        </p:xfrm>
-        <a:graphic xmlns:a="http://schemas.openxmlformats.org/drawingml/2006/main">
-          <a:graphicData uri="http://schemas.openxmlformats.org/drawingml/2006/chart">
-            <c:chart xmlns:c="http://schemas.openxmlformats.org/drawingml/2006/chart" r:id="rId1"/>
-          </a:graphicData>
-        </a:graphic>
-      </p:graphicFrame>
-      <p:sp>
-        <p:nvSpPr>
-          <p:cNvPr id="18" name="Text 14"/>
-          <p:cNvSpPr txBox="1"/>
-          <p:nvPr/>
-        </p:nvSpPr>
-        <p:spPr>
-          <a:xfrm>
-            <a:off x="457200" y="4754880"/>
-            <a:ext cx="7680960" cy="274320"/>
-          </a:xfrm>
-          <a:prstGeom prst="rect">
-            <a:avLst/>
-          </a:prstGeom>
-          <a:noFill/>
-          <a:ln/>
-        </p:spPr>
-        <p:txBody>
-          <a:bodyPr wrap="square" lIns="0" tIns="0" rIns="0" bIns="0" rtlCol="0" anchor="ctr"/>
-          <a:lstStyle/>
-          <a:p>
-            <a:pPr indent="0" marL="0">
-              <a:buNone/>
-            </a:pPr>
-            <a:r>
-              <a:rPr lang="en-US" sz="700" dirty="0">
-                <a:solidFill>
-                  <a:srgbClr val="8FA6B8"/>
-                </a:solidFill>
-                <a:latin typeface="Arial" pitchFamily="34" charset="0"/>
-                <a:ea typeface="Arial" pitchFamily="34" charset="-122"/>
-                <a:cs typeface="Arial" pitchFamily="34" charset="-120"/>
-              </a:rPr>
-              <a:t>Stuart Okin, personal project. Data as of 2026-10-27, maintained by AI agents without human review and may contain errors. Outlook years are AI estimates. Selection: All fields.</a:t>
+              <a:t>1</a:t>
             </a:r>
             <a:endParaRPr lang="en-US" sz="700" dirty="0"/>
-          </a:p>
-        </p:txBody>
-      </p:sp>
-      <p:sp>
-        <p:nvSpPr>
-          <p:cNvPr id="19" name="Text 15"/>
-          <p:cNvSpPr txBox="1"/>
-          <p:nvPr/>
-        </p:nvSpPr>
-        <p:spPr>
-          <a:xfrm>
-            <a:off x="8321040" y="4754880"/>
-            <a:ext cx="365760" cy="274320"/>
-          </a:xfrm>
-          <a:prstGeom prst="rect">
-            <a:avLst/>
-          </a:prstGeom>
-          <a:noFill/>
-          <a:ln/>
-        </p:spPr>
-        <p:txBody>
-          <a:bodyPr wrap="square" lIns="0" tIns="0" rIns="0" bIns="0" rtlCol="0" anchor="ctr"/>
-          <a:lstStyle/>
-          <a:p>
-            <a:pPr algn="r" indent="0" marL="0">
-              <a:buNone/>
-            </a:pPr>
-            <a:r>
-              <a:rPr lang="en-US" sz="800" dirty="0">
-                <a:solidFill>
-                  <a:srgbClr val="8FA6B8"/>
-                </a:solidFill>
-                <a:latin typeface="Arial" pitchFamily="34" charset="0"/>
-                <a:ea typeface="Arial" pitchFamily="34" charset="-122"/>
-                <a:cs typeface="Arial" pitchFamily="34" charset="-120"/>
-              </a:rPr>
-              <a:t>1</a:t>
-            </a:r>
-            <a:endParaRPr lang="en-US" sz="800" dirty="0"/>
           </a:p>
         </p:txBody>
       </p:sp>
@@ -2976,14 +2626,39 @@
       </p:grpSpPr>
       <p:sp>
         <p:nvSpPr>
-          <p:cNvPr id="2" name="Text 0"/>
+          <p:cNvPr id="2" name="Shape 0"/>
+          <p:cNvSpPr/>
+          <p:nvPr/>
+        </p:nvSpPr>
+        <p:spPr>
+          <a:xfrm>
+            <a:off x="365760" y="347472"/>
+            <a:ext cx="73152" cy="457200"/>
+          </a:xfrm>
+          <a:prstGeom prst="rect">
+            <a:avLst/>
+          </a:prstGeom>
+          <a:solidFill>
+            <a:srgbClr val="F7C04A"/>
+          </a:solidFill>
+          <a:ln w="12700">
+            <a:solidFill>
+              <a:srgbClr val="F7C04A"/>
+            </a:solidFill>
+            <a:prstDash val="solid"/>
+          </a:ln>
+        </p:spPr>
+      </p:sp>
+      <p:sp>
+        <p:nvSpPr>
+          <p:cNvPr id="3" name="Text 1"/>
           <p:cNvSpPr txBox="1"/>
           <p:nvPr/>
         </p:nvSpPr>
         <p:spPr>
           <a:xfrm>
-            <a:off x="457200" y="320040"/>
-            <a:ext cx="8229600" cy="548640"/>
+            <a:off x="548640" y="274320"/>
+            <a:ext cx="8138160" cy="457200"/>
           </a:xfrm>
           <a:prstGeom prst="rect">
             <a:avLst/>
@@ -3007,42 +2682,65 @@
                 <a:ea typeface="Georgia" pitchFamily="34" charset="-122"/>
                 <a:cs typeface="Georgia" pitchFamily="34" charset="-120"/>
               </a:rPr>
-              <a:t>Where the gap has shrunk, and where it hasn’t</a:t>
+              <a:t>The headline</a:t>
             </a:r>
             <a:endParaRPr lang="en-US" sz="2400" dirty="0"/>
           </a:p>
         </p:txBody>
       </p:sp>
-      <p:graphicFrame>
-        <p:nvGraphicFramePr>
-          <p:cNvPr id="3" name="Chart 0" descr=""/>
-          <p:cNvGraphicFramePr/>
-          <p:nvPr/>
-        </p:nvGraphicFramePr>
-        <p:xfrm>
-          <a:off x="365760" y="960120"/>
-          <a:ext cx="5486400" cy="3703320"/>
-        </p:xfrm>
-        <a:graphic xmlns:a="http://schemas.openxmlformats.org/drawingml/2006/main">
-          <a:graphicData uri="http://schemas.openxmlformats.org/drawingml/2006/chart">
-            <c:chart xmlns:c="http://schemas.openxmlformats.org/drawingml/2006/chart" r:id="rId1"/>
-          </a:graphicData>
-        </a:graphic>
-      </p:graphicFrame>
-      <p:sp>
-        <p:nvSpPr>
-          <p:cNvPr id="4" name="Shape 1"/>
+      <p:sp>
+        <p:nvSpPr>
+          <p:cNvPr id="4" name="Text 2"/>
+          <p:cNvSpPr txBox="1"/>
+          <p:nvPr/>
+        </p:nvSpPr>
+        <p:spPr>
+          <a:xfrm>
+            <a:off x="548640" y="713232"/>
+            <a:ext cx="8138160" cy="256032"/>
+          </a:xfrm>
+          <a:prstGeom prst="rect">
+            <a:avLst/>
+          </a:prstGeom>
+          <a:noFill/>
+          <a:ln/>
+        </p:spPr>
+        <p:txBody>
+          <a:bodyPr wrap="square" lIns="0" tIns="0" rIns="0" bIns="0" rtlCol="0" anchor="ctr"/>
+          <a:lstStyle/>
+          <a:p>
+            <a:pPr indent="0" marL="0">
+              <a:buNone/>
+            </a:pPr>
+            <a:r>
+              <a:rPr lang="en-US" sz="1050" dirty="0">
+                <a:solidFill>
+                  <a:srgbClr val="8FA6B8"/>
+                </a:solidFill>
+                <a:latin typeface="Arial" pitchFamily="34" charset="0"/>
+                <a:ea typeface="Arial" pitchFamily="34" charset="-122"/>
+                <a:cs typeface="Arial" pitchFamily="34" charset="-120"/>
+              </a:rPr>
+              <a:t>Median years, for the current selection</a:t>
+            </a:r>
+            <a:endParaRPr lang="en-US" sz="1050" dirty="0"/>
+          </a:p>
+        </p:txBody>
+      </p:sp>
+      <p:sp>
+        <p:nvSpPr>
+          <p:cNvPr id="5" name="Shape 3"/>
           <p:cNvSpPr/>
           <p:nvPr/>
         </p:nvSpPr>
         <p:spPr>
           <a:xfrm>
-            <a:off x="6080760" y="960120"/>
-            <a:ext cx="2606040" cy="3703320"/>
+            <a:off x="365760" y="1143000"/>
+            <a:ext cx="2697480" cy="2743200"/>
           </a:xfrm>
           <a:prstGeom prst="roundRect">
             <a:avLst>
-              <a:gd name="adj" fmla="val 4211"/>
+              <a:gd name="adj" fmla="val 2712"/>
             </a:avLst>
           </a:prstGeom>
           <a:solidFill>
@@ -3058,14 +2756,39 @@
       </p:sp>
       <p:sp>
         <p:nvSpPr>
-          <p:cNvPr id="5" name="Text 2"/>
+          <p:cNvPr id="6" name="Shape 4"/>
+          <p:cNvSpPr/>
+          <p:nvPr/>
+        </p:nvSpPr>
+        <p:spPr>
+          <a:xfrm>
+            <a:off x="365760" y="1252728"/>
+            <a:ext cx="45720" cy="2523744"/>
+          </a:xfrm>
+          <a:prstGeom prst="rect">
+            <a:avLst/>
+          </a:prstGeom>
+          <a:solidFill>
+            <a:srgbClr val="F7C04A"/>
+          </a:solidFill>
+          <a:ln w="12700">
+            <a:solidFill>
+              <a:srgbClr val="F7C04A"/>
+            </a:solidFill>
+            <a:prstDash val="solid"/>
+          </a:ln>
+        </p:spPr>
+      </p:sp>
+      <p:sp>
+        <p:nvSpPr>
+          <p:cNvPr id="7" name="Text 5"/>
           <p:cNvSpPr txBox="1"/>
           <p:nvPr/>
         </p:nvSpPr>
         <p:spPr>
           <a:xfrm>
-            <a:off x="6263640" y="1143000"/>
-            <a:ext cx="2286000" cy="3383280"/>
+            <a:off x="548640" y="1261872"/>
+            <a:ext cx="2423160" cy="640080"/>
           </a:xfrm>
           <a:prstGeom prst="rect">
             <a:avLst/>
@@ -3074,165 +2797,39 @@
           <a:ln/>
         </p:spPr>
         <p:txBody>
-          <a:bodyPr wrap="square" lIns="0" tIns="0" rIns="0" bIns="0" rtlCol="0" anchor="t"/>
-          <a:lstStyle/>
-          <a:p>
-            <a:pPr indent="0" marL="0">
-              <a:spcAft>
-                <a:spcPts val="400"/>
-              </a:spcAft>
-              <a:buNone/>
-            </a:pPr>
-            <a:r>
-              <a:rPr lang="en-US" sz="1100" b="1" dirty="0">
-                <a:solidFill>
-                  <a:srgbClr val="4CD3C2"/>
-                </a:solidFill>
-                <a:latin typeface="Arial" pitchFamily="34" charset="0"/>
-                <a:ea typeface="Arial" pitchFamily="34" charset="-122"/>
-                <a:cs typeface="Arial" pitchFamily="34" charset="-120"/>
-              </a:rPr>
-              <a:t>Shrinking fastest</a:t>
-            </a:r>
-            <a:endParaRPr lang="en-US" sz="1100" dirty="0"/>
-          </a:p>
-          <a:p>
-            <a:pPr marL="342900" indent="-342900">
-              <a:spcAft>
-                <a:spcPts val="400"/>
-              </a:spcAft>
-              <a:buSzPct val="100000"/>
-              <a:buChar char="•"/>
-            </a:pPr>
-            <a:r>
-              <a:rPr lang="en-US" sz="1000" dirty="0">
-                <a:solidFill>
-                  <a:srgbClr val="E9F2FF"/>
-                </a:solidFill>
-                <a:latin typeface="Arial" pitchFamily="34" charset="0"/>
-                <a:ea typeface="Arial" pitchFamily="34" charset="-122"/>
-                <a:cs typeface="Arial" pitchFamily="34" charset="-120"/>
-              </a:rPr>
-              <a:t>Artificial intelligence: 9 → 4 years</a:t>
-            </a:r>
-            <a:endParaRPr lang="en-US" sz="1100" dirty="0"/>
-          </a:p>
-          <a:p>
-            <a:pPr marL="342900" indent="-342900">
-              <a:spcAft>
-                <a:spcPts val="400"/>
-              </a:spcAft>
-              <a:buSzPct val="100000"/>
-              <a:buChar char="•"/>
-            </a:pPr>
-            <a:r>
-              <a:rPr lang="en-US" sz="1000" dirty="0">
-                <a:solidFill>
-                  <a:srgbClr val="E9F2FF"/>
-                </a:solidFill>
-                <a:latin typeface="Arial" pitchFamily="34" charset="0"/>
-                <a:ea typeface="Arial" pitchFamily="34" charset="-122"/>
-                <a:cs typeface="Arial" pitchFamily="34" charset="-120"/>
-              </a:rPr>
-              <a:t>Space: 15 → 14 years</a:t>
-            </a:r>
-            <a:endParaRPr lang="en-US" sz="1100" dirty="0"/>
-          </a:p>
-          <a:p>
-            <a:pPr indent="0" marL="0">
-              <a:spcAft>
-                <a:spcPts val="400"/>
-              </a:spcAft>
-              <a:buNone/>
-            </a:pPr>
-            <a:r>
-              <a:rPr lang="en-US" sz="1100" b="1" dirty="0">
+          <a:bodyPr wrap="square" lIns="0" tIns="0" rIns="0" bIns="0" rtlCol="0" anchor="ctr">
+            <a:normAutofit/>
+          </a:bodyPr>
+          <a:lstStyle/>
+          <a:p>
+            <a:pPr indent="0" marL="0">
+              <a:buNone/>
+            </a:pPr>
+            <a:r>
+              <a:rPr lang="en-US" sz="2800" dirty="0">
                 <a:solidFill>
                   <a:srgbClr val="F7C04A"/>
                 </a:solidFill>
-                <a:latin typeface="Arial" pitchFamily="34" charset="0"/>
-                <a:ea typeface="Arial" pitchFamily="34" charset="-122"/>
-                <a:cs typeface="Arial" pitchFamily="34" charset="-120"/>
-              </a:rPr>
-              <a:t>Not shrinking</a:t>
-            </a:r>
-            <a:endParaRPr lang="en-US" sz="1100" dirty="0"/>
-          </a:p>
-          <a:p>
-            <a:pPr marL="342900" indent="-342900">
-              <a:spcAft>
-                <a:spcPts val="400"/>
-              </a:spcAft>
-              <a:buSzPct val="100000"/>
-              <a:buChar char="•"/>
-            </a:pPr>
-            <a:r>
-              <a:rPr lang="en-US" sz="1000" dirty="0">
-                <a:solidFill>
-                  <a:srgbClr val="E9F2FF"/>
-                </a:solidFill>
-                <a:latin typeface="Arial" pitchFamily="34" charset="0"/>
-                <a:ea typeface="Arial" pitchFamily="34" charset="-122"/>
-                <a:cs typeface="Arial" pitchFamily="34" charset="-120"/>
-              </a:rPr>
-              <a:t>Quantum: 9 → 17 years</a:t>
-            </a:r>
-            <a:endParaRPr lang="en-US" sz="1100" dirty="0"/>
-          </a:p>
-          <a:p>
-            <a:pPr marL="342900" indent="-342900">
-              <a:spcAft>
-                <a:spcPts val="400"/>
-              </a:spcAft>
-              <a:buSzPct val="100000"/>
-              <a:buChar char="•"/>
-            </a:pPr>
-            <a:r>
-              <a:rPr lang="en-US" sz="1000" dirty="0">
-                <a:solidFill>
-                  <a:srgbClr val="E9F2FF"/>
-                </a:solidFill>
-                <a:latin typeface="Arial" pitchFamily="34" charset="0"/>
-                <a:ea typeface="Arial" pitchFamily="34" charset="-122"/>
-                <a:cs typeface="Arial" pitchFamily="34" charset="-120"/>
-              </a:rPr>
-              <a:t>Materials science: 6 → 17 years</a:t>
-            </a:r>
-            <a:endParaRPr lang="en-US" sz="1100" dirty="0"/>
-          </a:p>
-          <a:p>
-            <a:pPr marL="342900" indent="-342900">
-              <a:spcAft>
-                <a:spcPts val="400"/>
-              </a:spcAft>
-              <a:buSzPct val="100000"/>
-              <a:buChar char="•"/>
-            </a:pPr>
-            <a:r>
-              <a:rPr lang="en-US" sz="1000" dirty="0">
-                <a:solidFill>
-                  <a:srgbClr val="E9F2FF"/>
-                </a:solidFill>
-                <a:latin typeface="Arial" pitchFamily="34" charset="0"/>
-                <a:ea typeface="Arial" pitchFamily="34" charset="-122"/>
-                <a:cs typeface="Arial" pitchFamily="34" charset="-120"/>
-              </a:rPr>
-              <a:t>Life sciences: 7 → 15 years</a:t>
-            </a:r>
-            <a:endParaRPr lang="en-US" sz="1100" dirty="0"/>
-          </a:p>
-        </p:txBody>
-      </p:sp>
-      <p:sp>
-        <p:nvSpPr>
-          <p:cNvPr id="7" name="Text 3"/>
+                <a:latin typeface="Georgia" pitchFamily="34" charset="0"/>
+                <a:ea typeface="Georgia" pitchFamily="34" charset="-122"/>
+                <a:cs typeface="Georgia" pitchFamily="34" charset="-120"/>
+              </a:rPr>
+              <a:t>6 → 9 yrs</a:t>
+            </a:r>
+            <a:endParaRPr lang="en-US" sz="2800" dirty="0"/>
+          </a:p>
+        </p:txBody>
+      </p:sp>
+      <p:sp>
+        <p:nvSpPr>
+          <p:cNvPr id="8" name="Text 6"/>
           <p:cNvSpPr txBox="1"/>
           <p:nvPr/>
         </p:nvSpPr>
         <p:spPr>
           <a:xfrm>
-            <a:off x="457200" y="4754880"/>
-            <a:ext cx="7680960" cy="274320"/>
+            <a:off x="548640" y="1938528"/>
+            <a:ext cx="2423160" cy="548640"/>
           </a:xfrm>
           <a:prstGeom prst="rect">
             <a:avLst/>
@@ -3241,37 +2838,37 @@
           <a:ln/>
         </p:spPr>
         <p:txBody>
-          <a:bodyPr wrap="square" lIns="0" tIns="0" rIns="0" bIns="0" rtlCol="0" anchor="ctr"/>
-          <a:lstStyle/>
-          <a:p>
-            <a:pPr indent="0" marL="0">
-              <a:buNone/>
-            </a:pPr>
-            <a:r>
-              <a:rPr lang="en-US" sz="700" dirty="0">
-                <a:solidFill>
-                  <a:srgbClr val="8FA6B8"/>
-                </a:solidFill>
-                <a:latin typeface="Arial" pitchFamily="34" charset="0"/>
-                <a:ea typeface="Arial" pitchFamily="34" charset="-122"/>
-                <a:cs typeface="Arial" pitchFamily="34" charset="-120"/>
-              </a:rPr>
-              <a:t>Stuart Okin, personal project. Data as of 2026-10-27, maintained by AI agents without human review and may contain errors. Outlook years are AI estimates. Selection: All fields.</a:t>
-            </a:r>
-            <a:endParaRPr lang="en-US" sz="700" dirty="0"/>
-          </a:p>
-        </p:txBody>
-      </p:sp>
-      <p:sp>
-        <p:nvSpPr>
-          <p:cNvPr id="8" name="Text 4"/>
+          <a:bodyPr wrap="square" lIns="0" tIns="0" rIns="0" bIns="0" rtlCol="0" anchor="t"/>
+          <a:lstStyle/>
+          <a:p>
+            <a:pPr indent="0" marL="0">
+              <a:buNone/>
+            </a:pPr>
+            <a:r>
+              <a:rPr lang="en-US" sz="950" dirty="0">
+                <a:solidFill>
+                  <a:srgbClr val="E9F2FF"/>
+                </a:solidFill>
+                <a:latin typeface="Arial" pitchFamily="34" charset="0"/>
+                <a:ea typeface="Arial" pitchFamily="34" charset="-122"/>
+                <a:cs typeface="Arial" pitchFamily="34" charset="-120"/>
+              </a:rPr>
+              <a:t>From research to first product: milestones landing before 1970, against since 2000</a:t>
+            </a:r>
+            <a:endParaRPr lang="en-US" sz="950" dirty="0"/>
+          </a:p>
+        </p:txBody>
+      </p:sp>
+      <p:sp>
+        <p:nvSpPr>
+          <p:cNvPr id="9" name="Text 7"/>
           <p:cNvSpPr txBox="1"/>
           <p:nvPr/>
         </p:nvSpPr>
         <p:spPr>
           <a:xfrm>
-            <a:off x="8321040" y="4754880"/>
-            <a:ext cx="365760" cy="274320"/>
+            <a:off x="548640" y="2560320"/>
+            <a:ext cx="2423160" cy="1234440"/>
           </a:xfrm>
           <a:prstGeom prst="rect">
             <a:avLst/>
@@ -3280,14 +2877,600 @@
           <a:ln/>
         </p:spPr>
         <p:txBody>
+          <a:bodyPr wrap="square" lIns="0" tIns="0" rIns="0" bIns="0" rtlCol="0" anchor="t"/>
+          <a:lstStyle/>
+          <a:p>
+            <a:pPr indent="0" marL="0">
+              <a:buNone/>
+            </a:pPr>
+            <a:r>
+              <a:rPr lang="en-US" sz="800" b="1" dirty="0">
+                <a:solidFill>
+                  <a:srgbClr val="8FA6B8"/>
+                </a:solidFill>
+                <a:latin typeface="Arial" pitchFamily="34" charset="0"/>
+                <a:ea typeface="Arial" pitchFamily="34" charset="-122"/>
+                <a:cs typeface="Arial" pitchFamily="34" charset="-120"/>
+              </a:rPr>
+              <a:t>For example</a:t>
+            </a:r>
+            <a:endParaRPr lang="en-US" sz="800" dirty="0"/>
+          </a:p>
+          <a:p>
+            <a:pPr indent="0" marL="0">
+              <a:spcAft>
+                <a:spcPts val="300"/>
+              </a:spcAft>
+              <a:buNone/>
+            </a:pPr>
+            <a:r>
+              <a:rPr lang="en-US" sz="850" dirty="0">
+                <a:solidFill>
+                  <a:srgbClr val="E9F2FF"/>
+                </a:solidFill>
+                <a:latin typeface="Arial" pitchFamily="34" charset="0"/>
+                <a:ea typeface="Arial" pitchFamily="34" charset="-122"/>
+                <a:cs typeface="Arial" pitchFamily="34" charset="-120"/>
+              </a:rPr>
+              <a:t>Then: Liquid-fuelled rocket to orbit: 1926 → 1957 (31 yrs)</a:t>
+            </a:r>
+            <a:endParaRPr lang="en-US" sz="800" dirty="0"/>
+          </a:p>
+          <a:p>
+            <a:pPr indent="0" marL="0">
+              <a:spcAft>
+                <a:spcPts val="300"/>
+              </a:spcAft>
+              <a:buNone/>
+            </a:pPr>
+            <a:r>
+              <a:rPr lang="en-US" sz="850" dirty="0">
+                <a:solidFill>
+                  <a:srgbClr val="E9F2FF"/>
+                </a:solidFill>
+                <a:latin typeface="Arial" pitchFamily="34" charset="0"/>
+                <a:ea typeface="Arial" pitchFamily="34" charset="-122"/>
+                <a:cs typeface="Arial" pitchFamily="34" charset="-120"/>
+              </a:rPr>
+              <a:t>Now: Protein structure prediction: 2020 → 2021 (1 yr)</a:t>
+            </a:r>
+            <a:endParaRPr lang="en-US" sz="800" dirty="0"/>
+          </a:p>
+        </p:txBody>
+      </p:sp>
+      <p:sp>
+        <p:nvSpPr>
+          <p:cNvPr id="10" name="Shape 8"/>
+          <p:cNvSpPr/>
+          <p:nvPr/>
+        </p:nvSpPr>
+        <p:spPr>
+          <a:xfrm>
+            <a:off x="3200400" y="1143000"/>
+            <a:ext cx="2697480" cy="2743200"/>
+          </a:xfrm>
+          <a:prstGeom prst="roundRect">
+            <a:avLst>
+              <a:gd name="adj" fmla="val 2712"/>
+            </a:avLst>
+          </a:prstGeom>
+          <a:solidFill>
+            <a:srgbClr val="13283A"/>
+          </a:solidFill>
+          <a:ln w="9525">
+            <a:solidFill>
+              <a:srgbClr val="22384A"/>
+            </a:solidFill>
+            <a:prstDash val="solid"/>
+          </a:ln>
+        </p:spPr>
+      </p:sp>
+      <p:sp>
+        <p:nvSpPr>
+          <p:cNvPr id="11" name="Shape 9"/>
+          <p:cNvSpPr/>
+          <p:nvPr/>
+        </p:nvSpPr>
+        <p:spPr>
+          <a:xfrm>
+            <a:off x="3200400" y="1252728"/>
+            <a:ext cx="45720" cy="2523744"/>
+          </a:xfrm>
+          <a:prstGeom prst="rect">
+            <a:avLst/>
+          </a:prstGeom>
+          <a:solidFill>
+            <a:srgbClr val="4CD3C2"/>
+          </a:solidFill>
+          <a:ln w="12700">
+            <a:solidFill>
+              <a:srgbClr val="4CD3C2"/>
+            </a:solidFill>
+            <a:prstDash val="solid"/>
+          </a:ln>
+        </p:spPr>
+      </p:sp>
+      <p:sp>
+        <p:nvSpPr>
+          <p:cNvPr id="12" name="Text 10"/>
+          <p:cNvSpPr txBox="1"/>
+          <p:nvPr/>
+        </p:nvSpPr>
+        <p:spPr>
+          <a:xfrm>
+            <a:off x="3383280" y="1261872"/>
+            <a:ext cx="2423160" cy="640080"/>
+          </a:xfrm>
+          <a:prstGeom prst="rect">
+            <a:avLst/>
+          </a:prstGeom>
+          <a:noFill/>
+          <a:ln/>
+        </p:spPr>
+        <p:txBody>
+          <a:bodyPr wrap="square" lIns="0" tIns="0" rIns="0" bIns="0" rtlCol="0" anchor="ctr">
+            <a:normAutofit/>
+          </a:bodyPr>
+          <a:lstStyle/>
+          <a:p>
+            <a:pPr indent="0" marL="0">
+              <a:buNone/>
+            </a:pPr>
+            <a:r>
+              <a:rPr lang="en-US" sz="2800" dirty="0">
+                <a:solidFill>
+                  <a:srgbClr val="4CD3C2"/>
+                </a:solidFill>
+                <a:latin typeface="Georgia" pitchFamily="34" charset="0"/>
+                <a:ea typeface="Georgia" pitchFamily="34" charset="-122"/>
+                <a:cs typeface="Georgia" pitchFamily="34" charset="-120"/>
+              </a:rPr>
+              <a:t>3 vs 6 yrs</a:t>
+            </a:r>
+            <a:endParaRPr lang="en-US" sz="2800" dirty="0"/>
+          </a:p>
+        </p:txBody>
+      </p:sp>
+      <p:sp>
+        <p:nvSpPr>
+          <p:cNvPr id="13" name="Text 11"/>
+          <p:cNvSpPr txBox="1"/>
+          <p:nvPr/>
+        </p:nvSpPr>
+        <p:spPr>
+          <a:xfrm>
+            <a:off x="3383280" y="1938528"/>
+            <a:ext cx="2423160" cy="548640"/>
+          </a:xfrm>
+          <a:prstGeom prst="rect">
+            <a:avLst/>
+          </a:prstGeom>
+          <a:noFill/>
+          <a:ln/>
+        </p:spPr>
+        <p:txBody>
+          <a:bodyPr wrap="square" lIns="0" tIns="0" rIns="0" bIns="0" rtlCol="0" anchor="t"/>
+          <a:lstStyle/>
+          <a:p>
+            <a:pPr indent="0" marL="0">
+              <a:buNone/>
+            </a:pPr>
+            <a:r>
+              <a:rPr lang="en-US" sz="950" dirty="0">
+                <a:solidFill>
+                  <a:srgbClr val="E9F2FF"/>
+                </a:solidFill>
+                <a:latin typeface="Arial" pitchFamily="34" charset="0"/>
+                <a:ea typeface="Arial" pitchFamily="34" charset="-122"/>
+                <a:cs typeface="Arial" pitchFamily="34" charset="-120"/>
+              </a:rPr>
+              <a:t>AI-driven work against everything else, for research since 2010</a:t>
+            </a:r>
+            <a:endParaRPr lang="en-US" sz="950" dirty="0"/>
+          </a:p>
+        </p:txBody>
+      </p:sp>
+      <p:sp>
+        <p:nvSpPr>
+          <p:cNvPr id="14" name="Text 12"/>
+          <p:cNvSpPr txBox="1"/>
+          <p:nvPr/>
+        </p:nvSpPr>
+        <p:spPr>
+          <a:xfrm>
+            <a:off x="3383280" y="2560320"/>
+            <a:ext cx="2423160" cy="1234440"/>
+          </a:xfrm>
+          <a:prstGeom prst="rect">
+            <a:avLst/>
+          </a:prstGeom>
+          <a:noFill/>
+          <a:ln/>
+        </p:spPr>
+        <p:txBody>
+          <a:bodyPr wrap="square" lIns="0" tIns="0" rIns="0" bIns="0" rtlCol="0" anchor="t"/>
+          <a:lstStyle/>
+          <a:p>
+            <a:pPr indent="0" marL="0">
+              <a:buNone/>
+            </a:pPr>
+            <a:r>
+              <a:rPr lang="en-US" sz="800" b="1" dirty="0">
+                <a:solidFill>
+                  <a:srgbClr val="8FA6B8"/>
+                </a:solidFill>
+                <a:latin typeface="Arial" pitchFamily="34" charset="0"/>
+                <a:ea typeface="Arial" pitchFamily="34" charset="-122"/>
+                <a:cs typeface="Arial" pitchFamily="34" charset="-120"/>
+              </a:rPr>
+              <a:t>For example</a:t>
+            </a:r>
+            <a:endParaRPr lang="en-US" sz="800" dirty="0"/>
+          </a:p>
+          <a:p>
+            <a:pPr indent="0" marL="0">
+              <a:spcAft>
+                <a:spcPts val="300"/>
+              </a:spcAft>
+              <a:buNone/>
+            </a:pPr>
+            <a:r>
+              <a:rPr lang="en-US" sz="850" dirty="0">
+                <a:solidFill>
+                  <a:srgbClr val="E9F2FF"/>
+                </a:solidFill>
+                <a:latin typeface="Arial" pitchFamily="34" charset="0"/>
+                <a:ea typeface="Arial" pitchFamily="34" charset="-122"/>
+                <a:cs typeface="Arial" pitchFamily="34" charset="-120"/>
+              </a:rPr>
+              <a:t>AI-designed chip layouts: 2020 → 2021 (1 yr)</a:t>
+            </a:r>
+            <a:endParaRPr lang="en-US" sz="800" dirty="0"/>
+          </a:p>
+          <a:p>
+            <a:pPr indent="0" marL="0">
+              <a:spcAft>
+                <a:spcPts val="300"/>
+              </a:spcAft>
+              <a:buNone/>
+            </a:pPr>
+            <a:r>
+              <a:rPr lang="en-US" sz="850" dirty="0">
+                <a:solidFill>
+                  <a:srgbClr val="E9F2FF"/>
+                </a:solidFill>
+                <a:latin typeface="Arial" pitchFamily="34" charset="0"/>
+                <a:ea typeface="Arial" pitchFamily="34" charset="-122"/>
+                <a:cs typeface="Arial" pitchFamily="34" charset="-120"/>
+              </a:rPr>
+              <a:t>Natural-sounding AI voices: 2016 → 2017 (1 yr)</a:t>
+            </a:r>
+            <a:endParaRPr lang="en-US" sz="800" dirty="0"/>
+          </a:p>
+        </p:txBody>
+      </p:sp>
+      <p:sp>
+        <p:nvSpPr>
+          <p:cNvPr id="15" name="Shape 13"/>
+          <p:cNvSpPr/>
+          <p:nvPr/>
+        </p:nvSpPr>
+        <p:spPr>
+          <a:xfrm>
+            <a:off x="6035040" y="1143000"/>
+            <a:ext cx="2697480" cy="2743200"/>
+          </a:xfrm>
+          <a:prstGeom prst="roundRect">
+            <a:avLst>
+              <a:gd name="adj" fmla="val 2712"/>
+            </a:avLst>
+          </a:prstGeom>
+          <a:solidFill>
+            <a:srgbClr val="13283A"/>
+          </a:solidFill>
+          <a:ln w="9525">
+            <a:solidFill>
+              <a:srgbClr val="22384A"/>
+            </a:solidFill>
+            <a:prstDash val="solid"/>
+          </a:ln>
+        </p:spPr>
+      </p:sp>
+      <p:sp>
+        <p:nvSpPr>
+          <p:cNvPr id="16" name="Shape 14"/>
+          <p:cNvSpPr/>
+          <p:nvPr/>
+        </p:nvSpPr>
+        <p:spPr>
+          <a:xfrm>
+            <a:off x="6035040" y="1252728"/>
+            <a:ext cx="45720" cy="2523744"/>
+          </a:xfrm>
+          <a:prstGeom prst="rect">
+            <a:avLst/>
+          </a:prstGeom>
+          <a:solidFill>
+            <a:srgbClr val="A891FF"/>
+          </a:solidFill>
+          <a:ln w="12700">
+            <a:solidFill>
+              <a:srgbClr val="A891FF"/>
+            </a:solidFill>
+            <a:prstDash val="solid"/>
+          </a:ln>
+        </p:spPr>
+      </p:sp>
+      <p:sp>
+        <p:nvSpPr>
+          <p:cNvPr id="17" name="Text 15"/>
+          <p:cNvSpPr txBox="1"/>
+          <p:nvPr/>
+        </p:nvSpPr>
+        <p:spPr>
+          <a:xfrm>
+            <a:off x="6217920" y="1261872"/>
+            <a:ext cx="2423160" cy="640080"/>
+          </a:xfrm>
+          <a:prstGeom prst="rect">
+            <a:avLst/>
+          </a:prstGeom>
+          <a:noFill/>
+          <a:ln/>
+        </p:spPr>
+        <p:txBody>
+          <a:bodyPr wrap="square" lIns="0" tIns="0" rIns="0" bIns="0" rtlCol="0" anchor="ctr">
+            <a:normAutofit/>
+          </a:bodyPr>
+          <a:lstStyle/>
+          <a:p>
+            <a:pPr indent="0" marL="0">
+              <a:buNone/>
+            </a:pPr>
+            <a:r>
+              <a:rPr lang="en-US" sz="2800" dirty="0">
+                <a:solidFill>
+                  <a:srgbClr val="A891FF"/>
+                </a:solidFill>
+                <a:latin typeface="Georgia" pitchFamily="34" charset="0"/>
+                <a:ea typeface="Georgia" pitchFamily="34" charset="-122"/>
+                <a:cs typeface="Georgia" pitchFamily="34" charset="-120"/>
+              </a:rPr>
+              <a:t>+9 yrs</a:t>
+            </a:r>
+            <a:endParaRPr lang="en-US" sz="2800" dirty="0"/>
+          </a:p>
+        </p:txBody>
+      </p:sp>
+      <p:sp>
+        <p:nvSpPr>
+          <p:cNvPr id="18" name="Text 16"/>
+          <p:cNvSpPr txBox="1"/>
+          <p:nvPr/>
+        </p:nvSpPr>
+        <p:spPr>
+          <a:xfrm>
+            <a:off x="6217920" y="1938528"/>
+            <a:ext cx="2423160" cy="548640"/>
+          </a:xfrm>
+          <a:prstGeom prst="rect">
+            <a:avLst/>
+          </a:prstGeom>
+          <a:noFill/>
+          <a:ln/>
+        </p:spPr>
+        <p:txBody>
+          <a:bodyPr wrap="square" lIns="0" tIns="0" rIns="0" bIns="0" rtlCol="0" anchor="t"/>
+          <a:lstStyle/>
+          <a:p>
+            <a:pPr indent="0" marL="0">
+              <a:buNone/>
+            </a:pPr>
+            <a:r>
+              <a:rPr lang="en-US" sz="950" dirty="0">
+                <a:solidFill>
+                  <a:srgbClr val="E9F2FF"/>
+                </a:solidFill>
+                <a:latin typeface="Arial" pitchFamily="34" charset="0"/>
+                <a:ea typeface="Arial" pitchFamily="34" charset="-122"/>
+                <a:cs typeface="Arial" pitchFamily="34" charset="-120"/>
+              </a:rPr>
+              <a:t>From first product to mainstream adoption</a:t>
+            </a:r>
+            <a:endParaRPr lang="en-US" sz="950" dirty="0"/>
+          </a:p>
+        </p:txBody>
+      </p:sp>
+      <p:sp>
+        <p:nvSpPr>
+          <p:cNvPr id="19" name="Text 17"/>
+          <p:cNvSpPr txBox="1"/>
+          <p:nvPr/>
+        </p:nvSpPr>
+        <p:spPr>
+          <a:xfrm>
+            <a:off x="6217920" y="2560320"/>
+            <a:ext cx="2423160" cy="1234440"/>
+          </a:xfrm>
+          <a:prstGeom prst="rect">
+            <a:avLst/>
+          </a:prstGeom>
+          <a:noFill/>
+          <a:ln/>
+        </p:spPr>
+        <p:txBody>
+          <a:bodyPr wrap="square" lIns="0" tIns="0" rIns="0" bIns="0" rtlCol="0" anchor="t"/>
+          <a:lstStyle/>
+          <a:p>
+            <a:pPr indent="0" marL="0">
+              <a:buNone/>
+            </a:pPr>
+            <a:r>
+              <a:rPr lang="en-US" sz="800" b="1" dirty="0">
+                <a:solidFill>
+                  <a:srgbClr val="8FA6B8"/>
+                </a:solidFill>
+                <a:latin typeface="Arial" pitchFamily="34" charset="0"/>
+                <a:ea typeface="Arial" pitchFamily="34" charset="-122"/>
+                <a:cs typeface="Arial" pitchFamily="34" charset="-120"/>
+              </a:rPr>
+              <a:t>For example</a:t>
+            </a:r>
+            <a:endParaRPr lang="en-US" sz="800" dirty="0"/>
+          </a:p>
+          <a:p>
+            <a:pPr indent="0" marL="0">
+              <a:spcAft>
+                <a:spcPts val="300"/>
+              </a:spcAft>
+              <a:buNone/>
+            </a:pPr>
+            <a:r>
+              <a:rPr lang="en-US" sz="850" dirty="0">
+                <a:solidFill>
+                  <a:srgbClr val="E9F2FF"/>
+                </a:solidFill>
+                <a:latin typeface="Arial" pitchFamily="34" charset="0"/>
+                <a:ea typeface="Arial" pitchFamily="34" charset="-122"/>
+                <a:cs typeface="Arial" pitchFamily="34" charset="-120"/>
+              </a:rPr>
+              <a:t>Post-quantum cryptography: first product 2024, mainstream by 2025</a:t>
+            </a:r>
+            <a:endParaRPr lang="en-US" sz="800" dirty="0"/>
+          </a:p>
+        </p:txBody>
+      </p:sp>
+      <p:sp>
+        <p:nvSpPr>
+          <p:cNvPr id="20" name="Shape 18"/>
+          <p:cNvSpPr/>
+          <p:nvPr/>
+        </p:nvSpPr>
+        <p:spPr>
+          <a:xfrm>
+            <a:off x="365760" y="4069080"/>
+            <a:ext cx="8412480" cy="566928"/>
+          </a:xfrm>
+          <a:prstGeom prst="roundRect">
+            <a:avLst>
+              <a:gd name="adj" fmla="val 12903"/>
+            </a:avLst>
+          </a:prstGeom>
+          <a:solidFill>
+            <a:srgbClr val="2A2410"/>
+          </a:solidFill>
+          <a:ln w="9525">
+            <a:solidFill>
+              <a:srgbClr val="F7C04A"/>
+            </a:solidFill>
+            <a:prstDash val="solid"/>
+          </a:ln>
+        </p:spPr>
+      </p:sp>
+      <p:sp>
+        <p:nvSpPr>
+          <p:cNvPr id="21" name="Text 19"/>
+          <p:cNvSpPr txBox="1"/>
+          <p:nvPr/>
+        </p:nvSpPr>
+        <p:spPr>
+          <a:xfrm>
+            <a:off x="548640" y="4114800"/>
+            <a:ext cx="8046720" cy="475488"/>
+          </a:xfrm>
+          <a:prstGeom prst="rect">
+            <a:avLst/>
+          </a:prstGeom>
+          <a:noFill/>
+          <a:ln/>
+        </p:spPr>
+        <p:txBody>
           <a:bodyPr wrap="square" lIns="0" tIns="0" rIns="0" bIns="0" rtlCol="0" anchor="ctr"/>
           <a:lstStyle/>
           <a:p>
+            <a:pPr indent="0" marL="0">
+              <a:buNone/>
+            </a:pPr>
+            <a:r>
+              <a:rPr lang="en-US" sz="1250" i="1" dirty="0">
+                <a:solidFill>
+                  <a:srgbClr val="F7C04A"/>
+                </a:solidFill>
+                <a:latin typeface="Georgia" pitchFamily="34" charset="0"/>
+                <a:ea typeface="Georgia" pitchFamily="34" charset="-122"/>
+                <a:cs typeface="Georgia" pitchFamily="34" charset="-120"/>
+              </a:rPr>
+              <a:t>So, is AI shrinking the gap? Two of the four measures here, half, point to yes. The answer updates as new evidence arrives.</a:t>
+            </a:r>
+            <a:endParaRPr lang="en-US" sz="1250" dirty="0"/>
+          </a:p>
+        </p:txBody>
+      </p:sp>
+      <p:sp>
+        <p:nvSpPr>
+          <p:cNvPr id="23" name="Text 20"/>
+          <p:cNvSpPr txBox="1"/>
+          <p:nvPr/>
+        </p:nvSpPr>
+        <p:spPr>
+          <a:xfrm>
+            <a:off x="365760" y="4846320"/>
+            <a:ext cx="7955280" cy="201168"/>
+          </a:xfrm>
+          <a:prstGeom prst="rect">
+            <a:avLst/>
+          </a:prstGeom>
+          <a:noFill/>
+          <a:ln/>
+        </p:spPr>
+        <p:txBody>
+          <a:bodyPr wrap="square" lIns="0" tIns="0" rIns="0" bIns="0" rtlCol="0" anchor="ctr"/>
+          <a:lstStyle/>
+          <a:p>
+            <a:pPr indent="0" marL="0">
+              <a:buNone/>
+            </a:pPr>
+            <a:r>
+              <a:rPr lang="en-US" sz="650" dirty="0">
+                <a:solidFill>
+                  <a:srgbClr val="8FA6B8"/>
+                </a:solidFill>
+                <a:latin typeface="Arial" pitchFamily="34" charset="0"/>
+                <a:ea typeface="Arial" pitchFamily="34" charset="-122"/>
+                <a:cs typeface="Arial" pitchFamily="34" charset="-120"/>
+              </a:rPr>
+              <a:t>Stuart Okin, personal project. Data revision 20 (2026-10-29), narrative version 12. AI-maintained data and narrative, no human review; may contain errors. Selection: All fields.</a:t>
+            </a:r>
+            <a:endParaRPr lang="en-US" sz="650" dirty="0"/>
+          </a:p>
+        </p:txBody>
+      </p:sp>
+      <p:sp>
+        <p:nvSpPr>
+          <p:cNvPr id="24" name="Text 21"/>
+          <p:cNvSpPr txBox="1"/>
+          <p:nvPr/>
+        </p:nvSpPr>
+        <p:spPr>
+          <a:xfrm>
+            <a:off x="8412480" y="4846320"/>
+            <a:ext cx="365760" cy="201168"/>
+          </a:xfrm>
+          <a:prstGeom prst="rect">
+            <a:avLst/>
+          </a:prstGeom>
+          <a:noFill/>
+          <a:ln/>
+        </p:spPr>
+        <p:txBody>
+          <a:bodyPr wrap="square" lIns="0" tIns="0" rIns="0" bIns="0" rtlCol="0" anchor="ctr"/>
+          <a:lstStyle/>
+          <a:p>
             <a:pPr algn="r" indent="0" marL="0">
               <a:buNone/>
             </a:pPr>
             <a:r>
-              <a:rPr lang="en-US" sz="800" dirty="0">
+              <a:rPr lang="en-US" sz="700" dirty="0">
                 <a:solidFill>
                   <a:srgbClr val="8FA6B8"/>
                 </a:solidFill>
@@ -3297,7 +3480,7 @@
               </a:rPr>
               <a:t>2</a:t>
             </a:r>
-            <a:endParaRPr lang="en-US" sz="800" dirty="0"/>
+            <a:endParaRPr lang="en-US" sz="700" dirty="0"/>
           </a:p>
         </p:txBody>
       </p:sp>
@@ -3335,14 +3518,39 @@
       </p:grpSpPr>
       <p:sp>
         <p:nvSpPr>
-          <p:cNvPr id="2" name="Text 0"/>
+          <p:cNvPr id="2" name="Shape 0"/>
+          <p:cNvSpPr/>
+          <p:nvPr/>
+        </p:nvSpPr>
+        <p:spPr>
+          <a:xfrm>
+            <a:off x="365760" y="347472"/>
+            <a:ext cx="73152" cy="457200"/>
+          </a:xfrm>
+          <a:prstGeom prst="rect">
+            <a:avLst/>
+          </a:prstGeom>
+          <a:solidFill>
+            <a:srgbClr val="F7C04A"/>
+          </a:solidFill>
+          <a:ln w="12700">
+            <a:solidFill>
+              <a:srgbClr val="F7C04A"/>
+            </a:solidFill>
+            <a:prstDash val="solid"/>
+          </a:ln>
+        </p:spPr>
+      </p:sp>
+      <p:sp>
+        <p:nvSpPr>
+          <p:cNvPr id="3" name="Text 1"/>
           <p:cNvSpPr txBox="1"/>
           <p:nvPr/>
         </p:nvSpPr>
         <p:spPr>
           <a:xfrm>
-            <a:off x="457200" y="320040"/>
-            <a:ext cx="8229600" cy="548640"/>
+            <a:off x="548640" y="274320"/>
+            <a:ext cx="8138160" cy="457200"/>
           </a:xfrm>
           <a:prstGeom prst="rect">
             <a:avLst/>
@@ -3366,21 +3574,60 @@
                 <a:ea typeface="Georgia" pitchFamily="34" charset="-122"/>
                 <a:cs typeface="Georgia" pitchFamily="34" charset="-120"/>
               </a:rPr>
-              <a:t>Can AI shrink the gap further?</a:t>
+              <a:t>The gap over time</a:t>
             </a:r>
             <a:endParaRPr lang="en-US" sz="2400" dirty="0"/>
+          </a:p>
+        </p:txBody>
+      </p:sp>
+      <p:sp>
+        <p:nvSpPr>
+          <p:cNvPr id="4" name="Text 2"/>
+          <p:cNvSpPr txBox="1"/>
+          <p:nvPr/>
+        </p:nvSpPr>
+        <p:spPr>
+          <a:xfrm>
+            <a:off x="548640" y="713232"/>
+            <a:ext cx="8138160" cy="256032"/>
+          </a:xfrm>
+          <a:prstGeom prst="rect">
+            <a:avLst/>
+          </a:prstGeom>
+          <a:noFill/>
+          <a:ln/>
+        </p:spPr>
+        <p:txBody>
+          <a:bodyPr wrap="square" lIns="0" tIns="0" rIns="0" bIns="0" rtlCol="0" anchor="ctr"/>
+          <a:lstStyle/>
+          <a:p>
+            <a:pPr indent="0" marL="0">
+              <a:buNone/>
+            </a:pPr>
+            <a:r>
+              <a:rPr lang="en-US" sz="1050" dirty="0">
+                <a:solidFill>
+                  <a:srgbClr val="8FA6B8"/>
+                </a:solidFill>
+                <a:latin typeface="Arial" pitchFamily="34" charset="0"/>
+                <a:ea typeface="Arial" pitchFamily="34" charset="-122"/>
+                <a:cs typeface="Arial" pitchFamily="34" charset="-120"/>
+              </a:rPr>
+              <a:t>Median years from research to first product, for milestones landing in the preceding ten years</a:t>
+            </a:r>
+            <a:endParaRPr lang="en-US" sz="1050" dirty="0"/>
           </a:p>
         </p:txBody>
       </p:sp>
       <p:graphicFrame>
         <p:nvGraphicFramePr>
-          <p:cNvPr id="3" name="Chart 0" descr=""/>
+          <p:cNvPr id="5" name="Chart 0" descr=""/>
           <p:cNvGraphicFramePr/>
           <p:nvPr/>
         </p:nvGraphicFramePr>
         <p:xfrm>
-          <a:off x="365760" y="960120"/>
-          <a:ext cx="5486400" cy="3703320"/>
+          <a:off x="365760" y="1097280"/>
+          <a:ext cx="5486400" cy="3520440"/>
         </p:xfrm>
         <a:graphic xmlns:a="http://schemas.openxmlformats.org/drawingml/2006/main">
           <a:graphicData uri="http://schemas.openxmlformats.org/drawingml/2006/chart">
@@ -3390,18 +3637,18 @@
       </p:graphicFrame>
       <p:sp>
         <p:nvSpPr>
-          <p:cNvPr id="4" name="Shape 1"/>
+          <p:cNvPr id="6" name="Shape 3"/>
           <p:cNvSpPr/>
           <p:nvPr/>
         </p:nvSpPr>
         <p:spPr>
           <a:xfrm>
-            <a:off x="6080760" y="960120"/>
-            <a:ext cx="2606040" cy="1097280"/>
+            <a:off x="6035040" y="1097280"/>
+            <a:ext cx="2743200" cy="3520440"/>
           </a:xfrm>
           <a:prstGeom prst="roundRect">
             <a:avLst>
-              <a:gd name="adj" fmla="val 10000"/>
+              <a:gd name="adj" fmla="val 2667"/>
             </a:avLst>
           </a:prstGeom>
           <a:solidFill>
@@ -3417,14 +3664,39 @@
       </p:sp>
       <p:sp>
         <p:nvSpPr>
-          <p:cNvPr id="5" name="Text 2"/>
+          <p:cNvPr id="7" name="Shape 4"/>
+          <p:cNvSpPr/>
+          <p:nvPr/>
+        </p:nvSpPr>
+        <p:spPr>
+          <a:xfrm>
+            <a:off x="6035040" y="1207008"/>
+            <a:ext cx="45720" cy="3300984"/>
+          </a:xfrm>
+          <a:prstGeom prst="rect">
+            <a:avLst/>
+          </a:prstGeom>
+          <a:solidFill>
+            <a:srgbClr val="4CD3C2"/>
+          </a:solidFill>
+          <a:ln w="12700">
+            <a:solidFill>
+              <a:srgbClr val="4CD3C2"/>
+            </a:solidFill>
+            <a:prstDash val="solid"/>
+          </a:ln>
+        </p:spPr>
+      </p:sp>
+      <p:sp>
+        <p:nvSpPr>
+          <p:cNvPr id="8" name="Text 5"/>
           <p:cNvSpPr txBox="1"/>
           <p:nvPr/>
         </p:nvSpPr>
         <p:spPr>
           <a:xfrm>
-            <a:off x="6263640" y="1069848"/>
-            <a:ext cx="2240280" cy="548640"/>
+            <a:off x="6217920" y="1188720"/>
+            <a:ext cx="2468880" cy="3337560"/>
           </a:xfrm>
           <a:prstGeom prst="rect">
             <a:avLst/>
@@ -3433,39 +3705,318 @@
           <a:ln/>
         </p:spPr>
         <p:txBody>
-          <a:bodyPr wrap="square" lIns="0" tIns="0" rIns="0" bIns="0" rtlCol="0" anchor="ctr">
-            <a:normAutofit/>
-          </a:bodyPr>
-          <a:lstStyle/>
-          <a:p>
-            <a:pPr indent="0" marL="0">
-              <a:buNone/>
-            </a:pPr>
-            <a:r>
-              <a:rPr lang="en-US" sz="2800" b="1" dirty="0">
-                <a:solidFill>
-                  <a:srgbClr val="F7C04A"/>
+          <a:bodyPr wrap="square" lIns="0" tIns="0" rIns="0" bIns="0" rtlCol="0" anchor="t"/>
+          <a:lstStyle/>
+          <a:p>
+            <a:pPr indent="0" marL="0">
+              <a:spcAft>
+                <a:spcPts val="400"/>
+              </a:spcAft>
+              <a:buNone/>
+            </a:pPr>
+            <a:r>
+              <a:rPr lang="en-US" sz="1050" b="1" dirty="0">
+                <a:solidFill>
+                  <a:srgbClr val="4CD3C2"/>
+                </a:solidFill>
+                <a:latin typeface="Arial" pitchFamily="34" charset="0"/>
+                <a:ea typeface="Arial" pitchFamily="34" charset="-122"/>
+                <a:cs typeface="Arial" pitchFamily="34" charset="-120"/>
+              </a:rPr>
+              <a:t>Fastest recent arrivals</a:t>
+            </a:r>
+            <a:endParaRPr lang="en-US" sz="1050" dirty="0"/>
+          </a:p>
+          <a:p>
+            <a:pPr marL="114300" indent="-114300">
+              <a:spcAft>
+                <a:spcPts val="300"/>
+              </a:spcAft>
+              <a:buSzPct val="100000"/>
+              <a:buChar char="•"/>
+            </a:pPr>
+            <a:r>
+              <a:rPr lang="en-US" sz="900" dirty="0">
+                <a:solidFill>
+                  <a:srgbClr val="E9F2FF"/>
+                </a:solidFill>
+                <a:latin typeface="Arial" pitchFamily="34" charset="0"/>
+                <a:ea typeface="Arial" pitchFamily="34" charset="-122"/>
+                <a:cs typeface="Arial" pitchFamily="34" charset="-120"/>
+              </a:rPr>
+              <a:t>Protein structure prediction: 2020 → 2021 (1 yr)</a:t>
+            </a:r>
+            <a:endParaRPr lang="en-US" sz="1050" dirty="0"/>
+          </a:p>
+          <a:p>
+            <a:pPr marL="114300" indent="-114300">
+              <a:spcAft>
+                <a:spcPts val="300"/>
+              </a:spcAft>
+              <a:buSzPct val="100000"/>
+              <a:buChar char="•"/>
+            </a:pPr>
+            <a:r>
+              <a:rPr lang="en-US" sz="900" dirty="0">
+                <a:solidFill>
+                  <a:srgbClr val="E9F2FF"/>
+                </a:solidFill>
+                <a:latin typeface="Arial" pitchFamily="34" charset="0"/>
+                <a:ea typeface="Arial" pitchFamily="34" charset="-122"/>
+                <a:cs typeface="Arial" pitchFamily="34" charset="-120"/>
+              </a:rPr>
+              <a:t>Transformer models: 2017 → 2019 (2 yrs)</a:t>
+            </a:r>
+            <a:endParaRPr lang="en-US" sz="1050" dirty="0"/>
+          </a:p>
+          <a:p>
+            <a:pPr marL="114300" indent="-114300">
+              <a:spcAft>
+                <a:spcPts val="300"/>
+              </a:spcAft>
+              <a:buSzPct val="100000"/>
+              <a:buChar char="•"/>
+            </a:pPr>
+            <a:r>
+              <a:rPr lang="en-US" sz="900" dirty="0">
+                <a:solidFill>
+                  <a:srgbClr val="E9F2FF"/>
+                </a:solidFill>
+                <a:latin typeface="Arial" pitchFamily="34" charset="0"/>
+                <a:ea typeface="Arial" pitchFamily="34" charset="-122"/>
+                <a:cs typeface="Arial" pitchFamily="34" charset="-120"/>
+              </a:rPr>
+              <a:t>Reasoning models: 2022 → 2024 (2 yrs)</a:t>
+            </a:r>
+            <a:endParaRPr lang="en-US" sz="1050" dirty="0"/>
+          </a:p>
+          <a:p>
+            <a:pPr indent="0" marL="0">
+              <a:spcBef>
+                <a:spcPts val="600"/>
+              </a:spcBef>
+              <a:spcAft>
+                <a:spcPts val="400"/>
+              </a:spcAft>
+              <a:buNone/>
+            </a:pPr>
+            <a:r>
+              <a:rPr lang="en-US" sz="1050" b="1" dirty="0">
+                <a:solidFill>
+                  <a:srgbClr val="FF6B6B"/>
+                </a:solidFill>
+                <a:latin typeface="Arial" pitchFamily="34" charset="0"/>
+                <a:ea typeface="Arial" pitchFamily="34" charset="-122"/>
+                <a:cs typeface="Arial" pitchFamily="34" charset="-120"/>
+              </a:rPr>
+              <a:t>Still slow</a:t>
+            </a:r>
+            <a:endParaRPr lang="en-US" sz="1050" dirty="0"/>
+          </a:p>
+          <a:p>
+            <a:pPr marL="114300" indent="-114300">
+              <a:buSzPct val="100000"/>
+              <a:buChar char="•"/>
+            </a:pPr>
+            <a:r>
+              <a:rPr lang="en-US" sz="900" dirty="0">
+                <a:solidFill>
+                  <a:srgbClr val="E9F2FF"/>
+                </a:solidFill>
+                <a:latin typeface="Arial" pitchFamily="34" charset="0"/>
+                <a:ea typeface="Arial" pitchFamily="34" charset="-122"/>
+                <a:cs typeface="Arial" pitchFamily="34" charset="-120"/>
+              </a:rPr>
+              <a:t>Dynamic line rating on GB transmission lines: 1977 → 2026 (49 yrs)</a:t>
+            </a:r>
+            <a:endParaRPr lang="en-US" sz="1050" dirty="0"/>
+          </a:p>
+        </p:txBody>
+      </p:sp>
+      <p:sp>
+        <p:nvSpPr>
+          <p:cNvPr id="10" name="Text 6"/>
+          <p:cNvSpPr txBox="1"/>
+          <p:nvPr/>
+        </p:nvSpPr>
+        <p:spPr>
+          <a:xfrm>
+            <a:off x="365760" y="4846320"/>
+            <a:ext cx="7955280" cy="201168"/>
+          </a:xfrm>
+          <a:prstGeom prst="rect">
+            <a:avLst/>
+          </a:prstGeom>
+          <a:noFill/>
+          <a:ln/>
+        </p:spPr>
+        <p:txBody>
+          <a:bodyPr wrap="square" lIns="0" tIns="0" rIns="0" bIns="0" rtlCol="0" anchor="ctr"/>
+          <a:lstStyle/>
+          <a:p>
+            <a:pPr indent="0" marL="0">
+              <a:buNone/>
+            </a:pPr>
+            <a:r>
+              <a:rPr lang="en-US" sz="650" dirty="0">
+                <a:solidFill>
+                  <a:srgbClr val="8FA6B8"/>
+                </a:solidFill>
+                <a:latin typeface="Arial" pitchFamily="34" charset="0"/>
+                <a:ea typeface="Arial" pitchFamily="34" charset="-122"/>
+                <a:cs typeface="Arial" pitchFamily="34" charset="-120"/>
+              </a:rPr>
+              <a:t>Stuart Okin, personal project. Data revision 20 (2026-10-29), narrative version 12. AI-maintained data and narrative, no human review; may contain errors. Selection: All fields.</a:t>
+            </a:r>
+            <a:endParaRPr lang="en-US" sz="650" dirty="0"/>
+          </a:p>
+        </p:txBody>
+      </p:sp>
+      <p:sp>
+        <p:nvSpPr>
+          <p:cNvPr id="11" name="Text 7"/>
+          <p:cNvSpPr txBox="1"/>
+          <p:nvPr/>
+        </p:nvSpPr>
+        <p:spPr>
+          <a:xfrm>
+            <a:off x="8412480" y="4846320"/>
+            <a:ext cx="365760" cy="201168"/>
+          </a:xfrm>
+          <a:prstGeom prst="rect">
+            <a:avLst/>
+          </a:prstGeom>
+          <a:noFill/>
+          <a:ln/>
+        </p:spPr>
+        <p:txBody>
+          <a:bodyPr wrap="square" lIns="0" tIns="0" rIns="0" bIns="0" rtlCol="0" anchor="ctr"/>
+          <a:lstStyle/>
+          <a:p>
+            <a:pPr algn="r" indent="0" marL="0">
+              <a:buNone/>
+            </a:pPr>
+            <a:r>
+              <a:rPr lang="en-US" sz="700" dirty="0">
+                <a:solidFill>
+                  <a:srgbClr val="8FA6B8"/>
+                </a:solidFill>
+                <a:latin typeface="Arial" pitchFamily="34" charset="0"/>
+                <a:ea typeface="Arial" pitchFamily="34" charset="-122"/>
+                <a:cs typeface="Arial" pitchFamily="34" charset="-120"/>
+              </a:rPr>
+              <a:t>3</a:t>
+            </a:r>
+            <a:endParaRPr lang="en-US" sz="700" dirty="0"/>
+          </a:p>
+        </p:txBody>
+      </p:sp>
+    </p:spTree>
+  </p:cSld>
+  <p:clrMapOvr>
+    <a:masterClrMapping/>
+  </p:clrMapOvr>
+</p:sld>
+</file>
+
+<file path=ppt/slides/slide4.xml><?xml version="1.0" encoding="utf-8"?>
+<p:sld xmlns:a="http://schemas.openxmlformats.org/drawingml/2006/main" xmlns:r="http://schemas.openxmlformats.org/officeDocument/2006/relationships" xmlns:p="http://schemas.openxmlformats.org/presentationml/2006/main">
+  <p:cSld name="Slide 4">
+    <p:bg>
+      <p:bgPr>
+        <a:solidFill>
+          <a:srgbClr val="0B1724"/>
+        </a:solidFill>
+      </p:bgPr>
+    </p:bg>
+    <p:spTree>
+      <p:nvGrpSpPr>
+        <p:cNvPr id="1" name=""/>
+        <p:cNvGrpSpPr/>
+        <p:nvPr/>
+      </p:nvGrpSpPr>
+      <p:grpSpPr>
+        <a:xfrm>
+          <a:off x="0" y="0"/>
+          <a:ext cx="0" cy="0"/>
+          <a:chOff x="0" y="0"/>
+          <a:chExt cx="0" cy="0"/>
+        </a:xfrm>
+      </p:grpSpPr>
+      <p:sp>
+        <p:nvSpPr>
+          <p:cNvPr id="2" name="Shape 0"/>
+          <p:cNvSpPr/>
+          <p:nvPr/>
+        </p:nvSpPr>
+        <p:spPr>
+          <a:xfrm>
+            <a:off x="365760" y="347472"/>
+            <a:ext cx="73152" cy="457200"/>
+          </a:xfrm>
+          <a:prstGeom prst="rect">
+            <a:avLst/>
+          </a:prstGeom>
+          <a:solidFill>
+            <a:srgbClr val="4CD3C2"/>
+          </a:solidFill>
+          <a:ln w="12700">
+            <a:solidFill>
+              <a:srgbClr val="4CD3C2"/>
+            </a:solidFill>
+            <a:prstDash val="solid"/>
+          </a:ln>
+        </p:spPr>
+      </p:sp>
+      <p:sp>
+        <p:nvSpPr>
+          <p:cNvPr id="3" name="Text 1"/>
+          <p:cNvSpPr txBox="1"/>
+          <p:nvPr/>
+        </p:nvSpPr>
+        <p:spPr>
+          <a:xfrm>
+            <a:off x="548640" y="274320"/>
+            <a:ext cx="8138160" cy="457200"/>
+          </a:xfrm>
+          <a:prstGeom prst="rect">
+            <a:avLst/>
+          </a:prstGeom>
+          <a:noFill/>
+          <a:ln/>
+        </p:spPr>
+        <p:txBody>
+          <a:bodyPr wrap="square" lIns="0" tIns="0" rIns="0" bIns="0" rtlCol="0" anchor="ctr"/>
+          <a:lstStyle/>
+          <a:p>
+            <a:pPr indent="0" marL="0">
+              <a:buNone/>
+            </a:pPr>
+            <a:r>
+              <a:rPr lang="en-US" sz="2400" dirty="0">
+                <a:solidFill>
+                  <a:srgbClr val="E9F2FF"/>
                 </a:solidFill>
                 <a:latin typeface="Georgia" pitchFamily="34" charset="0"/>
                 <a:ea typeface="Georgia" pitchFamily="34" charset="-122"/>
                 <a:cs typeface="Georgia" pitchFamily="34" charset="-120"/>
               </a:rPr>
-              <a:t>3–5 yrs</a:t>
-            </a:r>
-            <a:endParaRPr lang="en-US" sz="2800" dirty="0"/>
-          </a:p>
-        </p:txBody>
-      </p:sp>
-      <p:sp>
-        <p:nvSpPr>
-          <p:cNvPr id="6" name="Text 3"/>
+              <a:t>Can AI shrink the gap?</a:t>
+            </a:r>
+            <a:endParaRPr lang="en-US" sz="2400" dirty="0"/>
+          </a:p>
+        </p:txBody>
+      </p:sp>
+      <p:sp>
+        <p:nvSpPr>
+          <p:cNvPr id="4" name="Text 2"/>
           <p:cNvSpPr txBox="1"/>
           <p:nvPr/>
         </p:nvSpPr>
         <p:spPr>
           <a:xfrm>
-            <a:off x="6263640" y="1636776"/>
-            <a:ext cx="2240280" cy="365760"/>
+            <a:off x="548640" y="713232"/>
+            <a:ext cx="8138160" cy="256032"/>
           </a:xfrm>
           <a:prstGeom prst="rect">
             <a:avLst/>
@@ -3474,14 +4025,14 @@
           <a:ln/>
         </p:spPr>
         <p:txBody>
-          <a:bodyPr wrap="square" lIns="0" tIns="0" rIns="0" bIns="0" rtlCol="0" anchor="t"/>
-          <a:lstStyle/>
-          <a:p>
-            <a:pPr indent="0" marL="0">
-              <a:buNone/>
-            </a:pPr>
-            <a:r>
-              <a:rPr lang="en-US" sz="900" dirty="0">
+          <a:bodyPr wrap="square" lIns="0" tIns="0" rIns="0" bIns="0" rtlCol="0" anchor="ctr"/>
+          <a:lstStyle/>
+          <a:p>
+            <a:pPr indent="0" marL="0">
+              <a:buNone/>
+            </a:pPr>
+            <a:r>
+              <a:rPr lang="en-US" sz="1050" dirty="0">
                 <a:solidFill>
                   <a:srgbClr val="8FA6B8"/>
                 </a:solidFill>
@@ -3489,26 +4040,42 @@
                 <a:ea typeface="Arial" pitchFamily="34" charset="-122"/>
                 <a:cs typeface="Arial" pitchFamily="34" charset="-120"/>
               </a:rPr>
-              <a:t>Scenario for research starting now, against 6 years at the recent pace</a:t>
-            </a:r>
-            <a:endParaRPr lang="en-US" sz="900" dirty="0"/>
-          </a:p>
-        </p:txBody>
-      </p:sp>
-      <p:sp>
-        <p:nvSpPr>
-          <p:cNvPr id="7" name="Shape 4"/>
+              <a:t>Recent median gap by field, against a plausible range with AI and digital twins (scenario, not forecast)</a:t>
+            </a:r>
+            <a:endParaRPr lang="en-US" sz="1050" dirty="0"/>
+          </a:p>
+        </p:txBody>
+      </p:sp>
+      <p:graphicFrame>
+        <p:nvGraphicFramePr>
+          <p:cNvPr id="5" name="Chart 0" descr=""/>
+          <p:cNvGraphicFramePr/>
+          <p:nvPr/>
+        </p:nvGraphicFramePr>
+        <p:xfrm>
+          <a:off x="365760" y="1097280"/>
+          <a:ext cx="5394960" cy="3520440"/>
+        </p:xfrm>
+        <a:graphic xmlns:a="http://schemas.openxmlformats.org/drawingml/2006/main">
+          <a:graphicData uri="http://schemas.openxmlformats.org/drawingml/2006/chart">
+            <c:chart xmlns:c="http://schemas.openxmlformats.org/drawingml/2006/chart" r:id="rId1"/>
+          </a:graphicData>
+        </a:graphic>
+      </p:graphicFrame>
+      <p:sp>
+        <p:nvSpPr>
+          <p:cNvPr id="6" name="Shape 3"/>
           <p:cNvSpPr/>
           <p:nvPr/>
         </p:nvSpPr>
         <p:spPr>
           <a:xfrm>
-            <a:off x="6080760" y="2194560"/>
-            <a:ext cx="2606040" cy="1097280"/>
+            <a:off x="5943600" y="1097280"/>
+            <a:ext cx="2834640" cy="3520440"/>
           </a:xfrm>
           <a:prstGeom prst="roundRect">
             <a:avLst>
-              <a:gd name="adj" fmla="val 10000"/>
+              <a:gd name="adj" fmla="val 2581"/>
             </a:avLst>
           </a:prstGeom>
           <a:solidFill>
@@ -3524,14 +4091,39 @@
       </p:sp>
       <p:sp>
         <p:nvSpPr>
+          <p:cNvPr id="7" name="Shape 4"/>
+          <p:cNvSpPr/>
+          <p:nvPr/>
+        </p:nvSpPr>
+        <p:spPr>
+          <a:xfrm>
+            <a:off x="5943600" y="1207008"/>
+            <a:ext cx="45720" cy="3300984"/>
+          </a:xfrm>
+          <a:prstGeom prst="rect">
+            <a:avLst/>
+          </a:prstGeom>
+          <a:solidFill>
+            <a:srgbClr val="4CD3C2"/>
+          </a:solidFill>
+          <a:ln w="12700">
+            <a:solidFill>
+              <a:srgbClr val="4CD3C2"/>
+            </a:solidFill>
+            <a:prstDash val="solid"/>
+          </a:ln>
+        </p:spPr>
+      </p:sp>
+      <p:sp>
+        <p:nvSpPr>
           <p:cNvPr id="8" name="Text 5"/>
           <p:cNvSpPr txBox="1"/>
           <p:nvPr/>
         </p:nvSpPr>
         <p:spPr>
           <a:xfrm>
-            <a:off x="6263640" y="2304288"/>
-            <a:ext cx="2240280" cy="548640"/>
+            <a:off x="6126480" y="1188720"/>
+            <a:ext cx="2560320" cy="3337560"/>
           </a:xfrm>
           <a:prstGeom prst="rect">
             <a:avLst/>
@@ -3540,39 +4132,297 @@
           <a:ln/>
         </p:spPr>
         <p:txBody>
-          <a:bodyPr wrap="square" lIns="0" tIns="0" rIns="0" bIns="0" rtlCol="0" anchor="ctr">
-            <a:normAutofit/>
-          </a:bodyPr>
-          <a:lstStyle/>
-          <a:p>
-            <a:pPr indent="0" marL="0">
-              <a:buNone/>
-            </a:pPr>
-            <a:r>
-              <a:rPr lang="en-US" sz="2800" b="1" dirty="0">
+          <a:bodyPr wrap="square" lIns="0" tIns="0" rIns="0" bIns="0" rtlCol="0" anchor="t"/>
+          <a:lstStyle/>
+          <a:p>
+            <a:pPr indent="0" marL="0">
+              <a:spcAft>
+                <a:spcPts val="400"/>
+              </a:spcAft>
+              <a:buNone/>
+            </a:pPr>
+            <a:r>
+              <a:rPr lang="en-US" sz="1050" b="1" dirty="0">
                 <a:solidFill>
                   <a:srgbClr val="4CD3C2"/>
+                </a:solidFill>
+                <a:latin typeface="Arial" pitchFamily="34" charset="0"/>
+                <a:ea typeface="Arial" pitchFamily="34" charset="-122"/>
+                <a:cs typeface="Arial" pitchFamily="34" charset="-120"/>
+              </a:rPr>
+              <a:t>AI at work</a:t>
+            </a:r>
+            <a:endParaRPr lang="en-US" sz="1050" dirty="0"/>
+          </a:p>
+          <a:p>
+            <a:pPr marL="114300" indent="-114300">
+              <a:spcAft>
+                <a:spcPts val="300"/>
+              </a:spcAft>
+              <a:buSzPct val="100000"/>
+              <a:buChar char="•"/>
+            </a:pPr>
+            <a:r>
+              <a:rPr lang="en-US" sz="900" dirty="0">
+                <a:solidFill>
+                  <a:srgbClr val="E9F2FF"/>
+                </a:solidFill>
+                <a:latin typeface="Arial" pitchFamily="34" charset="0"/>
+                <a:ea typeface="Arial" pitchFamily="34" charset="-122"/>
+                <a:cs typeface="Arial" pitchFamily="34" charset="-120"/>
+              </a:rPr>
+              <a:t>AI-designed chip layouts: 2020 → 2021 (1 yr)</a:t>
+            </a:r>
+            <a:endParaRPr lang="en-US" sz="1050" dirty="0"/>
+          </a:p>
+          <a:p>
+            <a:pPr marL="114300" indent="-114300">
+              <a:spcAft>
+                <a:spcPts val="300"/>
+              </a:spcAft>
+              <a:buSzPct val="100000"/>
+              <a:buChar char="•"/>
+            </a:pPr>
+            <a:r>
+              <a:rPr lang="en-US" sz="900" dirty="0">
+                <a:solidFill>
+                  <a:srgbClr val="E9F2FF"/>
+                </a:solidFill>
+                <a:latin typeface="Arial" pitchFamily="34" charset="0"/>
+                <a:ea typeface="Arial" pitchFamily="34" charset="-122"/>
+                <a:cs typeface="Arial" pitchFamily="34" charset="-120"/>
+              </a:rPr>
+              <a:t>Natural-sounding AI voices: 2016 → 2017 (1 yr)</a:t>
+            </a:r>
+            <a:endParaRPr lang="en-US" sz="1050" dirty="0"/>
+          </a:p>
+          <a:p>
+            <a:pPr marL="114300" indent="-114300">
+              <a:spcAft>
+                <a:spcPts val="300"/>
+              </a:spcAft>
+              <a:buSzPct val="100000"/>
+              <a:buChar char="•"/>
+            </a:pPr>
+            <a:r>
+              <a:rPr lang="en-US" sz="900" dirty="0">
+                <a:solidFill>
+                  <a:srgbClr val="E9F2FF"/>
+                </a:solidFill>
+                <a:latin typeface="Arial" pitchFamily="34" charset="0"/>
+                <a:ea typeface="Arial" pitchFamily="34" charset="-122"/>
+                <a:cs typeface="Arial" pitchFamily="34" charset="-120"/>
+              </a:rPr>
+              <a:t>Google open-source Coral NPU in commercial edge chips: 2025 → 2026 (1 yr)</a:t>
+            </a:r>
+            <a:endParaRPr lang="en-US" sz="1050" dirty="0"/>
+          </a:p>
+          <a:p>
+            <a:pPr indent="0" marL="0">
+              <a:spcBef>
+                <a:spcPts val="800"/>
+              </a:spcBef>
+              <a:buNone/>
+            </a:pPr>
+            <a:r>
+              <a:rPr lang="en-US" sz="950" i="1" dirty="0">
+                <a:solidFill>
+                  <a:srgbClr val="F7C04A"/>
+                </a:solidFill>
+                <a:latin typeface="Arial" pitchFamily="34" charset="0"/>
+                <a:ea typeface="Arial" pitchFamily="34" charset="-122"/>
+                <a:cs typeface="Arial" pitchFamily="34" charset="-120"/>
+              </a:rPr>
+              <a:t>Since 2010, AI-driven work took 3 yrs, against 6 yrs for the rest.</a:t>
+            </a:r>
+            <a:endParaRPr lang="en-US" sz="1050" dirty="0"/>
+          </a:p>
+        </p:txBody>
+      </p:sp>
+      <p:sp>
+        <p:nvSpPr>
+          <p:cNvPr id="10" name="Text 6"/>
+          <p:cNvSpPr txBox="1"/>
+          <p:nvPr/>
+        </p:nvSpPr>
+        <p:spPr>
+          <a:xfrm>
+            <a:off x="365760" y="4846320"/>
+            <a:ext cx="7955280" cy="201168"/>
+          </a:xfrm>
+          <a:prstGeom prst="rect">
+            <a:avLst/>
+          </a:prstGeom>
+          <a:noFill/>
+          <a:ln/>
+        </p:spPr>
+        <p:txBody>
+          <a:bodyPr wrap="square" lIns="0" tIns="0" rIns="0" bIns="0" rtlCol="0" anchor="ctr"/>
+          <a:lstStyle/>
+          <a:p>
+            <a:pPr indent="0" marL="0">
+              <a:buNone/>
+            </a:pPr>
+            <a:r>
+              <a:rPr lang="en-US" sz="650" dirty="0">
+                <a:solidFill>
+                  <a:srgbClr val="8FA6B8"/>
+                </a:solidFill>
+                <a:latin typeface="Arial" pitchFamily="34" charset="0"/>
+                <a:ea typeface="Arial" pitchFamily="34" charset="-122"/>
+                <a:cs typeface="Arial" pitchFamily="34" charset="-120"/>
+              </a:rPr>
+              <a:t>Stuart Okin, personal project. Data revision 20 (2026-10-29), narrative version 12. AI-maintained data and narrative, no human review; may contain errors. Selection: All fields.</a:t>
+            </a:r>
+            <a:endParaRPr lang="en-US" sz="650" dirty="0"/>
+          </a:p>
+        </p:txBody>
+      </p:sp>
+      <p:sp>
+        <p:nvSpPr>
+          <p:cNvPr id="11" name="Text 7"/>
+          <p:cNvSpPr txBox="1"/>
+          <p:nvPr/>
+        </p:nvSpPr>
+        <p:spPr>
+          <a:xfrm>
+            <a:off x="8412480" y="4846320"/>
+            <a:ext cx="365760" cy="201168"/>
+          </a:xfrm>
+          <a:prstGeom prst="rect">
+            <a:avLst/>
+          </a:prstGeom>
+          <a:noFill/>
+          <a:ln/>
+        </p:spPr>
+        <p:txBody>
+          <a:bodyPr wrap="square" lIns="0" tIns="0" rIns="0" bIns="0" rtlCol="0" anchor="ctr"/>
+          <a:lstStyle/>
+          <a:p>
+            <a:pPr algn="r" indent="0" marL="0">
+              <a:buNone/>
+            </a:pPr>
+            <a:r>
+              <a:rPr lang="en-US" sz="700" dirty="0">
+                <a:solidFill>
+                  <a:srgbClr val="8FA6B8"/>
+                </a:solidFill>
+                <a:latin typeface="Arial" pitchFamily="34" charset="0"/>
+                <a:ea typeface="Arial" pitchFamily="34" charset="-122"/>
+                <a:cs typeface="Arial" pitchFamily="34" charset="-120"/>
+              </a:rPr>
+              <a:t>4</a:t>
+            </a:r>
+            <a:endParaRPr lang="en-US" sz="700" dirty="0"/>
+          </a:p>
+        </p:txBody>
+      </p:sp>
+    </p:spTree>
+  </p:cSld>
+  <p:clrMapOvr>
+    <a:masterClrMapping/>
+  </p:clrMapOvr>
+</p:sld>
+</file>
+
+<file path=ppt/slides/slide5.xml><?xml version="1.0" encoding="utf-8"?>
+<p:sld xmlns:a="http://schemas.openxmlformats.org/drawingml/2006/main" xmlns:r="http://schemas.openxmlformats.org/officeDocument/2006/relationships" xmlns:p="http://schemas.openxmlformats.org/presentationml/2006/main">
+  <p:cSld name="Slide 5">
+    <p:bg>
+      <p:bgPr>
+        <a:solidFill>
+          <a:srgbClr val="0B1724"/>
+        </a:solidFill>
+      </p:bgPr>
+    </p:bg>
+    <p:spTree>
+      <p:nvGrpSpPr>
+        <p:cNvPr id="1" name=""/>
+        <p:cNvGrpSpPr/>
+        <p:nvPr/>
+      </p:nvGrpSpPr>
+      <p:grpSpPr>
+        <a:xfrm>
+          <a:off x="0" y="0"/>
+          <a:ext cx="0" cy="0"/>
+          <a:chOff x="0" y="0"/>
+          <a:chExt cx="0" cy="0"/>
+        </a:xfrm>
+      </p:grpSpPr>
+      <p:sp>
+        <p:nvSpPr>
+          <p:cNvPr id="2" name="Shape 0"/>
+          <p:cNvSpPr/>
+          <p:nvPr/>
+        </p:nvSpPr>
+        <p:spPr>
+          <a:xfrm>
+            <a:off x="365760" y="347472"/>
+            <a:ext cx="73152" cy="457200"/>
+          </a:xfrm>
+          <a:prstGeom prst="rect">
+            <a:avLst/>
+          </a:prstGeom>
+          <a:solidFill>
+            <a:srgbClr val="F2D38A"/>
+          </a:solidFill>
+          <a:ln w="12700">
+            <a:solidFill>
+              <a:srgbClr val="F2D38A"/>
+            </a:solidFill>
+            <a:prstDash val="solid"/>
+          </a:ln>
+        </p:spPr>
+      </p:sp>
+      <p:sp>
+        <p:nvSpPr>
+          <p:cNvPr id="3" name="Text 1"/>
+          <p:cNvSpPr txBox="1"/>
+          <p:nvPr/>
+        </p:nvSpPr>
+        <p:spPr>
+          <a:xfrm>
+            <a:off x="548640" y="274320"/>
+            <a:ext cx="8138160" cy="457200"/>
+          </a:xfrm>
+          <a:prstGeom prst="rect">
+            <a:avLst/>
+          </a:prstGeom>
+          <a:noFill/>
+          <a:ln/>
+        </p:spPr>
+        <p:txBody>
+          <a:bodyPr wrap="square" lIns="0" tIns="0" rIns="0" bIns="0" rtlCol="0" anchor="ctr"/>
+          <a:lstStyle/>
+          <a:p>
+            <a:pPr indent="0" marL="0">
+              <a:buNone/>
+            </a:pPr>
+            <a:r>
+              <a:rPr lang="en-US" sz="2400" dirty="0">
+                <a:solidFill>
+                  <a:srgbClr val="E9F2FF"/>
                 </a:solidFill>
                 <a:latin typeface="Georgia" pitchFamily="34" charset="0"/>
                 <a:ea typeface="Georgia" pitchFamily="34" charset="-122"/>
                 <a:cs typeface="Georgia" pitchFamily="34" charset="-120"/>
               </a:rPr>
-              <a:t>9 vs 13</a:t>
-            </a:r>
-            <a:endParaRPr lang="en-US" sz="2800" dirty="0"/>
-          </a:p>
-        </p:txBody>
-      </p:sp>
-      <p:sp>
-        <p:nvSpPr>
-          <p:cNvPr id="9" name="Text 6"/>
+              <a:t>Arriving next: the DESNZ AI energy vision</a:t>
+            </a:r>
+            <a:endParaRPr lang="en-US" sz="2400" dirty="0"/>
+          </a:p>
+        </p:txBody>
+      </p:sp>
+      <p:sp>
+        <p:nvSpPr>
+          <p:cNvPr id="4" name="Text 2"/>
           <p:cNvSpPr txBox="1"/>
           <p:nvPr/>
         </p:nvSpPr>
         <p:spPr>
           <a:xfrm>
-            <a:off x="6263640" y="2871216"/>
-            <a:ext cx="2240280" cy="365760"/>
+            <a:off x="548640" y="713232"/>
+            <a:ext cx="8138160" cy="256032"/>
           </a:xfrm>
           <a:prstGeom prst="rect">
             <a:avLst/>
@@ -3581,14 +4431,14 @@
           <a:ln/>
         </p:spPr>
         <p:txBody>
-          <a:bodyPr wrap="square" lIns="0" tIns="0" rIns="0" bIns="0" rtlCol="0" anchor="t"/>
-          <a:lstStyle/>
-          <a:p>
-            <a:pPr indent="0" marL="0">
-              <a:buNone/>
-            </a:pPr>
-            <a:r>
-              <a:rPr lang="en-US" sz="900" dirty="0">
+          <a:bodyPr wrap="square" lIns="0" tIns="0" rIns="0" bIns="0" rtlCol="0" anchor="ctr"/>
+          <a:lstStyle/>
+          <a:p>
+            <a:pPr indent="0" marL="0">
+              <a:buNone/>
+            </a:pPr>
+            <a:r>
+              <a:rPr lang="en-US" sz="1050" dirty="0">
                 <a:solidFill>
                   <a:srgbClr val="8FA6B8"/>
                 </a:solidFill>
@@ -3596,22 +4446,74 @@
                 <a:ea typeface="Arial" pitchFamily="34" charset="-122"/>
                 <a:cs typeface="Arial" pitchFamily="34" charset="-120"/>
               </a:rPr>
-              <a:t>Years to change, outlook to 2036: AI-driven routes against conventional ones</a:t>
-            </a:r>
-            <a:endParaRPr lang="en-US" sz="900" dirty="0"/>
-          </a:p>
-        </p:txBody>
-      </p:sp>
-      <p:sp>
-        <p:nvSpPr>
-          <p:cNvPr id="10" name="Text 7"/>
+              <a:t>Readiness of the technologies behind each area, and the soonest expected arrival</a:t>
+            </a:r>
+            <a:endParaRPr lang="en-US" sz="1050" dirty="0"/>
+          </a:p>
+        </p:txBody>
+      </p:sp>
+      <p:sp>
+        <p:nvSpPr>
+          <p:cNvPr id="5" name="Shape 3"/>
+          <p:cNvSpPr/>
+          <p:nvPr/>
+        </p:nvSpPr>
+        <p:spPr>
+          <a:xfrm>
+            <a:off x="365760" y="1097280"/>
+            <a:ext cx="1609344" cy="2926080"/>
+          </a:xfrm>
+          <a:prstGeom prst="roundRect">
+            <a:avLst>
+              <a:gd name="adj" fmla="val 4545"/>
+            </a:avLst>
+          </a:prstGeom>
+          <a:solidFill>
+            <a:srgbClr val="13283A"/>
+          </a:solidFill>
+          <a:ln w="9525">
+            <a:solidFill>
+              <a:srgbClr val="22384A"/>
+            </a:solidFill>
+            <a:prstDash val="solid"/>
+          </a:ln>
+        </p:spPr>
+      </p:sp>
+      <p:sp>
+        <p:nvSpPr>
+          <p:cNvPr id="6" name="Shape 4"/>
+          <p:cNvSpPr/>
+          <p:nvPr/>
+        </p:nvSpPr>
+        <p:spPr>
+          <a:xfrm>
+            <a:off x="365760" y="1207008"/>
+            <a:ext cx="45720" cy="2706624"/>
+          </a:xfrm>
+          <a:prstGeom prst="rect">
+            <a:avLst/>
+          </a:prstGeom>
+          <a:solidFill>
+            <a:srgbClr val="F2D38A"/>
+          </a:solidFill>
+          <a:ln w="12700">
+            <a:solidFill>
+              <a:srgbClr val="F2D38A"/>
+            </a:solidFill>
+            <a:prstDash val="solid"/>
+          </a:ln>
+        </p:spPr>
+      </p:sp>
+      <p:sp>
+        <p:nvSpPr>
+          <p:cNvPr id="7" name="Text 5"/>
           <p:cNvSpPr txBox="1"/>
           <p:nvPr/>
         </p:nvSpPr>
         <p:spPr>
           <a:xfrm>
-            <a:off x="6080760" y="3429000"/>
-            <a:ext cx="2606040" cy="1005840"/>
+            <a:off x="502920" y="1170432"/>
+            <a:ext cx="1380744" cy="566928"/>
           </a:xfrm>
           <a:prstGeom prst="rect">
             <a:avLst/>
@@ -3627,30 +4529,130 @@
               <a:buNone/>
             </a:pPr>
             <a:r>
-              <a:rPr lang="en-US" sz="900" dirty="0">
-                <a:solidFill>
-                  <a:srgbClr val="B7C6D2"/>
-                </a:solidFill>
-                <a:latin typeface="Arial" pitchFamily="34" charset="0"/>
-                <a:ea typeface="Arial" pitchFamily="34" charset="-122"/>
-                <a:cs typeface="Arial" pitchFamily="34" charset="-120"/>
-              </a:rPr>
-              <a:t>AI compresses discovery, design and testing. It does not compress factories, clinical trials, safety cases, standards or planning consent.</a:t>
-            </a:r>
-            <a:endParaRPr lang="en-US" sz="900" dirty="0"/>
-          </a:p>
-        </p:txBody>
-      </p:sp>
-      <p:sp>
-        <p:nvSpPr>
-          <p:cNvPr id="12" name="Text 8"/>
+              <a:rPr lang="en-US" sz="950" b="1" dirty="0">
+                <a:solidFill>
+                  <a:srgbClr val="E9F2FF"/>
+                </a:solidFill>
+                <a:latin typeface="Arial" pitchFamily="34" charset="0"/>
+                <a:ea typeface="Arial" pitchFamily="34" charset="-122"/>
+                <a:cs typeface="Arial" pitchFamily="34" charset="-120"/>
+              </a:rPr>
+              <a:t>System optimisation and operation</a:t>
+            </a:r>
+            <a:endParaRPr lang="en-US" sz="950" dirty="0"/>
+          </a:p>
+        </p:txBody>
+      </p:sp>
+      <p:sp>
+        <p:nvSpPr>
+          <p:cNvPr id="8" name="Shape 6"/>
+          <p:cNvSpPr/>
+          <p:nvPr/>
+        </p:nvSpPr>
+        <p:spPr>
+          <a:xfrm>
+            <a:off x="502920" y="1783080"/>
+            <a:ext cx="333756" cy="146304"/>
+          </a:xfrm>
+          <a:prstGeom prst="rect">
+            <a:avLst/>
+          </a:prstGeom>
+          <a:solidFill>
+            <a:srgbClr val="8FA6B8"/>
+          </a:solidFill>
+          <a:ln w="12700">
+            <a:solidFill>
+              <a:srgbClr val="8FA6B8"/>
+            </a:solidFill>
+            <a:prstDash val="solid"/>
+          </a:ln>
+        </p:spPr>
+      </p:sp>
+      <p:sp>
+        <p:nvSpPr>
+          <p:cNvPr id="9" name="Shape 7"/>
+          <p:cNvSpPr/>
+          <p:nvPr/>
+        </p:nvSpPr>
+        <p:spPr>
+          <a:xfrm>
+            <a:off x="836676" y="1783080"/>
+            <a:ext cx="166878" cy="146304"/>
+          </a:xfrm>
+          <a:prstGeom prst="rect">
+            <a:avLst/>
+          </a:prstGeom>
+          <a:solidFill>
+            <a:srgbClr val="F2D38A"/>
+          </a:solidFill>
+          <a:ln w="12700">
+            <a:solidFill>
+              <a:srgbClr val="F2D38A"/>
+            </a:solidFill>
+            <a:prstDash val="solid"/>
+          </a:ln>
+        </p:spPr>
+      </p:sp>
+      <p:sp>
+        <p:nvSpPr>
+          <p:cNvPr id="10" name="Shape 8"/>
+          <p:cNvSpPr/>
+          <p:nvPr/>
+        </p:nvSpPr>
+        <p:spPr>
+          <a:xfrm>
+            <a:off x="1003554" y="1783080"/>
+            <a:ext cx="667512" cy="146304"/>
+          </a:xfrm>
+          <a:prstGeom prst="rect">
+            <a:avLst/>
+          </a:prstGeom>
+          <a:solidFill>
+            <a:srgbClr val="5FD8FF"/>
+          </a:solidFill>
+          <a:ln w="12700">
+            <a:solidFill>
+              <a:srgbClr val="5FD8FF"/>
+            </a:solidFill>
+            <a:prstDash val="solid"/>
+          </a:ln>
+        </p:spPr>
+      </p:sp>
+      <p:sp>
+        <p:nvSpPr>
+          <p:cNvPr id="11" name="Shape 9"/>
+          <p:cNvSpPr/>
+          <p:nvPr/>
+        </p:nvSpPr>
+        <p:spPr>
+          <a:xfrm>
+            <a:off x="1671066" y="1783080"/>
+            <a:ext cx="166878" cy="146304"/>
+          </a:xfrm>
+          <a:prstGeom prst="rect">
+            <a:avLst/>
+          </a:prstGeom>
+          <a:solidFill>
+            <a:srgbClr val="7FD6A0"/>
+          </a:solidFill>
+          <a:ln w="12700">
+            <a:solidFill>
+              <a:srgbClr val="7FD6A0"/>
+            </a:solidFill>
+            <a:prstDash val="solid"/>
+          </a:ln>
+        </p:spPr>
+      </p:sp>
+      <p:sp>
+        <p:nvSpPr>
+          <p:cNvPr id="12" name="Text 10"/>
           <p:cNvSpPr txBox="1"/>
           <p:nvPr/>
         </p:nvSpPr>
         <p:spPr>
           <a:xfrm>
-            <a:off x="457200" y="4754880"/>
-            <a:ext cx="7680960" cy="274320"/>
+            <a:off x="502920" y="1965960"/>
+            <a:ext cx="1380744" cy="274320"/>
           </a:xfrm>
           <a:prstGeom prst="rect">
             <a:avLst/>
@@ -3666,7 +4668,7 @@
               <a:buNone/>
             </a:pPr>
             <a:r>
-              <a:rPr lang="en-US" sz="700" dirty="0">
+              <a:rPr lang="en-US" sz="750" dirty="0">
                 <a:solidFill>
                   <a:srgbClr val="8FA6B8"/>
                 </a:solidFill>
@@ -3674,22 +4676,22 @@
                 <a:ea typeface="Arial" pitchFamily="34" charset="-122"/>
                 <a:cs typeface="Arial" pitchFamily="34" charset="-120"/>
               </a:rPr>
-              <a:t>Stuart Okin, personal project. Data as of 2026-10-27, maintained by AI agents without human review and may contain errors. Outlook years are AI estimates. Selection: All fields.</a:t>
-            </a:r>
-            <a:endParaRPr lang="en-US" sz="700" dirty="0"/>
-          </a:p>
-        </p:txBody>
-      </p:sp>
-      <p:sp>
-        <p:nvSpPr>
-          <p:cNvPr id="13" name="Text 9"/>
+              <a:t>16 technologies, 6 deployed in GB</a:t>
+            </a:r>
+            <a:endParaRPr lang="en-US" sz="750" dirty="0"/>
+          </a:p>
+        </p:txBody>
+      </p:sp>
+      <p:sp>
+        <p:nvSpPr>
+          <p:cNvPr id="13" name="Text 11"/>
           <p:cNvSpPr txBox="1"/>
           <p:nvPr/>
         </p:nvSpPr>
         <p:spPr>
           <a:xfrm>
-            <a:off x="8321040" y="4754880"/>
-            <a:ext cx="365760" cy="274320"/>
+            <a:off x="502920" y="2286000"/>
+            <a:ext cx="1380744" cy="1645920"/>
           </a:xfrm>
           <a:prstGeom prst="rect">
             <a:avLst/>
@@ -3698,14 +4700,1372 @@
           <a:ln/>
         </p:spPr>
         <p:txBody>
+          <a:bodyPr wrap="square" lIns="0" tIns="0" rIns="0" bIns="0" rtlCol="0" anchor="t"/>
+          <a:lstStyle/>
+          <a:p>
+            <a:pPr indent="0" marL="0">
+              <a:spcAft>
+                <a:spcPts val="200"/>
+              </a:spcAft>
+              <a:buNone/>
+            </a:pPr>
+            <a:r>
+              <a:rPr lang="en-US" sz="800" b="1" dirty="0">
+                <a:solidFill>
+                  <a:srgbClr val="F2D38A"/>
+                </a:solidFill>
+                <a:latin typeface="Arial" pitchFamily="34" charset="0"/>
+                <a:ea typeface="Arial" pitchFamily="34" charset="-122"/>
+                <a:cs typeface="Arial" pitchFamily="34" charset="-120"/>
+              </a:rPr>
+              <a:t>Next</a:t>
+            </a:r>
+            <a:endParaRPr lang="en-US" sz="800" dirty="0"/>
+          </a:p>
+          <a:p>
+            <a:pPr indent="0" marL="0">
+              <a:spcAft>
+                <a:spcPts val="500"/>
+              </a:spcAft>
+              <a:buNone/>
+            </a:pPr>
+            <a:r>
+              <a:rPr lang="en-US" sz="850" dirty="0">
+                <a:solidFill>
+                  <a:srgbClr val="E9F2FF"/>
+                </a:solidFill>
+                <a:latin typeface="Arial" pitchFamily="34" charset="0"/>
+                <a:ea typeface="Arial" pitchFamily="34" charset="-122"/>
+                <a:cs typeface="Arial" pitchFamily="34" charset="-120"/>
+              </a:rPr>
+              <a:t>~2027  AI in grid control rooms</a:t>
+            </a:r>
+            <a:endParaRPr lang="en-US" sz="800" dirty="0"/>
+          </a:p>
+          <a:p>
+            <a:pPr indent="0" marL="0">
+              <a:spcAft>
+                <a:spcPts val="500"/>
+              </a:spcAft>
+              <a:buNone/>
+            </a:pPr>
+            <a:r>
+              <a:rPr lang="en-US" sz="850" dirty="0">
+                <a:solidFill>
+                  <a:srgbClr val="E9F2FF"/>
+                </a:solidFill>
+                <a:latin typeface="Arial" pitchFamily="34" charset="0"/>
+                <a:ea typeface="Arial" pitchFamily="34" charset="-122"/>
+                <a:cs typeface="Arial" pitchFamily="34" charset="-120"/>
+              </a:rPr>
+              <a:t>~2028  Weather-driven fault forecasting</a:t>
+            </a:r>
+            <a:endParaRPr lang="en-US" sz="800" dirty="0"/>
+          </a:p>
+        </p:txBody>
+      </p:sp>
+      <p:sp>
+        <p:nvSpPr>
+          <p:cNvPr id="14" name="Shape 12"/>
+          <p:cNvSpPr/>
+          <p:nvPr/>
+        </p:nvSpPr>
+        <p:spPr>
+          <a:xfrm>
+            <a:off x="2066544" y="1097280"/>
+            <a:ext cx="1609344" cy="2926080"/>
+          </a:xfrm>
+          <a:prstGeom prst="roundRect">
+            <a:avLst>
+              <a:gd name="adj" fmla="val 4545"/>
+            </a:avLst>
+          </a:prstGeom>
+          <a:solidFill>
+            <a:srgbClr val="13283A"/>
+          </a:solidFill>
+          <a:ln w="9525">
+            <a:solidFill>
+              <a:srgbClr val="22384A"/>
+            </a:solidFill>
+            <a:prstDash val="solid"/>
+          </a:ln>
+        </p:spPr>
+      </p:sp>
+      <p:sp>
+        <p:nvSpPr>
+          <p:cNvPr id="15" name="Shape 13"/>
+          <p:cNvSpPr/>
+          <p:nvPr/>
+        </p:nvSpPr>
+        <p:spPr>
+          <a:xfrm>
+            <a:off x="2066544" y="1207008"/>
+            <a:ext cx="45720" cy="2706624"/>
+          </a:xfrm>
+          <a:prstGeom prst="rect">
+            <a:avLst/>
+          </a:prstGeom>
+          <a:solidFill>
+            <a:srgbClr val="F2D38A"/>
+          </a:solidFill>
+          <a:ln w="12700">
+            <a:solidFill>
+              <a:srgbClr val="F2D38A"/>
+            </a:solidFill>
+            <a:prstDash val="solid"/>
+          </a:ln>
+        </p:spPr>
+      </p:sp>
+      <p:sp>
+        <p:nvSpPr>
+          <p:cNvPr id="16" name="Text 14"/>
+          <p:cNvSpPr txBox="1"/>
+          <p:nvPr/>
+        </p:nvSpPr>
+        <p:spPr>
+          <a:xfrm>
+            <a:off x="2203704" y="1170432"/>
+            <a:ext cx="1380744" cy="566928"/>
+          </a:xfrm>
+          <a:prstGeom prst="rect">
+            <a:avLst/>
+          </a:prstGeom>
+          <a:noFill/>
+          <a:ln/>
+        </p:spPr>
+        <p:txBody>
+          <a:bodyPr wrap="square" lIns="0" tIns="0" rIns="0" bIns="0" rtlCol="0" anchor="t"/>
+          <a:lstStyle/>
+          <a:p>
+            <a:pPr indent="0" marL="0">
+              <a:buNone/>
+            </a:pPr>
+            <a:r>
+              <a:rPr lang="en-US" sz="950" b="1" dirty="0">
+                <a:solidFill>
+                  <a:srgbClr val="E9F2FF"/>
+                </a:solidFill>
+                <a:latin typeface="Arial" pitchFamily="34" charset="0"/>
+                <a:ea typeface="Arial" pitchFamily="34" charset="-122"/>
+                <a:cs typeface="Arial" pitchFamily="34" charset="-120"/>
+              </a:rPr>
+              <a:t>Asset planning, operation and maintenance</a:t>
+            </a:r>
+            <a:endParaRPr lang="en-US" sz="950" dirty="0"/>
+          </a:p>
+        </p:txBody>
+      </p:sp>
+      <p:sp>
+        <p:nvSpPr>
+          <p:cNvPr id="17" name="Shape 15"/>
+          <p:cNvSpPr/>
+          <p:nvPr/>
+        </p:nvSpPr>
+        <p:spPr>
+          <a:xfrm>
+            <a:off x="2203704" y="1783080"/>
+            <a:ext cx="485463" cy="146304"/>
+          </a:xfrm>
+          <a:prstGeom prst="rect">
+            <a:avLst/>
+          </a:prstGeom>
+          <a:solidFill>
+            <a:srgbClr val="8FA6B8"/>
+          </a:solidFill>
+          <a:ln w="12700">
+            <a:solidFill>
+              <a:srgbClr val="8FA6B8"/>
+            </a:solidFill>
+            <a:prstDash val="solid"/>
+          </a:ln>
+        </p:spPr>
+      </p:sp>
+      <p:sp>
+        <p:nvSpPr>
+          <p:cNvPr id="18" name="Shape 16"/>
+          <p:cNvSpPr/>
+          <p:nvPr/>
+        </p:nvSpPr>
+        <p:spPr>
+          <a:xfrm>
+            <a:off x="2689167" y="1783080"/>
+            <a:ext cx="242732" cy="146304"/>
+          </a:xfrm>
+          <a:prstGeom prst="rect">
+            <a:avLst/>
+          </a:prstGeom>
+          <a:solidFill>
+            <a:srgbClr val="F2D38A"/>
+          </a:solidFill>
+          <a:ln w="12700">
+            <a:solidFill>
+              <a:srgbClr val="F2D38A"/>
+            </a:solidFill>
+            <a:prstDash val="solid"/>
+          </a:ln>
+        </p:spPr>
+      </p:sp>
+      <p:sp>
+        <p:nvSpPr>
+          <p:cNvPr id="19" name="Shape 17"/>
+          <p:cNvSpPr/>
+          <p:nvPr/>
+        </p:nvSpPr>
+        <p:spPr>
+          <a:xfrm>
+            <a:off x="2931899" y="1783080"/>
+            <a:ext cx="606829" cy="146304"/>
+          </a:xfrm>
+          <a:prstGeom prst="rect">
+            <a:avLst/>
+          </a:prstGeom>
+          <a:solidFill>
+            <a:srgbClr val="5FD8FF"/>
+          </a:solidFill>
+          <a:ln w="12700">
+            <a:solidFill>
+              <a:srgbClr val="5FD8FF"/>
+            </a:solidFill>
+            <a:prstDash val="solid"/>
+          </a:ln>
+        </p:spPr>
+      </p:sp>
+      <p:sp>
+        <p:nvSpPr>
+          <p:cNvPr id="20" name="Text 18"/>
+          <p:cNvSpPr txBox="1"/>
+          <p:nvPr/>
+        </p:nvSpPr>
+        <p:spPr>
+          <a:xfrm>
+            <a:off x="2203704" y="1965960"/>
+            <a:ext cx="1380744" cy="274320"/>
+          </a:xfrm>
+          <a:prstGeom prst="rect">
+            <a:avLst/>
+          </a:prstGeom>
+          <a:noFill/>
+          <a:ln/>
+        </p:spPr>
+        <p:txBody>
           <a:bodyPr wrap="square" lIns="0" tIns="0" rIns="0" bIns="0" rtlCol="0" anchor="ctr"/>
           <a:lstStyle/>
           <a:p>
+            <a:pPr indent="0" marL="0">
+              <a:buNone/>
+            </a:pPr>
+            <a:r>
+              <a:rPr lang="en-US" sz="750" dirty="0">
+                <a:solidFill>
+                  <a:srgbClr val="8FA6B8"/>
+                </a:solidFill>
+                <a:latin typeface="Arial" pitchFamily="34" charset="0"/>
+                <a:ea typeface="Arial" pitchFamily="34" charset="-122"/>
+                <a:cs typeface="Arial" pitchFamily="34" charset="-120"/>
+              </a:rPr>
+              <a:t>11 technologies, 2 deployed in GB</a:t>
+            </a:r>
+            <a:endParaRPr lang="en-US" sz="750" dirty="0"/>
+          </a:p>
+        </p:txBody>
+      </p:sp>
+      <p:sp>
+        <p:nvSpPr>
+          <p:cNvPr id="21" name="Text 19"/>
+          <p:cNvSpPr txBox="1"/>
+          <p:nvPr/>
+        </p:nvSpPr>
+        <p:spPr>
+          <a:xfrm>
+            <a:off x="2203704" y="2286000"/>
+            <a:ext cx="1380744" cy="1645920"/>
+          </a:xfrm>
+          <a:prstGeom prst="rect">
+            <a:avLst/>
+          </a:prstGeom>
+          <a:noFill/>
+          <a:ln/>
+        </p:spPr>
+        <p:txBody>
+          <a:bodyPr wrap="square" lIns="0" tIns="0" rIns="0" bIns="0" rtlCol="0" anchor="t"/>
+          <a:lstStyle/>
+          <a:p>
+            <a:pPr indent="0" marL="0">
+              <a:spcAft>
+                <a:spcPts val="200"/>
+              </a:spcAft>
+              <a:buNone/>
+            </a:pPr>
+            <a:r>
+              <a:rPr lang="en-US" sz="800" b="1" dirty="0">
+                <a:solidFill>
+                  <a:srgbClr val="F2D38A"/>
+                </a:solidFill>
+                <a:latin typeface="Arial" pitchFamily="34" charset="0"/>
+                <a:ea typeface="Arial" pitchFamily="34" charset="-122"/>
+                <a:cs typeface="Arial" pitchFamily="34" charset="-120"/>
+              </a:rPr>
+              <a:t>Next</a:t>
+            </a:r>
+            <a:endParaRPr lang="en-US" sz="800" dirty="0"/>
+          </a:p>
+          <a:p>
+            <a:pPr indent="0" marL="0">
+              <a:spcAft>
+                <a:spcPts val="500"/>
+              </a:spcAft>
+              <a:buNone/>
+            </a:pPr>
+            <a:r>
+              <a:rPr lang="en-US" sz="850" dirty="0">
+                <a:solidFill>
+                  <a:srgbClr val="E9F2FF"/>
+                </a:solidFill>
+                <a:latin typeface="Arial" pitchFamily="34" charset="0"/>
+                <a:ea typeface="Arial" pitchFamily="34" charset="-122"/>
+                <a:cs typeface="Arial" pitchFamily="34" charset="-120"/>
+              </a:rPr>
+              <a:t>~2027  Network-wide satellite AI tree management in GB</a:t>
+            </a:r>
+            <a:endParaRPr lang="en-US" sz="800" dirty="0"/>
+          </a:p>
+          <a:p>
+            <a:pPr indent="0" marL="0">
+              <a:spcAft>
+                <a:spcPts val="500"/>
+              </a:spcAft>
+              <a:buNone/>
+            </a:pPr>
+            <a:r>
+              <a:rPr lang="en-US" sz="850" dirty="0">
+                <a:solidFill>
+                  <a:srgbClr val="E9F2FF"/>
+                </a:solidFill>
+                <a:latin typeface="Arial" pitchFamily="34" charset="0"/>
+                <a:ea typeface="Arial" pitchFamily="34" charset="-122"/>
+                <a:cs typeface="Arial" pitchFamily="34" charset="-120"/>
+              </a:rPr>
+              <a:t>~2028  AI predictive maintenance across networks</a:t>
+            </a:r>
+            <a:endParaRPr lang="en-US" sz="800" dirty="0"/>
+          </a:p>
+        </p:txBody>
+      </p:sp>
+      <p:sp>
+        <p:nvSpPr>
+          <p:cNvPr id="22" name="Shape 20"/>
+          <p:cNvSpPr/>
+          <p:nvPr/>
+        </p:nvSpPr>
+        <p:spPr>
+          <a:xfrm>
+            <a:off x="3767328" y="1097280"/>
+            <a:ext cx="1609344" cy="2926080"/>
+          </a:xfrm>
+          <a:prstGeom prst="roundRect">
+            <a:avLst>
+              <a:gd name="adj" fmla="val 4545"/>
+            </a:avLst>
+          </a:prstGeom>
+          <a:solidFill>
+            <a:srgbClr val="13283A"/>
+          </a:solidFill>
+          <a:ln w="9525">
+            <a:solidFill>
+              <a:srgbClr val="22384A"/>
+            </a:solidFill>
+            <a:prstDash val="solid"/>
+          </a:ln>
+        </p:spPr>
+      </p:sp>
+      <p:sp>
+        <p:nvSpPr>
+          <p:cNvPr id="23" name="Shape 21"/>
+          <p:cNvSpPr/>
+          <p:nvPr/>
+        </p:nvSpPr>
+        <p:spPr>
+          <a:xfrm>
+            <a:off x="3767328" y="1207008"/>
+            <a:ext cx="45720" cy="2706624"/>
+          </a:xfrm>
+          <a:prstGeom prst="rect">
+            <a:avLst/>
+          </a:prstGeom>
+          <a:solidFill>
+            <a:srgbClr val="F2D38A"/>
+          </a:solidFill>
+          <a:ln w="12700">
+            <a:solidFill>
+              <a:srgbClr val="F2D38A"/>
+            </a:solidFill>
+            <a:prstDash val="solid"/>
+          </a:ln>
+        </p:spPr>
+      </p:sp>
+      <p:sp>
+        <p:nvSpPr>
+          <p:cNvPr id="24" name="Text 22"/>
+          <p:cNvSpPr txBox="1"/>
+          <p:nvPr/>
+        </p:nvSpPr>
+        <p:spPr>
+          <a:xfrm>
+            <a:off x="3904488" y="1170432"/>
+            <a:ext cx="1380744" cy="566928"/>
+          </a:xfrm>
+          <a:prstGeom prst="rect">
+            <a:avLst/>
+          </a:prstGeom>
+          <a:noFill/>
+          <a:ln/>
+        </p:spPr>
+        <p:txBody>
+          <a:bodyPr wrap="square" lIns="0" tIns="0" rIns="0" bIns="0" rtlCol="0" anchor="t"/>
+          <a:lstStyle/>
+          <a:p>
+            <a:pPr indent="0" marL="0">
+              <a:buNone/>
+            </a:pPr>
+            <a:r>
+              <a:rPr lang="en-US" sz="950" b="1" dirty="0">
+                <a:solidFill>
+                  <a:srgbClr val="E9F2FF"/>
+                </a:solidFill>
+                <a:latin typeface="Arial" pitchFamily="34" charset="0"/>
+                <a:ea typeface="Arial" pitchFamily="34" charset="-122"/>
+                <a:cs typeface="Arial" pitchFamily="34" charset="-120"/>
+              </a:rPr>
+              <a:t>End-use efficiency and demand</a:t>
+            </a:r>
+            <a:endParaRPr lang="en-US" sz="950" dirty="0"/>
+          </a:p>
+        </p:txBody>
+      </p:sp>
+      <p:sp>
+        <p:nvSpPr>
+          <p:cNvPr id="25" name="Shape 23"/>
+          <p:cNvSpPr/>
+          <p:nvPr/>
+        </p:nvSpPr>
+        <p:spPr>
+          <a:xfrm>
+            <a:off x="3904488" y="1783080"/>
+            <a:ext cx="308082" cy="146304"/>
+          </a:xfrm>
+          <a:prstGeom prst="rect">
+            <a:avLst/>
+          </a:prstGeom>
+          <a:solidFill>
+            <a:srgbClr val="8FA6B8"/>
+          </a:solidFill>
+          <a:ln w="12700">
+            <a:solidFill>
+              <a:srgbClr val="8FA6B8"/>
+            </a:solidFill>
+            <a:prstDash val="solid"/>
+          </a:ln>
+        </p:spPr>
+      </p:sp>
+      <p:sp>
+        <p:nvSpPr>
+          <p:cNvPr id="26" name="Shape 24"/>
+          <p:cNvSpPr/>
+          <p:nvPr/>
+        </p:nvSpPr>
+        <p:spPr>
+          <a:xfrm>
+            <a:off x="4212570" y="1783080"/>
+            <a:ext cx="102694" cy="146304"/>
+          </a:xfrm>
+          <a:prstGeom prst="rect">
+            <a:avLst/>
+          </a:prstGeom>
+          <a:solidFill>
+            <a:srgbClr val="F2D38A"/>
+          </a:solidFill>
+          <a:ln w="12700">
+            <a:solidFill>
+              <a:srgbClr val="F2D38A"/>
+            </a:solidFill>
+            <a:prstDash val="solid"/>
+          </a:ln>
+        </p:spPr>
+      </p:sp>
+      <p:sp>
+        <p:nvSpPr>
+          <p:cNvPr id="27" name="Shape 25"/>
+          <p:cNvSpPr/>
+          <p:nvPr/>
+        </p:nvSpPr>
+        <p:spPr>
+          <a:xfrm>
+            <a:off x="4315265" y="1783080"/>
+            <a:ext cx="513471" cy="146304"/>
+          </a:xfrm>
+          <a:prstGeom prst="rect">
+            <a:avLst/>
+          </a:prstGeom>
+          <a:solidFill>
+            <a:srgbClr val="5FD8FF"/>
+          </a:solidFill>
+          <a:ln w="12700">
+            <a:solidFill>
+              <a:srgbClr val="5FD8FF"/>
+            </a:solidFill>
+            <a:prstDash val="solid"/>
+          </a:ln>
+        </p:spPr>
+      </p:sp>
+      <p:sp>
+        <p:nvSpPr>
+          <p:cNvPr id="28" name="Shape 26"/>
+          <p:cNvSpPr/>
+          <p:nvPr/>
+        </p:nvSpPr>
+        <p:spPr>
+          <a:xfrm>
+            <a:off x="4828735" y="1783080"/>
+            <a:ext cx="410777" cy="146304"/>
+          </a:xfrm>
+          <a:prstGeom prst="rect">
+            <a:avLst/>
+          </a:prstGeom>
+          <a:solidFill>
+            <a:srgbClr val="7FD6A0"/>
+          </a:solidFill>
+          <a:ln w="12700">
+            <a:solidFill>
+              <a:srgbClr val="7FD6A0"/>
+            </a:solidFill>
+            <a:prstDash val="solid"/>
+          </a:ln>
+        </p:spPr>
+      </p:sp>
+      <p:sp>
+        <p:nvSpPr>
+          <p:cNvPr id="29" name="Text 27"/>
+          <p:cNvSpPr txBox="1"/>
+          <p:nvPr/>
+        </p:nvSpPr>
+        <p:spPr>
+          <a:xfrm>
+            <a:off x="3904488" y="1965960"/>
+            <a:ext cx="1380744" cy="274320"/>
+          </a:xfrm>
+          <a:prstGeom prst="rect">
+            <a:avLst/>
+          </a:prstGeom>
+          <a:noFill/>
+          <a:ln/>
+        </p:spPr>
+        <p:txBody>
+          <a:bodyPr wrap="square" lIns="0" tIns="0" rIns="0" bIns="0" rtlCol="0" anchor="ctr"/>
+          <a:lstStyle/>
+          <a:p>
+            <a:pPr indent="0" marL="0">
+              <a:buNone/>
+            </a:pPr>
+            <a:r>
+              <a:rPr lang="en-US" sz="750" dirty="0">
+                <a:solidFill>
+                  <a:srgbClr val="8FA6B8"/>
+                </a:solidFill>
+                <a:latin typeface="Arial" pitchFamily="34" charset="0"/>
+                <a:ea typeface="Arial" pitchFamily="34" charset="-122"/>
+                <a:cs typeface="Arial" pitchFamily="34" charset="-120"/>
+              </a:rPr>
+              <a:t>13 technologies, 8 deployed in GB</a:t>
+            </a:r>
+            <a:endParaRPr lang="en-US" sz="750" dirty="0"/>
+          </a:p>
+        </p:txBody>
+      </p:sp>
+      <p:sp>
+        <p:nvSpPr>
+          <p:cNvPr id="30" name="Text 28"/>
+          <p:cNvSpPr txBox="1"/>
+          <p:nvPr/>
+        </p:nvSpPr>
+        <p:spPr>
+          <a:xfrm>
+            <a:off x="3904488" y="2286000"/>
+            <a:ext cx="1380744" cy="1645920"/>
+          </a:xfrm>
+          <a:prstGeom prst="rect">
+            <a:avLst/>
+          </a:prstGeom>
+          <a:noFill/>
+          <a:ln/>
+        </p:spPr>
+        <p:txBody>
+          <a:bodyPr wrap="square" lIns="0" tIns="0" rIns="0" bIns="0" rtlCol="0" anchor="t"/>
+          <a:lstStyle/>
+          <a:p>
+            <a:pPr indent="0" marL="0">
+              <a:spcAft>
+                <a:spcPts val="200"/>
+              </a:spcAft>
+              <a:buNone/>
+            </a:pPr>
+            <a:r>
+              <a:rPr lang="en-US" sz="800" b="1" dirty="0">
+                <a:solidFill>
+                  <a:srgbClr val="F2D38A"/>
+                </a:solidFill>
+                <a:latin typeface="Arial" pitchFamily="34" charset="0"/>
+                <a:ea typeface="Arial" pitchFamily="34" charset="-122"/>
+                <a:cs typeface="Arial" pitchFamily="34" charset="-120"/>
+              </a:rPr>
+              <a:t>Next</a:t>
+            </a:r>
+            <a:endParaRPr lang="en-US" sz="800" dirty="0"/>
+          </a:p>
+          <a:p>
+            <a:pPr indent="0" marL="0">
+              <a:spcAft>
+                <a:spcPts val="500"/>
+              </a:spcAft>
+              <a:buNone/>
+            </a:pPr>
+            <a:r>
+              <a:rPr lang="en-US" sz="850" dirty="0">
+                <a:solidFill>
+                  <a:srgbClr val="E9F2FF"/>
+                </a:solidFill>
+                <a:latin typeface="Arial" pitchFamily="34" charset="0"/>
+                <a:ea typeface="Arial" pitchFamily="34" charset="-122"/>
+                <a:cs typeface="Arial" pitchFamily="34" charset="-120"/>
+              </a:rPr>
+              <a:t>~2028  Household flexibility at scale</a:t>
+            </a:r>
+            <a:endParaRPr lang="en-US" sz="800" dirty="0"/>
+          </a:p>
+          <a:p>
+            <a:pPr indent="0" marL="0">
+              <a:spcAft>
+                <a:spcPts val="500"/>
+              </a:spcAft>
+              <a:buNone/>
+            </a:pPr>
+            <a:r>
+              <a:rPr lang="en-US" sz="850" dirty="0">
+                <a:solidFill>
+                  <a:srgbClr val="E9F2FF"/>
+                </a:solidFill>
+                <a:latin typeface="Arial" pitchFamily="34" charset="0"/>
+                <a:ea typeface="Arial" pitchFamily="34" charset="-122"/>
+                <a:cs typeface="Arial" pitchFamily="34" charset="-120"/>
+              </a:rPr>
+              <a:t>~2028  AI home energy agents</a:t>
+            </a:r>
+            <a:endParaRPr lang="en-US" sz="800" dirty="0"/>
+          </a:p>
+        </p:txBody>
+      </p:sp>
+      <p:sp>
+        <p:nvSpPr>
+          <p:cNvPr id="31" name="Shape 29"/>
+          <p:cNvSpPr/>
+          <p:nvPr/>
+        </p:nvSpPr>
+        <p:spPr>
+          <a:xfrm>
+            <a:off x="5468112" y="1097280"/>
+            <a:ext cx="1609344" cy="2926080"/>
+          </a:xfrm>
+          <a:prstGeom prst="roundRect">
+            <a:avLst>
+              <a:gd name="adj" fmla="val 4545"/>
+            </a:avLst>
+          </a:prstGeom>
+          <a:solidFill>
+            <a:srgbClr val="13283A"/>
+          </a:solidFill>
+          <a:ln w="9525">
+            <a:solidFill>
+              <a:srgbClr val="22384A"/>
+            </a:solidFill>
+            <a:prstDash val="solid"/>
+          </a:ln>
+        </p:spPr>
+      </p:sp>
+      <p:sp>
+        <p:nvSpPr>
+          <p:cNvPr id="32" name="Shape 30"/>
+          <p:cNvSpPr/>
+          <p:nvPr/>
+        </p:nvSpPr>
+        <p:spPr>
+          <a:xfrm>
+            <a:off x="5468112" y="1207008"/>
+            <a:ext cx="45720" cy="2706624"/>
+          </a:xfrm>
+          <a:prstGeom prst="rect">
+            <a:avLst/>
+          </a:prstGeom>
+          <a:solidFill>
+            <a:srgbClr val="F2D38A"/>
+          </a:solidFill>
+          <a:ln w="12700">
+            <a:solidFill>
+              <a:srgbClr val="F2D38A"/>
+            </a:solidFill>
+            <a:prstDash val="solid"/>
+          </a:ln>
+        </p:spPr>
+      </p:sp>
+      <p:sp>
+        <p:nvSpPr>
+          <p:cNvPr id="33" name="Text 31"/>
+          <p:cNvSpPr txBox="1"/>
+          <p:nvPr/>
+        </p:nvSpPr>
+        <p:spPr>
+          <a:xfrm>
+            <a:off x="5605272" y="1170432"/>
+            <a:ext cx="1380744" cy="566928"/>
+          </a:xfrm>
+          <a:prstGeom prst="rect">
+            <a:avLst/>
+          </a:prstGeom>
+          <a:noFill/>
+          <a:ln/>
+        </p:spPr>
+        <p:txBody>
+          <a:bodyPr wrap="square" lIns="0" tIns="0" rIns="0" bIns="0" rtlCol="0" anchor="t"/>
+          <a:lstStyle/>
+          <a:p>
+            <a:pPr indent="0" marL="0">
+              <a:buNone/>
+            </a:pPr>
+            <a:r>
+              <a:rPr lang="en-US" sz="950" b="1" dirty="0">
+                <a:solidFill>
+                  <a:srgbClr val="E9F2FF"/>
+                </a:solidFill>
+                <a:latin typeface="Arial" pitchFamily="34" charset="0"/>
+                <a:ea typeface="Arial" pitchFamily="34" charset="-122"/>
+                <a:cs typeface="Arial" pitchFamily="34" charset="-120"/>
+              </a:rPr>
+              <a:t>Energy innovation and R&amp;D</a:t>
+            </a:r>
+            <a:endParaRPr lang="en-US" sz="950" dirty="0"/>
+          </a:p>
+        </p:txBody>
+      </p:sp>
+      <p:sp>
+        <p:nvSpPr>
+          <p:cNvPr id="34" name="Shape 32"/>
+          <p:cNvSpPr/>
+          <p:nvPr/>
+        </p:nvSpPr>
+        <p:spPr>
+          <a:xfrm>
+            <a:off x="5605272" y="1783080"/>
+            <a:ext cx="953589" cy="146304"/>
+          </a:xfrm>
+          <a:prstGeom prst="rect">
+            <a:avLst/>
+          </a:prstGeom>
+          <a:solidFill>
+            <a:srgbClr val="8FA6B8"/>
+          </a:solidFill>
+          <a:ln w="12700">
+            <a:solidFill>
+              <a:srgbClr val="8FA6B8"/>
+            </a:solidFill>
+            <a:prstDash val="solid"/>
+          </a:ln>
+        </p:spPr>
+      </p:sp>
+      <p:sp>
+        <p:nvSpPr>
+          <p:cNvPr id="35" name="Shape 33"/>
+          <p:cNvSpPr/>
+          <p:nvPr/>
+        </p:nvSpPr>
+        <p:spPr>
+          <a:xfrm>
+            <a:off x="6558861" y="1783080"/>
+            <a:ext cx="190718" cy="146304"/>
+          </a:xfrm>
+          <a:prstGeom prst="rect">
+            <a:avLst/>
+          </a:prstGeom>
+          <a:solidFill>
+            <a:srgbClr val="F2D38A"/>
+          </a:solidFill>
+          <a:ln w="12700">
+            <a:solidFill>
+              <a:srgbClr val="F2D38A"/>
+            </a:solidFill>
+            <a:prstDash val="solid"/>
+          </a:ln>
+        </p:spPr>
+      </p:sp>
+      <p:sp>
+        <p:nvSpPr>
+          <p:cNvPr id="36" name="Shape 34"/>
+          <p:cNvSpPr/>
+          <p:nvPr/>
+        </p:nvSpPr>
+        <p:spPr>
+          <a:xfrm>
+            <a:off x="6749578" y="1783080"/>
+            <a:ext cx="190718" cy="146304"/>
+          </a:xfrm>
+          <a:prstGeom prst="rect">
+            <a:avLst/>
+          </a:prstGeom>
+          <a:solidFill>
+            <a:srgbClr val="5FD8FF"/>
+          </a:solidFill>
+          <a:ln w="12700">
+            <a:solidFill>
+              <a:srgbClr val="5FD8FF"/>
+            </a:solidFill>
+            <a:prstDash val="solid"/>
+          </a:ln>
+        </p:spPr>
+      </p:sp>
+      <p:sp>
+        <p:nvSpPr>
+          <p:cNvPr id="37" name="Text 35"/>
+          <p:cNvSpPr txBox="1"/>
+          <p:nvPr/>
+        </p:nvSpPr>
+        <p:spPr>
+          <a:xfrm>
+            <a:off x="5605272" y="1965960"/>
+            <a:ext cx="1380744" cy="274320"/>
+          </a:xfrm>
+          <a:prstGeom prst="rect">
+            <a:avLst/>
+          </a:prstGeom>
+          <a:noFill/>
+          <a:ln/>
+        </p:spPr>
+        <p:txBody>
+          <a:bodyPr wrap="square" lIns="0" tIns="0" rIns="0" bIns="0" rtlCol="0" anchor="ctr"/>
+          <a:lstStyle/>
+          <a:p>
+            <a:pPr indent="0" marL="0">
+              <a:buNone/>
+            </a:pPr>
+            <a:r>
+              <a:rPr lang="en-US" sz="750" dirty="0">
+                <a:solidFill>
+                  <a:srgbClr val="8FA6B8"/>
+                </a:solidFill>
+                <a:latin typeface="Arial" pitchFamily="34" charset="0"/>
+                <a:ea typeface="Arial" pitchFamily="34" charset="-122"/>
+                <a:cs typeface="Arial" pitchFamily="34" charset="-120"/>
+              </a:rPr>
+              <a:t>7 technologies, 0 deployed in GB</a:t>
+            </a:r>
+            <a:endParaRPr lang="en-US" sz="750" dirty="0"/>
+          </a:p>
+        </p:txBody>
+      </p:sp>
+      <p:sp>
+        <p:nvSpPr>
+          <p:cNvPr id="38" name="Text 36"/>
+          <p:cNvSpPr txBox="1"/>
+          <p:nvPr/>
+        </p:nvSpPr>
+        <p:spPr>
+          <a:xfrm>
+            <a:off x="5605272" y="2286000"/>
+            <a:ext cx="1380744" cy="1645920"/>
+          </a:xfrm>
+          <a:prstGeom prst="rect">
+            <a:avLst/>
+          </a:prstGeom>
+          <a:noFill/>
+          <a:ln/>
+        </p:spPr>
+        <p:txBody>
+          <a:bodyPr wrap="square" lIns="0" tIns="0" rIns="0" bIns="0" rtlCol="0" anchor="t"/>
+          <a:lstStyle/>
+          <a:p>
+            <a:pPr indent="0" marL="0">
+              <a:spcAft>
+                <a:spcPts val="200"/>
+              </a:spcAft>
+              <a:buNone/>
+            </a:pPr>
+            <a:r>
+              <a:rPr lang="en-US" sz="800" b="1" dirty="0">
+                <a:solidFill>
+                  <a:srgbClr val="F2D38A"/>
+                </a:solidFill>
+                <a:latin typeface="Arial" pitchFamily="34" charset="0"/>
+                <a:ea typeface="Arial" pitchFamily="34" charset="-122"/>
+                <a:cs typeface="Arial" pitchFamily="34" charset="-120"/>
+              </a:rPr>
+              <a:t>Next</a:t>
+            </a:r>
+            <a:endParaRPr lang="en-US" sz="800" dirty="0"/>
+          </a:p>
+          <a:p>
+            <a:pPr indent="0" marL="0">
+              <a:spcAft>
+                <a:spcPts val="500"/>
+              </a:spcAft>
+              <a:buNone/>
+            </a:pPr>
+            <a:r>
+              <a:rPr lang="en-US" sz="850" dirty="0">
+                <a:solidFill>
+                  <a:srgbClr val="E9F2FF"/>
+                </a:solidFill>
+                <a:latin typeface="Arial" pitchFamily="34" charset="0"/>
+                <a:ea typeface="Arial" pitchFamily="34" charset="-122"/>
+                <a:cs typeface="Arial" pitchFamily="34" charset="-120"/>
+              </a:rPr>
+              <a:t>~2028  AI as a scientific collaborator</a:t>
+            </a:r>
+            <a:endParaRPr lang="en-US" sz="800" dirty="0"/>
+          </a:p>
+          <a:p>
+            <a:pPr indent="0" marL="0">
+              <a:spcAft>
+                <a:spcPts val="500"/>
+              </a:spcAft>
+              <a:buNone/>
+            </a:pPr>
+            <a:r>
+              <a:rPr lang="en-US" sz="850" dirty="0">
+                <a:solidFill>
+                  <a:srgbClr val="E9F2FF"/>
+                </a:solidFill>
+                <a:latin typeface="Arial" pitchFamily="34" charset="0"/>
+                <a:ea typeface="Arial" pitchFamily="34" charset="-122"/>
+                <a:cs typeface="Arial" pitchFamily="34" charset="-120"/>
+              </a:rPr>
+              <a:t>~2029  AI-discovered materials in products</a:t>
+            </a:r>
+            <a:endParaRPr lang="en-US" sz="800" dirty="0"/>
+          </a:p>
+        </p:txBody>
+      </p:sp>
+      <p:sp>
+        <p:nvSpPr>
+          <p:cNvPr id="39" name="Shape 37"/>
+          <p:cNvSpPr/>
+          <p:nvPr/>
+        </p:nvSpPr>
+        <p:spPr>
+          <a:xfrm>
+            <a:off x="7168896" y="1097280"/>
+            <a:ext cx="1609344" cy="2926080"/>
+          </a:xfrm>
+          <a:prstGeom prst="roundRect">
+            <a:avLst>
+              <a:gd name="adj" fmla="val 4545"/>
+            </a:avLst>
+          </a:prstGeom>
+          <a:solidFill>
+            <a:srgbClr val="13283A"/>
+          </a:solidFill>
+          <a:ln w="9525">
+            <a:solidFill>
+              <a:srgbClr val="22384A"/>
+            </a:solidFill>
+            <a:prstDash val="solid"/>
+          </a:ln>
+        </p:spPr>
+      </p:sp>
+      <p:sp>
+        <p:nvSpPr>
+          <p:cNvPr id="40" name="Shape 38"/>
+          <p:cNvSpPr/>
+          <p:nvPr/>
+        </p:nvSpPr>
+        <p:spPr>
+          <a:xfrm>
+            <a:off x="7168896" y="1207008"/>
+            <a:ext cx="45720" cy="2706624"/>
+          </a:xfrm>
+          <a:prstGeom prst="rect">
+            <a:avLst/>
+          </a:prstGeom>
+          <a:solidFill>
+            <a:srgbClr val="F2D38A"/>
+          </a:solidFill>
+          <a:ln w="12700">
+            <a:solidFill>
+              <a:srgbClr val="F2D38A"/>
+            </a:solidFill>
+            <a:prstDash val="solid"/>
+          </a:ln>
+        </p:spPr>
+      </p:sp>
+      <p:sp>
+        <p:nvSpPr>
+          <p:cNvPr id="41" name="Text 39"/>
+          <p:cNvSpPr txBox="1"/>
+          <p:nvPr/>
+        </p:nvSpPr>
+        <p:spPr>
+          <a:xfrm>
+            <a:off x="7306056" y="1170432"/>
+            <a:ext cx="1380744" cy="566928"/>
+          </a:xfrm>
+          <a:prstGeom prst="rect">
+            <a:avLst/>
+          </a:prstGeom>
+          <a:noFill/>
+          <a:ln/>
+        </p:spPr>
+        <p:txBody>
+          <a:bodyPr wrap="square" lIns="0" tIns="0" rIns="0" bIns="0" rtlCol="0" anchor="t"/>
+          <a:lstStyle/>
+          <a:p>
+            <a:pPr indent="0" marL="0">
+              <a:buNone/>
+            </a:pPr>
+            <a:r>
+              <a:rPr lang="en-US" sz="950" b="1" dirty="0">
+                <a:solidFill>
+                  <a:srgbClr val="E9F2FF"/>
+                </a:solidFill>
+                <a:latin typeface="Arial" pitchFamily="34" charset="0"/>
+                <a:ea typeface="Arial" pitchFamily="34" charset="-122"/>
+                <a:cs typeface="Arial" pitchFamily="34" charset="-120"/>
+              </a:rPr>
+              <a:t>Security, assurance and governance</a:t>
+            </a:r>
+            <a:endParaRPr lang="en-US" sz="950" dirty="0"/>
+          </a:p>
+        </p:txBody>
+      </p:sp>
+      <p:sp>
+        <p:nvSpPr>
+          <p:cNvPr id="42" name="Shape 40"/>
+          <p:cNvSpPr/>
+          <p:nvPr/>
+        </p:nvSpPr>
+        <p:spPr>
+          <a:xfrm>
+            <a:off x="7306056" y="1783080"/>
+            <a:ext cx="445008" cy="146304"/>
+          </a:xfrm>
+          <a:prstGeom prst="rect">
+            <a:avLst/>
+          </a:prstGeom>
+          <a:solidFill>
+            <a:srgbClr val="8FA6B8"/>
+          </a:solidFill>
+          <a:ln w="12700">
+            <a:solidFill>
+              <a:srgbClr val="8FA6B8"/>
+            </a:solidFill>
+            <a:prstDash val="solid"/>
+          </a:ln>
+        </p:spPr>
+      </p:sp>
+      <p:sp>
+        <p:nvSpPr>
+          <p:cNvPr id="43" name="Shape 41"/>
+          <p:cNvSpPr/>
+          <p:nvPr/>
+        </p:nvSpPr>
+        <p:spPr>
+          <a:xfrm>
+            <a:off x="7751064" y="1783080"/>
+            <a:ext cx="333756" cy="146304"/>
+          </a:xfrm>
+          <a:prstGeom prst="rect">
+            <a:avLst/>
+          </a:prstGeom>
+          <a:solidFill>
+            <a:srgbClr val="F2D38A"/>
+          </a:solidFill>
+          <a:ln w="12700">
+            <a:solidFill>
+              <a:srgbClr val="F2D38A"/>
+            </a:solidFill>
+            <a:prstDash val="solid"/>
+          </a:ln>
+        </p:spPr>
+      </p:sp>
+      <p:sp>
+        <p:nvSpPr>
+          <p:cNvPr id="44" name="Shape 42"/>
+          <p:cNvSpPr/>
+          <p:nvPr/>
+        </p:nvSpPr>
+        <p:spPr>
+          <a:xfrm>
+            <a:off x="8084820" y="1783080"/>
+            <a:ext cx="333756" cy="146304"/>
+          </a:xfrm>
+          <a:prstGeom prst="rect">
+            <a:avLst/>
+          </a:prstGeom>
+          <a:solidFill>
+            <a:srgbClr val="5FD8FF"/>
+          </a:solidFill>
+          <a:ln w="12700">
+            <a:solidFill>
+              <a:srgbClr val="5FD8FF"/>
+            </a:solidFill>
+            <a:prstDash val="solid"/>
+          </a:ln>
+        </p:spPr>
+      </p:sp>
+      <p:sp>
+        <p:nvSpPr>
+          <p:cNvPr id="45" name="Shape 43"/>
+          <p:cNvSpPr/>
+          <p:nvPr/>
+        </p:nvSpPr>
+        <p:spPr>
+          <a:xfrm>
+            <a:off x="8418576" y="1783080"/>
+            <a:ext cx="222504" cy="146304"/>
+          </a:xfrm>
+          <a:prstGeom prst="rect">
+            <a:avLst/>
+          </a:prstGeom>
+          <a:solidFill>
+            <a:srgbClr val="7FD6A0"/>
+          </a:solidFill>
+          <a:ln w="12700">
+            <a:solidFill>
+              <a:srgbClr val="7FD6A0"/>
+            </a:solidFill>
+            <a:prstDash val="solid"/>
+          </a:ln>
+        </p:spPr>
+      </p:sp>
+      <p:sp>
+        <p:nvSpPr>
+          <p:cNvPr id="46" name="Text 44"/>
+          <p:cNvSpPr txBox="1"/>
+          <p:nvPr/>
+        </p:nvSpPr>
+        <p:spPr>
+          <a:xfrm>
+            <a:off x="7306056" y="1965960"/>
+            <a:ext cx="1380744" cy="274320"/>
+          </a:xfrm>
+          <a:prstGeom prst="rect">
+            <a:avLst/>
+          </a:prstGeom>
+          <a:noFill/>
+          <a:ln/>
+        </p:spPr>
+        <p:txBody>
+          <a:bodyPr wrap="square" lIns="0" tIns="0" rIns="0" bIns="0" rtlCol="0" anchor="ctr"/>
+          <a:lstStyle/>
+          <a:p>
+            <a:pPr indent="0" marL="0">
+              <a:buNone/>
+            </a:pPr>
+            <a:r>
+              <a:rPr lang="en-US" sz="750" dirty="0">
+                <a:solidFill>
+                  <a:srgbClr val="8FA6B8"/>
+                </a:solidFill>
+                <a:latin typeface="Arial" pitchFamily="34" charset="0"/>
+                <a:ea typeface="Arial" pitchFamily="34" charset="-122"/>
+                <a:cs typeface="Arial" pitchFamily="34" charset="-120"/>
+              </a:rPr>
+              <a:t>12 technologies, 3 deployed in GB</a:t>
+            </a:r>
+            <a:endParaRPr lang="en-US" sz="750" dirty="0"/>
+          </a:p>
+        </p:txBody>
+      </p:sp>
+      <p:sp>
+        <p:nvSpPr>
+          <p:cNvPr id="47" name="Text 45"/>
+          <p:cNvSpPr txBox="1"/>
+          <p:nvPr/>
+        </p:nvSpPr>
+        <p:spPr>
+          <a:xfrm>
+            <a:off x="7306056" y="2286000"/>
+            <a:ext cx="1380744" cy="1645920"/>
+          </a:xfrm>
+          <a:prstGeom prst="rect">
+            <a:avLst/>
+          </a:prstGeom>
+          <a:noFill/>
+          <a:ln/>
+        </p:spPr>
+        <p:txBody>
+          <a:bodyPr wrap="square" lIns="0" tIns="0" rIns="0" bIns="0" rtlCol="0" anchor="t"/>
+          <a:lstStyle/>
+          <a:p>
+            <a:pPr indent="0" marL="0">
+              <a:spcAft>
+                <a:spcPts val="200"/>
+              </a:spcAft>
+              <a:buNone/>
+            </a:pPr>
+            <a:r>
+              <a:rPr lang="en-US" sz="800" b="1" dirty="0">
+                <a:solidFill>
+                  <a:srgbClr val="F2D38A"/>
+                </a:solidFill>
+                <a:latin typeface="Arial" pitchFamily="34" charset="0"/>
+                <a:ea typeface="Arial" pitchFamily="34" charset="-122"/>
+                <a:cs typeface="Arial" pitchFamily="34" charset="-120"/>
+              </a:rPr>
+              <a:t>Next</a:t>
+            </a:r>
+            <a:endParaRPr lang="en-US" sz="800" dirty="0"/>
+          </a:p>
+          <a:p>
+            <a:pPr indent="0" marL="0">
+              <a:spcAft>
+                <a:spcPts val="500"/>
+              </a:spcAft>
+              <a:buNone/>
+            </a:pPr>
+            <a:r>
+              <a:rPr lang="en-US" sz="850" dirty="0">
+                <a:solidFill>
+                  <a:srgbClr val="E9F2FF"/>
+                </a:solidFill>
+                <a:latin typeface="Arial" pitchFamily="34" charset="0"/>
+                <a:ea typeface="Arial" pitchFamily="34" charset="-122"/>
+                <a:cs typeface="Arial" pitchFamily="34" charset="-120"/>
+              </a:rPr>
+              <a:t>~2027  AI for Clean Energy Strategy</a:t>
+            </a:r>
+            <a:endParaRPr lang="en-US" sz="800" dirty="0"/>
+          </a:p>
+          <a:p>
+            <a:pPr indent="0" marL="0">
+              <a:spcAft>
+                <a:spcPts val="500"/>
+              </a:spcAft>
+              <a:buNone/>
+            </a:pPr>
+            <a:r>
+              <a:rPr lang="en-US" sz="850" dirty="0">
+                <a:solidFill>
+                  <a:srgbClr val="E9F2FF"/>
+                </a:solidFill>
+                <a:latin typeface="Arial" pitchFamily="34" charset="0"/>
+                <a:ea typeface="Arial" pitchFamily="34" charset="-122"/>
+                <a:cs typeface="Arial" pitchFamily="34" charset="-120"/>
+              </a:rPr>
+              <a:t>~2027  Cyber Security and Resilience Act in force</a:t>
+            </a:r>
+            <a:endParaRPr lang="en-US" sz="800" dirty="0"/>
+          </a:p>
+        </p:txBody>
+      </p:sp>
+      <p:sp>
+        <p:nvSpPr>
+          <p:cNvPr id="48" name="Text 46"/>
+          <p:cNvSpPr txBox="1"/>
+          <p:nvPr/>
+        </p:nvSpPr>
+        <p:spPr>
+          <a:xfrm>
+            <a:off x="365760" y="4160520"/>
+            <a:ext cx="8412480" cy="457200"/>
+          </a:xfrm>
+          <a:prstGeom prst="rect">
+            <a:avLst/>
+          </a:prstGeom>
+          <a:noFill/>
+          <a:ln/>
+        </p:spPr>
+        <p:txBody>
+          <a:bodyPr wrap="square" lIns="0" tIns="0" rIns="0" bIns="0" rtlCol="0" anchor="ctr"/>
+          <a:lstStyle/>
+          <a:p>
+            <a:pPr indent="0" marL="0">
+              <a:buNone/>
+            </a:pPr>
+            <a:r>
+              <a:rPr lang="en-US" sz="1100" i="1" dirty="0">
+                <a:solidFill>
+                  <a:srgbClr val="F2D38A"/>
+                </a:solidFill>
+                <a:latin typeface="Georgia" pitchFamily="34" charset="0"/>
+                <a:ea typeface="Georgia" pitchFamily="34" charset="-122"/>
+                <a:cs typeface="Georgia" pitchFamily="34" charset="-120"/>
+              </a:rPr>
+              <a:t>So, what is on the horizon? A busy pipeline, and the radar shows which areas are closest to everyday use.</a:t>
+            </a:r>
+            <a:endParaRPr lang="en-US" sz="1100" dirty="0"/>
+          </a:p>
+        </p:txBody>
+      </p:sp>
+      <p:sp>
+        <p:nvSpPr>
+          <p:cNvPr id="50" name="Text 47"/>
+          <p:cNvSpPr txBox="1"/>
+          <p:nvPr/>
+        </p:nvSpPr>
+        <p:spPr>
+          <a:xfrm>
+            <a:off x="365760" y="4846320"/>
+            <a:ext cx="7955280" cy="201168"/>
+          </a:xfrm>
+          <a:prstGeom prst="rect">
+            <a:avLst/>
+          </a:prstGeom>
+          <a:noFill/>
+          <a:ln/>
+        </p:spPr>
+        <p:txBody>
+          <a:bodyPr wrap="square" lIns="0" tIns="0" rIns="0" bIns="0" rtlCol="0" anchor="ctr"/>
+          <a:lstStyle/>
+          <a:p>
+            <a:pPr indent="0" marL="0">
+              <a:buNone/>
+            </a:pPr>
+            <a:r>
+              <a:rPr lang="en-US" sz="650" dirty="0">
+                <a:solidFill>
+                  <a:srgbClr val="8FA6B8"/>
+                </a:solidFill>
+                <a:latin typeface="Arial" pitchFamily="34" charset="0"/>
+                <a:ea typeface="Arial" pitchFamily="34" charset="-122"/>
+                <a:cs typeface="Arial" pitchFamily="34" charset="-120"/>
+              </a:rPr>
+              <a:t>Stuart Okin, personal project. Data revision 20 (2026-10-29), narrative version 12. AI-maintained data and narrative, no human review; may contain errors. Selection: All fields.</a:t>
+            </a:r>
+            <a:endParaRPr lang="en-US" sz="650" dirty="0"/>
+          </a:p>
+        </p:txBody>
+      </p:sp>
+      <p:sp>
+        <p:nvSpPr>
+          <p:cNvPr id="51" name="Text 48"/>
+          <p:cNvSpPr txBox="1"/>
+          <p:nvPr/>
+        </p:nvSpPr>
+        <p:spPr>
+          <a:xfrm>
+            <a:off x="8412480" y="4846320"/>
+            <a:ext cx="365760" cy="201168"/>
+          </a:xfrm>
+          <a:prstGeom prst="rect">
+            <a:avLst/>
+          </a:prstGeom>
+          <a:noFill/>
+          <a:ln/>
+        </p:spPr>
+        <p:txBody>
+          <a:bodyPr wrap="square" lIns="0" tIns="0" rIns="0" bIns="0" rtlCol="0" anchor="ctr"/>
+          <a:lstStyle/>
+          <a:p>
             <a:pPr algn="r" indent="0" marL="0">
               <a:buNone/>
             </a:pPr>
             <a:r>
-              <a:rPr lang="en-US" sz="800" dirty="0">
+              <a:rPr lang="en-US" sz="700" dirty="0">
                 <a:solidFill>
                   <a:srgbClr val="8FA6B8"/>
                 </a:solidFill>
@@ -3713,9 +6073,1911 @@
                 <a:ea typeface="Arial" pitchFamily="34" charset="-122"/>
                 <a:cs typeface="Arial" pitchFamily="34" charset="-120"/>
               </a:rPr>
-              <a:t>3</a:t>
+              <a:t>5</a:t>
+            </a:r>
+            <a:endParaRPr lang="en-US" sz="700" dirty="0"/>
+          </a:p>
+        </p:txBody>
+      </p:sp>
+    </p:spTree>
+  </p:cSld>
+  <p:clrMapOvr>
+    <a:masterClrMapping/>
+  </p:clrMapOvr>
+</p:sld>
+</file>
+
+<file path=ppt/slides/slide6.xml><?xml version="1.0" encoding="utf-8"?>
+<p:sld xmlns:a="http://schemas.openxmlformats.org/drawingml/2006/main" xmlns:r="http://schemas.openxmlformats.org/officeDocument/2006/relationships" xmlns:p="http://schemas.openxmlformats.org/presentationml/2006/main">
+  <p:cSld name="Slide 6">
+    <p:bg>
+      <p:bgPr>
+        <a:solidFill>
+          <a:srgbClr val="0B1724"/>
+        </a:solidFill>
+      </p:bgPr>
+    </p:bg>
+    <p:spTree>
+      <p:nvGrpSpPr>
+        <p:cNvPr id="1" name=""/>
+        <p:cNvGrpSpPr/>
+        <p:nvPr/>
+      </p:nvGrpSpPr>
+      <p:grpSpPr>
+        <a:xfrm>
+          <a:off x="0" y="0"/>
+          <a:ext cx="0" cy="0"/>
+          <a:chOff x="0" y="0"/>
+          <a:chExt cx="0" cy="0"/>
+        </a:xfrm>
+      </p:grpSpPr>
+      <p:sp>
+        <p:nvSpPr>
+          <p:cNvPr id="2" name="Shape 0"/>
+          <p:cNvSpPr/>
+          <p:nvPr/>
+        </p:nvSpPr>
+        <p:spPr>
+          <a:xfrm>
+            <a:off x="365760" y="347472"/>
+            <a:ext cx="73152" cy="457200"/>
+          </a:xfrm>
+          <a:prstGeom prst="rect">
+            <a:avLst/>
+          </a:prstGeom>
+          <a:solidFill>
+            <a:srgbClr val="FF6B6B"/>
+          </a:solidFill>
+          <a:ln w="12700">
+            <a:solidFill>
+              <a:srgbClr val="FF6B6B"/>
+            </a:solidFill>
+            <a:prstDash val="solid"/>
+          </a:ln>
+        </p:spPr>
+      </p:sp>
+      <p:sp>
+        <p:nvSpPr>
+          <p:cNvPr id="3" name="Text 1"/>
+          <p:cNvSpPr txBox="1"/>
+          <p:nvPr/>
+        </p:nvSpPr>
+        <p:spPr>
+          <a:xfrm>
+            <a:off x="548640" y="274320"/>
+            <a:ext cx="8138160" cy="457200"/>
+          </a:xfrm>
+          <a:prstGeom prst="rect">
+            <a:avLst/>
+          </a:prstGeom>
+          <a:noFill/>
+          <a:ln/>
+        </p:spPr>
+        <p:txBody>
+          <a:bodyPr wrap="square" lIns="0" tIns="0" rIns="0" bIns="0" rtlCol="0" anchor="ctr"/>
+          <a:lstStyle/>
+          <a:p>
+            <a:pPr indent="0" marL="0">
+              <a:buNone/>
+            </a:pPr>
+            <a:r>
+              <a:rPr lang="en-US" sz="2400" dirty="0">
+                <a:solidFill>
+                  <a:srgbClr val="E9F2FF"/>
+                </a:solidFill>
+                <a:latin typeface="Georgia" pitchFamily="34" charset="0"/>
+                <a:ea typeface="Georgia" pitchFamily="34" charset="-122"/>
+                <a:cs typeface="Georgia" pitchFamily="34" charset="-120"/>
+              </a:rPr>
+              <a:t>Securing it</a:t>
+            </a:r>
+            <a:endParaRPr lang="en-US" sz="2400" dirty="0"/>
+          </a:p>
+        </p:txBody>
+      </p:sp>
+      <p:sp>
+        <p:nvSpPr>
+          <p:cNvPr id="4" name="Text 2"/>
+          <p:cNvSpPr txBox="1"/>
+          <p:nvPr/>
+        </p:nvSpPr>
+        <p:spPr>
+          <a:xfrm>
+            <a:off x="548640" y="713232"/>
+            <a:ext cx="8138160" cy="256032"/>
+          </a:xfrm>
+          <a:prstGeom prst="rect">
+            <a:avLst/>
+          </a:prstGeom>
+          <a:noFill/>
+          <a:ln/>
+        </p:spPr>
+        <p:txBody>
+          <a:bodyPr wrap="square" lIns="0" tIns="0" rIns="0" bIns="0" rtlCol="0" anchor="ctr"/>
+          <a:lstStyle/>
+          <a:p>
+            <a:pPr indent="0" marL="0">
+              <a:buNone/>
+            </a:pPr>
+            <a:r>
+              <a:rPr lang="en-US" sz="1050" dirty="0">
+                <a:solidFill>
+                  <a:srgbClr val="8FA6B8"/>
+                </a:solidFill>
+                <a:latin typeface="Arial" pitchFamily="34" charset="0"/>
+                <a:ea typeface="Arial" pitchFamily="34" charset="-122"/>
+                <a:cs typeface="Arial" pitchFamily="34" charset="-120"/>
+              </a:rPr>
+              <a:t>New technology brings new ways in; security has historically followed later</a:t>
+            </a:r>
+            <a:endParaRPr lang="en-US" sz="1050" dirty="0"/>
+          </a:p>
+        </p:txBody>
+      </p:sp>
+      <p:sp>
+        <p:nvSpPr>
+          <p:cNvPr id="5" name="Shape 3"/>
+          <p:cNvSpPr/>
+          <p:nvPr/>
+        </p:nvSpPr>
+        <p:spPr>
+          <a:xfrm>
+            <a:off x="365760" y="1097280"/>
+            <a:ext cx="2743200" cy="868680"/>
+          </a:xfrm>
+          <a:prstGeom prst="roundRect">
+            <a:avLst>
+              <a:gd name="adj" fmla="val 8421"/>
+            </a:avLst>
+          </a:prstGeom>
+          <a:solidFill>
+            <a:srgbClr val="13283A"/>
+          </a:solidFill>
+          <a:ln w="9525">
+            <a:solidFill>
+              <a:srgbClr val="22384A"/>
+            </a:solidFill>
+            <a:prstDash val="solid"/>
+          </a:ln>
+        </p:spPr>
+      </p:sp>
+      <p:sp>
+        <p:nvSpPr>
+          <p:cNvPr id="6" name="Shape 4"/>
+          <p:cNvSpPr/>
+          <p:nvPr/>
+        </p:nvSpPr>
+        <p:spPr>
+          <a:xfrm>
+            <a:off x="365760" y="1207008"/>
+            <a:ext cx="45720" cy="649224"/>
+          </a:xfrm>
+          <a:prstGeom prst="rect">
+            <a:avLst/>
+          </a:prstGeom>
+          <a:solidFill>
+            <a:srgbClr val="FF6B6B"/>
+          </a:solidFill>
+          <a:ln w="12700">
+            <a:solidFill>
+              <a:srgbClr val="FF6B6B"/>
+            </a:solidFill>
+            <a:prstDash val="solid"/>
+          </a:ln>
+        </p:spPr>
+      </p:sp>
+      <p:sp>
+        <p:nvSpPr>
+          <p:cNvPr id="7" name="Text 5"/>
+          <p:cNvSpPr txBox="1"/>
+          <p:nvPr/>
+        </p:nvSpPr>
+        <p:spPr>
+          <a:xfrm>
+            <a:off x="548640" y="1152144"/>
+            <a:ext cx="1097280" cy="731520"/>
+          </a:xfrm>
+          <a:prstGeom prst="rect">
+            <a:avLst/>
+          </a:prstGeom>
+          <a:noFill/>
+          <a:ln/>
+        </p:spPr>
+        <p:txBody>
+          <a:bodyPr wrap="square" lIns="0" tIns="0" rIns="0" bIns="0" rtlCol="0" anchor="ctr"/>
+          <a:lstStyle/>
+          <a:p>
+            <a:pPr indent="0" marL="0">
+              <a:buNone/>
+            </a:pPr>
+            <a:r>
+              <a:rPr lang="en-US" sz="2400" dirty="0">
+                <a:solidFill>
+                  <a:srgbClr val="FF6B6B"/>
+                </a:solidFill>
+                <a:latin typeface="Georgia" pitchFamily="34" charset="0"/>
+                <a:ea typeface="Georgia" pitchFamily="34" charset="-122"/>
+                <a:cs typeface="Georgia" pitchFamily="34" charset="-120"/>
+              </a:rPr>
+              <a:t>77%</a:t>
+            </a:r>
+            <a:endParaRPr lang="en-US" sz="2400" dirty="0"/>
+          </a:p>
+        </p:txBody>
+      </p:sp>
+      <p:sp>
+        <p:nvSpPr>
+          <p:cNvPr id="8" name="Text 6"/>
+          <p:cNvSpPr txBox="1"/>
+          <p:nvPr/>
+        </p:nvSpPr>
+        <p:spPr>
+          <a:xfrm>
+            <a:off x="1600200" y="1170432"/>
+            <a:ext cx="1417320" cy="731520"/>
+          </a:xfrm>
+          <a:prstGeom prst="rect">
+            <a:avLst/>
+          </a:prstGeom>
+          <a:noFill/>
+          <a:ln/>
+        </p:spPr>
+        <p:txBody>
+          <a:bodyPr wrap="square" lIns="0" tIns="0" rIns="0" bIns="0" rtlCol="0" anchor="ctr"/>
+          <a:lstStyle/>
+          <a:p>
+            <a:pPr indent="0" marL="0">
+              <a:buNone/>
+            </a:pPr>
+            <a:r>
+              <a:rPr lang="en-US" sz="850" dirty="0">
+                <a:solidFill>
+                  <a:srgbClr val="E9F2FF"/>
+                </a:solidFill>
+                <a:latin typeface="Arial" pitchFamily="34" charset="0"/>
+                <a:ea typeface="Arial" pitchFamily="34" charset="-122"/>
+                <a:cs typeface="Arial" pitchFamily="34" charset="-120"/>
+              </a:rPr>
+              <a:t>of the technologies here expand the attack surface</a:t>
+            </a:r>
+            <a:endParaRPr lang="en-US" sz="850" dirty="0"/>
+          </a:p>
+        </p:txBody>
+      </p:sp>
+      <p:sp>
+        <p:nvSpPr>
+          <p:cNvPr id="9" name="Shape 7"/>
+          <p:cNvSpPr/>
+          <p:nvPr/>
+        </p:nvSpPr>
+        <p:spPr>
+          <a:xfrm>
+            <a:off x="365760" y="2075688"/>
+            <a:ext cx="2743200" cy="868680"/>
+          </a:xfrm>
+          <a:prstGeom prst="roundRect">
+            <a:avLst>
+              <a:gd name="adj" fmla="val 8421"/>
+            </a:avLst>
+          </a:prstGeom>
+          <a:solidFill>
+            <a:srgbClr val="13283A"/>
+          </a:solidFill>
+          <a:ln w="9525">
+            <a:solidFill>
+              <a:srgbClr val="22384A"/>
+            </a:solidFill>
+            <a:prstDash val="solid"/>
+          </a:ln>
+        </p:spPr>
+      </p:sp>
+      <p:sp>
+        <p:nvSpPr>
+          <p:cNvPr id="10" name="Shape 8"/>
+          <p:cNvSpPr/>
+          <p:nvPr/>
+        </p:nvSpPr>
+        <p:spPr>
+          <a:xfrm>
+            <a:off x="365760" y="2185416"/>
+            <a:ext cx="45720" cy="649224"/>
+          </a:xfrm>
+          <a:prstGeom prst="rect">
+            <a:avLst/>
+          </a:prstGeom>
+          <a:solidFill>
+            <a:srgbClr val="FF6B6B"/>
+          </a:solidFill>
+          <a:ln w="12700">
+            <a:solidFill>
+              <a:srgbClr val="FF6B6B"/>
+            </a:solidFill>
+            <a:prstDash val="solid"/>
+          </a:ln>
+        </p:spPr>
+      </p:sp>
+      <p:sp>
+        <p:nvSpPr>
+          <p:cNvPr id="11" name="Text 9"/>
+          <p:cNvSpPr txBox="1"/>
+          <p:nvPr/>
+        </p:nvSpPr>
+        <p:spPr>
+          <a:xfrm>
+            <a:off x="548640" y="2130552"/>
+            <a:ext cx="1097280" cy="731520"/>
+          </a:xfrm>
+          <a:prstGeom prst="rect">
+            <a:avLst/>
+          </a:prstGeom>
+          <a:noFill/>
+          <a:ln/>
+        </p:spPr>
+        <p:txBody>
+          <a:bodyPr wrap="square" lIns="0" tIns="0" rIns="0" bIns="0" rtlCol="0" anchor="ctr"/>
+          <a:lstStyle/>
+          <a:p>
+            <a:pPr indent="0" marL="0">
+              <a:buNone/>
+            </a:pPr>
+            <a:r>
+              <a:rPr lang="en-US" sz="2400" dirty="0">
+                <a:solidFill>
+                  <a:srgbClr val="FF6B6B"/>
+                </a:solidFill>
+                <a:latin typeface="Georgia" pitchFamily="34" charset="0"/>
+                <a:ea typeface="Georgia" pitchFamily="34" charset="-122"/>
+                <a:cs typeface="Georgia" pitchFamily="34" charset="-120"/>
+              </a:rPr>
+              <a:t>3 yrs</a:t>
+            </a:r>
+            <a:endParaRPr lang="en-US" sz="2400" dirty="0"/>
+          </a:p>
+        </p:txBody>
+      </p:sp>
+      <p:sp>
+        <p:nvSpPr>
+          <p:cNvPr id="12" name="Text 10"/>
+          <p:cNvSpPr txBox="1"/>
+          <p:nvPr/>
+        </p:nvSpPr>
+        <p:spPr>
+          <a:xfrm>
+            <a:off x="1600200" y="2148840"/>
+            <a:ext cx="1417320" cy="731520"/>
+          </a:xfrm>
+          <a:prstGeom prst="rect">
+            <a:avLst/>
+          </a:prstGeom>
+          <a:noFill/>
+          <a:ln/>
+        </p:spPr>
+        <p:txBody>
+          <a:bodyPr wrap="square" lIns="0" tIns="0" rIns="0" bIns="0" rtlCol="0" anchor="ctr"/>
+          <a:lstStyle/>
+          <a:p>
+            <a:pPr indent="0" marL="0">
+              <a:buNone/>
+            </a:pPr>
+            <a:r>
+              <a:rPr lang="en-US" sz="850" dirty="0">
+                <a:solidFill>
+                  <a:srgbClr val="E9F2FF"/>
+                </a:solidFill>
+                <a:latin typeface="Arial" pitchFamily="34" charset="0"/>
+                <a:ea typeface="Arial" pitchFamily="34" charset="-122"/>
+                <a:cs typeface="Arial" pitchFamily="34" charset="-120"/>
+              </a:rPr>
+              <a:t>typical wait for the first security response in a technology’s category</a:t>
+            </a:r>
+            <a:endParaRPr lang="en-US" sz="850" dirty="0"/>
+          </a:p>
+        </p:txBody>
+      </p:sp>
+      <p:sp>
+        <p:nvSpPr>
+          <p:cNvPr id="13" name="Shape 11"/>
+          <p:cNvSpPr/>
+          <p:nvPr/>
+        </p:nvSpPr>
+        <p:spPr>
+          <a:xfrm>
+            <a:off x="365760" y="3054096"/>
+            <a:ext cx="2743200" cy="868680"/>
+          </a:xfrm>
+          <a:prstGeom prst="roundRect">
+            <a:avLst>
+              <a:gd name="adj" fmla="val 8421"/>
+            </a:avLst>
+          </a:prstGeom>
+          <a:solidFill>
+            <a:srgbClr val="13283A"/>
+          </a:solidFill>
+          <a:ln w="9525">
+            <a:solidFill>
+              <a:srgbClr val="22384A"/>
+            </a:solidFill>
+            <a:prstDash val="solid"/>
+          </a:ln>
+        </p:spPr>
+      </p:sp>
+      <p:sp>
+        <p:nvSpPr>
+          <p:cNvPr id="14" name="Shape 12"/>
+          <p:cNvSpPr/>
+          <p:nvPr/>
+        </p:nvSpPr>
+        <p:spPr>
+          <a:xfrm>
+            <a:off x="365760" y="3163824"/>
+            <a:ext cx="45720" cy="649224"/>
+          </a:xfrm>
+          <a:prstGeom prst="rect">
+            <a:avLst/>
+          </a:prstGeom>
+          <a:solidFill>
+            <a:srgbClr val="FF6B6B"/>
+          </a:solidFill>
+          <a:ln w="12700">
+            <a:solidFill>
+              <a:srgbClr val="FF6B6B"/>
+            </a:solidFill>
+            <a:prstDash val="solid"/>
+          </a:ln>
+        </p:spPr>
+      </p:sp>
+      <p:sp>
+        <p:nvSpPr>
+          <p:cNvPr id="15" name="Text 13"/>
+          <p:cNvSpPr txBox="1"/>
+          <p:nvPr/>
+        </p:nvSpPr>
+        <p:spPr>
+          <a:xfrm>
+            <a:off x="548640" y="3108960"/>
+            <a:ext cx="1097280" cy="731520"/>
+          </a:xfrm>
+          <a:prstGeom prst="rect">
+            <a:avLst/>
+          </a:prstGeom>
+          <a:noFill/>
+          <a:ln/>
+        </p:spPr>
+        <p:txBody>
+          <a:bodyPr wrap="square" lIns="0" tIns="0" rIns="0" bIns="0" rtlCol="0" anchor="ctr"/>
+          <a:lstStyle/>
+          <a:p>
+            <a:pPr indent="0" marL="0">
+              <a:buNone/>
+            </a:pPr>
+            <a:r>
+              <a:rPr lang="en-US" sz="2400" dirty="0">
+                <a:solidFill>
+                  <a:srgbClr val="FF6B6B"/>
+                </a:solidFill>
+                <a:latin typeface="Georgia" pitchFamily="34" charset="0"/>
+                <a:ea typeface="Georgia" pitchFamily="34" charset="-122"/>
+                <a:cs typeface="Georgia" pitchFamily="34" charset="-120"/>
+              </a:rPr>
+              <a:t>0</a:t>
+            </a:r>
+            <a:endParaRPr lang="en-US" sz="2400" dirty="0"/>
+          </a:p>
+        </p:txBody>
+      </p:sp>
+      <p:sp>
+        <p:nvSpPr>
+          <p:cNvPr id="16" name="Text 14"/>
+          <p:cNvSpPr txBox="1"/>
+          <p:nvPr/>
+        </p:nvSpPr>
+        <p:spPr>
+          <a:xfrm>
+            <a:off x="1600200" y="3127248"/>
+            <a:ext cx="1417320" cy="731520"/>
+          </a:xfrm>
+          <a:prstGeom prst="rect">
+            <a:avLst/>
+          </a:prstGeom>
+          <a:noFill/>
+          <a:ln/>
+        </p:spPr>
+        <p:txBody>
+          <a:bodyPr wrap="square" lIns="0" tIns="0" rIns="0" bIns="0" rtlCol="0" anchor="ctr"/>
+          <a:lstStyle/>
+          <a:p>
+            <a:pPr indent="0" marL="0">
+              <a:buNone/>
+            </a:pPr>
+            <a:r>
+              <a:rPr lang="en-US" sz="850" dirty="0">
+                <a:solidFill>
+                  <a:srgbClr val="E9F2FF"/>
+                </a:solidFill>
+                <a:latin typeface="Arial" pitchFamily="34" charset="0"/>
+                <a:ea typeface="Arial" pitchFamily="34" charset="-122"/>
+                <a:cs typeface="Arial" pitchFamily="34" charset="-120"/>
+              </a:rPr>
+              <a:t>open gaps: arrived since 2010 with no response yet</a:t>
+            </a:r>
+            <a:endParaRPr lang="en-US" sz="850" dirty="0"/>
+          </a:p>
+        </p:txBody>
+      </p:sp>
+      <p:sp>
+        <p:nvSpPr>
+          <p:cNvPr id="17" name="Shape 15"/>
+          <p:cNvSpPr/>
+          <p:nvPr/>
+        </p:nvSpPr>
+        <p:spPr>
+          <a:xfrm>
+            <a:off x="3291840" y="1097280"/>
+            <a:ext cx="5486400" cy="1691640"/>
+          </a:xfrm>
+          <a:prstGeom prst="roundRect">
+            <a:avLst>
+              <a:gd name="adj" fmla="val 4324"/>
+            </a:avLst>
+          </a:prstGeom>
+          <a:solidFill>
+            <a:srgbClr val="13283A"/>
+          </a:solidFill>
+          <a:ln w="9525">
+            <a:solidFill>
+              <a:srgbClr val="22384A"/>
+            </a:solidFill>
+            <a:prstDash val="solid"/>
+          </a:ln>
+        </p:spPr>
+      </p:sp>
+      <p:sp>
+        <p:nvSpPr>
+          <p:cNvPr id="18" name="Shape 16"/>
+          <p:cNvSpPr/>
+          <p:nvPr/>
+        </p:nvSpPr>
+        <p:spPr>
+          <a:xfrm>
+            <a:off x="3291840" y="1207008"/>
+            <a:ext cx="45720" cy="1472184"/>
+          </a:xfrm>
+          <a:prstGeom prst="rect">
+            <a:avLst/>
+          </a:prstGeom>
+          <a:solidFill>
+            <a:srgbClr val="FF6B6B"/>
+          </a:solidFill>
+          <a:ln w="12700">
+            <a:solidFill>
+              <a:srgbClr val="FF6B6B"/>
+            </a:solidFill>
+            <a:prstDash val="solid"/>
+          </a:ln>
+        </p:spPr>
+      </p:sp>
+      <p:sp>
+        <p:nvSpPr>
+          <p:cNvPr id="19" name="Text 17"/>
+          <p:cNvSpPr txBox="1"/>
+          <p:nvPr/>
+        </p:nvSpPr>
+        <p:spPr>
+          <a:xfrm>
+            <a:off x="3474720" y="1170432"/>
+            <a:ext cx="5212080" cy="1554480"/>
+          </a:xfrm>
+          <a:prstGeom prst="rect">
+            <a:avLst/>
+          </a:prstGeom>
+          <a:noFill/>
+          <a:ln/>
+        </p:spPr>
+        <p:txBody>
+          <a:bodyPr wrap="square" lIns="0" tIns="0" rIns="0" bIns="0" rtlCol="0" anchor="t"/>
+          <a:lstStyle/>
+          <a:p>
+            <a:pPr indent="0" marL="0">
+              <a:spcAft>
+                <a:spcPts val="300"/>
+              </a:spcAft>
+              <a:buNone/>
+            </a:pPr>
+            <a:r>
+              <a:rPr lang="en-US" sz="1000" b="1" dirty="0">
+                <a:solidFill>
+                  <a:srgbClr val="FF6B6B"/>
+                </a:solidFill>
+                <a:latin typeface="Arial" pitchFamily="34" charset="0"/>
+                <a:ea typeface="Arial" pitchFamily="34" charset="-122"/>
+                <a:cs typeface="Arial" pitchFamily="34" charset="-120"/>
+              </a:rPr>
+              <a:t>Example</a:t>
+            </a:r>
+            <a:endParaRPr lang="en-US" sz="1000" dirty="0"/>
+          </a:p>
+          <a:p>
+            <a:pPr indent="0" marL="0">
+              <a:spcAft>
+                <a:spcPts val="300"/>
+              </a:spcAft>
+              <a:buNone/>
+            </a:pPr>
+            <a:r>
+              <a:rPr lang="en-US" sz="950" dirty="0">
+                <a:solidFill>
+                  <a:srgbClr val="E9F2FF"/>
+                </a:solidFill>
+                <a:latin typeface="Arial" pitchFamily="34" charset="0"/>
+                <a:ea typeface="Arial" pitchFamily="34" charset="-122"/>
+                <a:cs typeface="Arial" pitchFamily="34" charset="-120"/>
+              </a:rPr>
+              <a:t>Smart meters at scale (2001). Puts many remotely controllable devices at the grid edge, where coordinated misuse could move demand at scale.</a:t>
+            </a:r>
+            <a:endParaRPr lang="en-US" sz="1000" dirty="0"/>
+          </a:p>
+          <a:p>
+            <a:pPr indent="0" marL="0">
+              <a:buNone/>
+            </a:pPr>
+            <a:r>
+              <a:rPr lang="en-US" sz="950" dirty="0">
+                <a:solidFill>
+                  <a:srgbClr val="F7C04A"/>
+                </a:solidFill>
+                <a:latin typeface="Arial" pitchFamily="34" charset="0"/>
+                <a:ea typeface="Arial" pitchFamily="34" charset="-122"/>
+                <a:cs typeface="Arial" pitchFamily="34" charset="-120"/>
+              </a:rPr>
+              <a:t>First security response in its category: OT threat detection for utilities (2011), 10 years later.</a:t>
+            </a:r>
+            <a:endParaRPr lang="en-US" sz="1000" dirty="0"/>
+          </a:p>
+        </p:txBody>
+      </p:sp>
+      <p:sp>
+        <p:nvSpPr>
+          <p:cNvPr id="20" name="Shape 18"/>
+          <p:cNvSpPr/>
+          <p:nvPr/>
+        </p:nvSpPr>
+        <p:spPr>
+          <a:xfrm>
+            <a:off x="3291840" y="2926080"/>
+            <a:ext cx="5486400" cy="1664208"/>
+          </a:xfrm>
+          <a:prstGeom prst="roundRect">
+            <a:avLst>
+              <a:gd name="adj" fmla="val 4396"/>
+            </a:avLst>
+          </a:prstGeom>
+          <a:solidFill>
+            <a:srgbClr val="13283A"/>
+          </a:solidFill>
+          <a:ln w="9525">
+            <a:solidFill>
+              <a:srgbClr val="22384A"/>
+            </a:solidFill>
+            <a:prstDash val="solid"/>
+          </a:ln>
+        </p:spPr>
+      </p:sp>
+      <p:sp>
+        <p:nvSpPr>
+          <p:cNvPr id="21" name="Shape 19"/>
+          <p:cNvSpPr/>
+          <p:nvPr/>
+        </p:nvSpPr>
+        <p:spPr>
+          <a:xfrm>
+            <a:off x="3291840" y="3035808"/>
+            <a:ext cx="45720" cy="1444752"/>
+          </a:xfrm>
+          <a:prstGeom prst="rect">
+            <a:avLst/>
+          </a:prstGeom>
+          <a:solidFill>
+            <a:srgbClr val="FF6B6B"/>
+          </a:solidFill>
+          <a:ln w="12700">
+            <a:solidFill>
+              <a:srgbClr val="FF6B6B"/>
+            </a:solidFill>
+            <a:prstDash val="solid"/>
+          </a:ln>
+        </p:spPr>
+      </p:sp>
+      <p:sp>
+        <p:nvSpPr>
+          <p:cNvPr id="22" name="Text 20"/>
+          <p:cNvSpPr txBox="1"/>
+          <p:nvPr/>
+        </p:nvSpPr>
+        <p:spPr>
+          <a:xfrm>
+            <a:off x="3474720" y="2999232"/>
+            <a:ext cx="5212080" cy="274320"/>
+          </a:xfrm>
+          <a:prstGeom prst="rect">
+            <a:avLst/>
+          </a:prstGeom>
+          <a:noFill/>
+          <a:ln/>
+        </p:spPr>
+        <p:txBody>
+          <a:bodyPr wrap="square" lIns="0" tIns="0" rIns="0" bIns="0" rtlCol="0" anchor="ctr"/>
+          <a:lstStyle/>
+          <a:p>
+            <a:pPr indent="0" marL="0">
+              <a:buNone/>
+            </a:pPr>
+            <a:r>
+              <a:rPr lang="en-US" sz="1000" b="1" dirty="0">
+                <a:solidFill>
+                  <a:srgbClr val="FF6B6B"/>
+                </a:solidFill>
+                <a:latin typeface="Arial" pitchFamily="34" charset="0"/>
+                <a:ea typeface="Arial" pitchFamily="34" charset="-122"/>
+                <a:cs typeface="Arial" pitchFamily="34" charset="-120"/>
+              </a:rPr>
+              <a:t>Mitigations are mapped to official frameworks</a:t>
+            </a:r>
+            <a:endParaRPr lang="en-US" sz="1000" dirty="0"/>
+          </a:p>
+        </p:txBody>
+      </p:sp>
+      <p:sp>
+        <p:nvSpPr>
+          <p:cNvPr id="23" name="Shape 21"/>
+          <p:cNvSpPr/>
+          <p:nvPr/>
+        </p:nvSpPr>
+        <p:spPr>
+          <a:xfrm>
+            <a:off x="3474720" y="3364992"/>
+            <a:ext cx="1627632" cy="292608"/>
+          </a:xfrm>
+          <a:prstGeom prst="roundRect">
+            <a:avLst>
+              <a:gd name="adj" fmla="val 18750"/>
+            </a:avLst>
+          </a:prstGeom>
+          <a:solidFill>
+            <a:srgbClr val="2A1517"/>
+          </a:solidFill>
+          <a:ln w="6350">
+            <a:solidFill>
+              <a:srgbClr val="FF6B6B"/>
+            </a:solidFill>
+            <a:prstDash val="solid"/>
+          </a:ln>
+        </p:spPr>
+      </p:sp>
+      <p:sp>
+        <p:nvSpPr>
+          <p:cNvPr id="24" name="Text 22"/>
+          <p:cNvSpPr txBox="1"/>
+          <p:nvPr/>
+        </p:nvSpPr>
+        <p:spPr>
+          <a:xfrm>
+            <a:off x="3474720" y="3364992"/>
+            <a:ext cx="1627632" cy="292608"/>
+          </a:xfrm>
+          <a:prstGeom prst="rect">
+            <a:avLst/>
+          </a:prstGeom>
+          <a:noFill/>
+          <a:ln/>
+        </p:spPr>
+        <p:txBody>
+          <a:bodyPr wrap="square" lIns="0" tIns="0" rIns="0" bIns="0" rtlCol="0" anchor="ctr"/>
+          <a:lstStyle/>
+          <a:p>
+            <a:pPr algn="ctr" indent="0" marL="0">
+              <a:buNone/>
+            </a:pPr>
+            <a:r>
+              <a:rPr lang="en-US" sz="850" dirty="0">
+                <a:solidFill>
+                  <a:srgbClr val="E9F2FF"/>
+                </a:solidFill>
+                <a:latin typeface="Arial" pitchFamily="34" charset="0"/>
+                <a:ea typeface="Arial" pitchFamily="34" charset="-122"/>
+                <a:cs typeface="Arial" pitchFamily="34" charset="-120"/>
+              </a:rPr>
+              <a:t>NCSC CAF</a:t>
+            </a:r>
+            <a:endParaRPr lang="en-US" sz="850" dirty="0"/>
+          </a:p>
+        </p:txBody>
+      </p:sp>
+      <p:sp>
+        <p:nvSpPr>
+          <p:cNvPr id="25" name="Shape 23"/>
+          <p:cNvSpPr/>
+          <p:nvPr/>
+        </p:nvSpPr>
+        <p:spPr>
+          <a:xfrm>
+            <a:off x="5212080" y="3364992"/>
+            <a:ext cx="1627632" cy="292608"/>
+          </a:xfrm>
+          <a:prstGeom prst="roundRect">
+            <a:avLst>
+              <a:gd name="adj" fmla="val 18750"/>
+            </a:avLst>
+          </a:prstGeom>
+          <a:solidFill>
+            <a:srgbClr val="2A1517"/>
+          </a:solidFill>
+          <a:ln w="6350">
+            <a:solidFill>
+              <a:srgbClr val="FF6B6B"/>
+            </a:solidFill>
+            <a:prstDash val="solid"/>
+          </a:ln>
+        </p:spPr>
+      </p:sp>
+      <p:sp>
+        <p:nvSpPr>
+          <p:cNvPr id="26" name="Text 24"/>
+          <p:cNvSpPr txBox="1"/>
+          <p:nvPr/>
+        </p:nvSpPr>
+        <p:spPr>
+          <a:xfrm>
+            <a:off x="5212080" y="3364992"/>
+            <a:ext cx="1627632" cy="292608"/>
+          </a:xfrm>
+          <a:prstGeom prst="rect">
+            <a:avLst/>
+          </a:prstGeom>
+          <a:noFill/>
+          <a:ln/>
+        </p:spPr>
+        <p:txBody>
+          <a:bodyPr wrap="square" lIns="0" tIns="0" rIns="0" bIns="0" rtlCol="0" anchor="ctr"/>
+          <a:lstStyle/>
+          <a:p>
+            <a:pPr algn="ctr" indent="0" marL="0">
+              <a:buNone/>
+            </a:pPr>
+            <a:r>
+              <a:rPr lang="en-US" sz="850" dirty="0">
+                <a:solidFill>
+                  <a:srgbClr val="E9F2FF"/>
+                </a:solidFill>
+                <a:latin typeface="Arial" pitchFamily="34" charset="0"/>
+                <a:ea typeface="Arial" pitchFamily="34" charset="-122"/>
+                <a:cs typeface="Arial" pitchFamily="34" charset="-120"/>
+              </a:rPr>
+              <a:t>Ofgem CAF Overlay</a:t>
+            </a:r>
+            <a:endParaRPr lang="en-US" sz="850" dirty="0"/>
+          </a:p>
+        </p:txBody>
+      </p:sp>
+      <p:sp>
+        <p:nvSpPr>
+          <p:cNvPr id="27" name="Shape 25"/>
+          <p:cNvSpPr/>
+          <p:nvPr/>
+        </p:nvSpPr>
+        <p:spPr>
+          <a:xfrm>
+            <a:off x="6949440" y="3364992"/>
+            <a:ext cx="1627632" cy="292608"/>
+          </a:xfrm>
+          <a:prstGeom prst="roundRect">
+            <a:avLst>
+              <a:gd name="adj" fmla="val 18750"/>
+            </a:avLst>
+          </a:prstGeom>
+          <a:solidFill>
+            <a:srgbClr val="2A1517"/>
+          </a:solidFill>
+          <a:ln w="6350">
+            <a:solidFill>
+              <a:srgbClr val="FF6B6B"/>
+            </a:solidFill>
+            <a:prstDash val="solid"/>
+          </a:ln>
+        </p:spPr>
+      </p:sp>
+      <p:sp>
+        <p:nvSpPr>
+          <p:cNvPr id="28" name="Text 26"/>
+          <p:cNvSpPr txBox="1"/>
+          <p:nvPr/>
+        </p:nvSpPr>
+        <p:spPr>
+          <a:xfrm>
+            <a:off x="6949440" y="3364992"/>
+            <a:ext cx="1627632" cy="292608"/>
+          </a:xfrm>
+          <a:prstGeom prst="rect">
+            <a:avLst/>
+          </a:prstGeom>
+          <a:noFill/>
+          <a:ln/>
+        </p:spPr>
+        <p:txBody>
+          <a:bodyPr wrap="square" lIns="0" tIns="0" rIns="0" bIns="0" rtlCol="0" anchor="ctr"/>
+          <a:lstStyle/>
+          <a:p>
+            <a:pPr algn="ctr" indent="0" marL="0">
+              <a:buNone/>
+            </a:pPr>
+            <a:r>
+              <a:rPr lang="en-US" sz="850" dirty="0">
+                <a:solidFill>
+                  <a:srgbClr val="E9F2FF"/>
+                </a:solidFill>
+                <a:latin typeface="Arial" pitchFamily="34" charset="0"/>
+                <a:ea typeface="Arial" pitchFamily="34" charset="-122"/>
+                <a:cs typeface="Arial" pitchFamily="34" charset="-120"/>
+              </a:rPr>
+              <a:t>NERC CIP</a:t>
+            </a:r>
+            <a:endParaRPr lang="en-US" sz="850" dirty="0"/>
+          </a:p>
+        </p:txBody>
+      </p:sp>
+      <p:sp>
+        <p:nvSpPr>
+          <p:cNvPr id="29" name="Shape 27"/>
+          <p:cNvSpPr/>
+          <p:nvPr/>
+        </p:nvSpPr>
+        <p:spPr>
+          <a:xfrm>
+            <a:off x="3474720" y="3749040"/>
+            <a:ext cx="1627632" cy="292608"/>
+          </a:xfrm>
+          <a:prstGeom prst="roundRect">
+            <a:avLst>
+              <a:gd name="adj" fmla="val 18750"/>
+            </a:avLst>
+          </a:prstGeom>
+          <a:solidFill>
+            <a:srgbClr val="2A1517"/>
+          </a:solidFill>
+          <a:ln w="6350">
+            <a:solidFill>
+              <a:srgbClr val="FF6B6B"/>
+            </a:solidFill>
+            <a:prstDash val="solid"/>
+          </a:ln>
+        </p:spPr>
+      </p:sp>
+      <p:sp>
+        <p:nvSpPr>
+          <p:cNvPr id="30" name="Text 28"/>
+          <p:cNvSpPr txBox="1"/>
+          <p:nvPr/>
+        </p:nvSpPr>
+        <p:spPr>
+          <a:xfrm>
+            <a:off x="3474720" y="3749040"/>
+            <a:ext cx="1627632" cy="292608"/>
+          </a:xfrm>
+          <a:prstGeom prst="rect">
+            <a:avLst/>
+          </a:prstGeom>
+          <a:noFill/>
+          <a:ln/>
+        </p:spPr>
+        <p:txBody>
+          <a:bodyPr wrap="square" lIns="0" tIns="0" rIns="0" bIns="0" rtlCol="0" anchor="ctr"/>
+          <a:lstStyle/>
+          <a:p>
+            <a:pPr algn="ctr" indent="0" marL="0">
+              <a:buNone/>
+            </a:pPr>
+            <a:r>
+              <a:rPr lang="en-US" sz="850" dirty="0">
+                <a:solidFill>
+                  <a:srgbClr val="E9F2FF"/>
+                </a:solidFill>
+                <a:latin typeface="Arial" pitchFamily="34" charset="0"/>
+                <a:ea typeface="Arial" pitchFamily="34" charset="-122"/>
+                <a:cs typeface="Arial" pitchFamily="34" charset="-120"/>
+              </a:rPr>
+              <a:t>ISA/IEC 62443</a:t>
+            </a:r>
+            <a:endParaRPr lang="en-US" sz="850" dirty="0"/>
+          </a:p>
+        </p:txBody>
+      </p:sp>
+      <p:sp>
+        <p:nvSpPr>
+          <p:cNvPr id="31" name="Shape 29"/>
+          <p:cNvSpPr/>
+          <p:nvPr/>
+        </p:nvSpPr>
+        <p:spPr>
+          <a:xfrm>
+            <a:off x="5212080" y="3749040"/>
+            <a:ext cx="1627632" cy="292608"/>
+          </a:xfrm>
+          <a:prstGeom prst="roundRect">
+            <a:avLst>
+              <a:gd name="adj" fmla="val 18750"/>
+            </a:avLst>
+          </a:prstGeom>
+          <a:solidFill>
+            <a:srgbClr val="2A1517"/>
+          </a:solidFill>
+          <a:ln w="6350">
+            <a:solidFill>
+              <a:srgbClr val="FF6B6B"/>
+            </a:solidFill>
+            <a:prstDash val="solid"/>
+          </a:ln>
+        </p:spPr>
+      </p:sp>
+      <p:sp>
+        <p:nvSpPr>
+          <p:cNvPr id="32" name="Text 30"/>
+          <p:cNvSpPr txBox="1"/>
+          <p:nvPr/>
+        </p:nvSpPr>
+        <p:spPr>
+          <a:xfrm>
+            <a:off x="5212080" y="3749040"/>
+            <a:ext cx="1627632" cy="292608"/>
+          </a:xfrm>
+          <a:prstGeom prst="rect">
+            <a:avLst/>
+          </a:prstGeom>
+          <a:noFill/>
+          <a:ln/>
+        </p:spPr>
+        <p:txBody>
+          <a:bodyPr wrap="square" lIns="0" tIns="0" rIns="0" bIns="0" rtlCol="0" anchor="ctr"/>
+          <a:lstStyle/>
+          <a:p>
+            <a:pPr algn="ctr" indent="0" marL="0">
+              <a:buNone/>
+            </a:pPr>
+            <a:r>
+              <a:rPr lang="en-US" sz="850" dirty="0">
+                <a:solidFill>
+                  <a:srgbClr val="E9F2FF"/>
+                </a:solidFill>
+                <a:latin typeface="Arial" pitchFamily="34" charset="0"/>
+                <a:ea typeface="Arial" pitchFamily="34" charset="-122"/>
+                <a:cs typeface="Arial" pitchFamily="34" charset="-120"/>
+              </a:rPr>
+              <a:t>NIST CSF 2.0</a:t>
+            </a:r>
+            <a:endParaRPr lang="en-US" sz="850" dirty="0"/>
+          </a:p>
+        </p:txBody>
+      </p:sp>
+      <p:sp>
+        <p:nvSpPr>
+          <p:cNvPr id="33" name="Shape 31"/>
+          <p:cNvSpPr/>
+          <p:nvPr/>
+        </p:nvSpPr>
+        <p:spPr>
+          <a:xfrm>
+            <a:off x="6949440" y="3749040"/>
+            <a:ext cx="1627632" cy="292608"/>
+          </a:xfrm>
+          <a:prstGeom prst="roundRect">
+            <a:avLst>
+              <a:gd name="adj" fmla="val 18750"/>
+            </a:avLst>
+          </a:prstGeom>
+          <a:solidFill>
+            <a:srgbClr val="2A1517"/>
+          </a:solidFill>
+          <a:ln w="6350">
+            <a:solidFill>
+              <a:srgbClr val="FF6B6B"/>
+            </a:solidFill>
+            <a:prstDash val="solid"/>
+          </a:ln>
+        </p:spPr>
+      </p:sp>
+      <p:sp>
+        <p:nvSpPr>
+          <p:cNvPr id="34" name="Text 32"/>
+          <p:cNvSpPr txBox="1"/>
+          <p:nvPr/>
+        </p:nvSpPr>
+        <p:spPr>
+          <a:xfrm>
+            <a:off x="6949440" y="3749040"/>
+            <a:ext cx="1627632" cy="292608"/>
+          </a:xfrm>
+          <a:prstGeom prst="rect">
+            <a:avLst/>
+          </a:prstGeom>
+          <a:noFill/>
+          <a:ln/>
+        </p:spPr>
+        <p:txBody>
+          <a:bodyPr wrap="square" lIns="0" tIns="0" rIns="0" bIns="0" rtlCol="0" anchor="ctr"/>
+          <a:lstStyle/>
+          <a:p>
+            <a:pPr algn="ctr" indent="0" marL="0">
+              <a:buNone/>
+            </a:pPr>
+            <a:r>
+              <a:rPr lang="en-US" sz="850" dirty="0">
+                <a:solidFill>
+                  <a:srgbClr val="E9F2FF"/>
+                </a:solidFill>
+                <a:latin typeface="Arial" pitchFamily="34" charset="0"/>
+                <a:ea typeface="Arial" pitchFamily="34" charset="-122"/>
+                <a:cs typeface="Arial" pitchFamily="34" charset="-120"/>
+              </a:rPr>
+              <a:t>IEC 62351</a:t>
+            </a:r>
+            <a:endParaRPr lang="en-US" sz="850" dirty="0"/>
+          </a:p>
+        </p:txBody>
+      </p:sp>
+      <p:sp>
+        <p:nvSpPr>
+          <p:cNvPr id="35" name="Text 33"/>
+          <p:cNvSpPr txBox="1"/>
+          <p:nvPr/>
+        </p:nvSpPr>
+        <p:spPr>
+          <a:xfrm>
+            <a:off x="3474720" y="4206240"/>
+            <a:ext cx="5212080" cy="274320"/>
+          </a:xfrm>
+          <a:prstGeom prst="rect">
+            <a:avLst/>
+          </a:prstGeom>
+          <a:noFill/>
+          <a:ln/>
+        </p:spPr>
+        <p:txBody>
+          <a:bodyPr wrap="square" lIns="0" tIns="0" rIns="0" bIns="0" rtlCol="0" anchor="ctr"/>
+          <a:lstStyle/>
+          <a:p>
+            <a:pPr indent="0" marL="0">
+              <a:buNone/>
+            </a:pPr>
+            <a:r>
+              <a:rPr lang="en-US" sz="800" i="1" dirty="0">
+                <a:solidFill>
+                  <a:srgbClr val="F2D38A"/>
+                </a:solidFill>
+                <a:latin typeface="Arial" pitchFamily="34" charset="0"/>
+                <a:ea typeface="Arial" pitchFamily="34" charset="-122"/>
+                <a:cs typeface="Arial" pitchFamily="34" charset="-120"/>
+              </a:rPr>
+              <a:t>AI research to prompt discussion, not security advice: engage qualified experts.</a:t>
             </a:r>
             <a:endParaRPr lang="en-US" sz="800" dirty="0"/>
+          </a:p>
+        </p:txBody>
+      </p:sp>
+      <p:sp>
+        <p:nvSpPr>
+          <p:cNvPr id="37" name="Text 34"/>
+          <p:cNvSpPr txBox="1"/>
+          <p:nvPr/>
+        </p:nvSpPr>
+        <p:spPr>
+          <a:xfrm>
+            <a:off x="365760" y="4846320"/>
+            <a:ext cx="7955280" cy="201168"/>
+          </a:xfrm>
+          <a:prstGeom prst="rect">
+            <a:avLst/>
+          </a:prstGeom>
+          <a:noFill/>
+          <a:ln/>
+        </p:spPr>
+        <p:txBody>
+          <a:bodyPr wrap="square" lIns="0" tIns="0" rIns="0" bIns="0" rtlCol="0" anchor="ctr"/>
+          <a:lstStyle/>
+          <a:p>
+            <a:pPr indent="0" marL="0">
+              <a:buNone/>
+            </a:pPr>
+            <a:r>
+              <a:rPr lang="en-US" sz="650" dirty="0">
+                <a:solidFill>
+                  <a:srgbClr val="8FA6B8"/>
+                </a:solidFill>
+                <a:latin typeface="Arial" pitchFamily="34" charset="0"/>
+                <a:ea typeface="Arial" pitchFamily="34" charset="-122"/>
+                <a:cs typeface="Arial" pitchFamily="34" charset="-120"/>
+              </a:rPr>
+              <a:t>Stuart Okin, personal project. Data revision 20 (2026-10-29), narrative version 12. AI-maintained data and narrative, no human review; may contain errors. Selection: All fields.</a:t>
+            </a:r>
+            <a:endParaRPr lang="en-US" sz="650" dirty="0"/>
+          </a:p>
+        </p:txBody>
+      </p:sp>
+      <p:sp>
+        <p:nvSpPr>
+          <p:cNvPr id="38" name="Text 35"/>
+          <p:cNvSpPr txBox="1"/>
+          <p:nvPr/>
+        </p:nvSpPr>
+        <p:spPr>
+          <a:xfrm>
+            <a:off x="8412480" y="4846320"/>
+            <a:ext cx="365760" cy="201168"/>
+          </a:xfrm>
+          <a:prstGeom prst="rect">
+            <a:avLst/>
+          </a:prstGeom>
+          <a:noFill/>
+          <a:ln/>
+        </p:spPr>
+        <p:txBody>
+          <a:bodyPr wrap="square" lIns="0" tIns="0" rIns="0" bIns="0" rtlCol="0" anchor="ctr"/>
+          <a:lstStyle/>
+          <a:p>
+            <a:pPr algn="r" indent="0" marL="0">
+              <a:buNone/>
+            </a:pPr>
+            <a:r>
+              <a:rPr lang="en-US" sz="700" dirty="0">
+                <a:solidFill>
+                  <a:srgbClr val="8FA6B8"/>
+                </a:solidFill>
+                <a:latin typeface="Arial" pitchFamily="34" charset="0"/>
+                <a:ea typeface="Arial" pitchFamily="34" charset="-122"/>
+                <a:cs typeface="Arial" pitchFamily="34" charset="-120"/>
+              </a:rPr>
+              <a:t>6</a:t>
+            </a:r>
+            <a:endParaRPr lang="en-US" sz="700" dirty="0"/>
+          </a:p>
+        </p:txBody>
+      </p:sp>
+    </p:spTree>
+  </p:cSld>
+  <p:clrMapOvr>
+    <a:masterClrMapping/>
+  </p:clrMapOvr>
+</p:sld>
+</file>
+
+<file path=ppt/slides/slide7.xml><?xml version="1.0" encoding="utf-8"?>
+<p:sld xmlns:a="http://schemas.openxmlformats.org/drawingml/2006/main" xmlns:r="http://schemas.openxmlformats.org/officeDocument/2006/relationships" xmlns:p="http://schemas.openxmlformats.org/presentationml/2006/main">
+  <p:cSld name="Slide 7">
+    <p:bg>
+      <p:bgPr>
+        <a:solidFill>
+          <a:srgbClr val="0B1724"/>
+        </a:solidFill>
+      </p:bgPr>
+    </p:bg>
+    <p:spTree>
+      <p:nvGrpSpPr>
+        <p:cNvPr id="1" name=""/>
+        <p:cNvGrpSpPr/>
+        <p:nvPr/>
+      </p:nvGrpSpPr>
+      <p:grpSpPr>
+        <a:xfrm>
+          <a:off x="0" y="0"/>
+          <a:ext cx="0" cy="0"/>
+          <a:chOff x="0" y="0"/>
+          <a:chExt cx="0" cy="0"/>
+        </a:xfrm>
+      </p:grpSpPr>
+      <p:sp>
+        <p:nvSpPr>
+          <p:cNvPr id="2" name="Shape 0"/>
+          <p:cNvSpPr/>
+          <p:nvPr/>
+        </p:nvSpPr>
+        <p:spPr>
+          <a:xfrm>
+            <a:off x="365760" y="347472"/>
+            <a:ext cx="73152" cy="457200"/>
+          </a:xfrm>
+          <a:prstGeom prst="rect">
+            <a:avLst/>
+          </a:prstGeom>
+          <a:solidFill>
+            <a:srgbClr val="A891FF"/>
+          </a:solidFill>
+          <a:ln w="12700">
+            <a:solidFill>
+              <a:srgbClr val="A891FF"/>
+            </a:solidFill>
+            <a:prstDash val="solid"/>
+          </a:ln>
+        </p:spPr>
+      </p:sp>
+      <p:sp>
+        <p:nvSpPr>
+          <p:cNvPr id="3" name="Text 1"/>
+          <p:cNvSpPr txBox="1"/>
+          <p:nvPr/>
+        </p:nvSpPr>
+        <p:spPr>
+          <a:xfrm>
+            <a:off x="548640" y="274320"/>
+            <a:ext cx="8138160" cy="457200"/>
+          </a:xfrm>
+          <a:prstGeom prst="rect">
+            <a:avLst/>
+          </a:prstGeom>
+          <a:noFill/>
+          <a:ln/>
+        </p:spPr>
+        <p:txBody>
+          <a:bodyPr wrap="square" lIns="0" tIns="0" rIns="0" bIns="0" rtlCol="0" anchor="ctr"/>
+          <a:lstStyle/>
+          <a:p>
+            <a:pPr indent="0" marL="0">
+              <a:buNone/>
+            </a:pPr>
+            <a:r>
+              <a:rPr lang="en-US" sz="2400" dirty="0">
+                <a:solidFill>
+                  <a:srgbClr val="E9F2FF"/>
+                </a:solidFill>
+                <a:latin typeface="Georgia" pitchFamily="34" charset="0"/>
+                <a:ea typeface="Georgia" pitchFamily="34" charset="-122"/>
+                <a:cs typeface="Georgia" pitchFamily="34" charset="-120"/>
+              </a:rPr>
+              <a:t>From lab to fortune</a:t>
+            </a:r>
+            <a:endParaRPr lang="en-US" sz="2400" dirty="0"/>
+          </a:p>
+        </p:txBody>
+      </p:sp>
+      <p:sp>
+        <p:nvSpPr>
+          <p:cNvPr id="4" name="Text 2"/>
+          <p:cNvSpPr txBox="1"/>
+          <p:nvPr/>
+        </p:nvSpPr>
+        <p:spPr>
+          <a:xfrm>
+            <a:off x="548640" y="713232"/>
+            <a:ext cx="8138160" cy="256032"/>
+          </a:xfrm>
+          <a:prstGeom prst="rect">
+            <a:avLst/>
+          </a:prstGeom>
+          <a:noFill/>
+          <a:ln/>
+        </p:spPr>
+        <p:txBody>
+          <a:bodyPr wrap="square" lIns="0" tIns="0" rIns="0" bIns="0" rtlCol="0" anchor="ctr"/>
+          <a:lstStyle/>
+          <a:p>
+            <a:pPr indent="0" marL="0">
+              <a:buNone/>
+            </a:pPr>
+            <a:r>
+              <a:rPr lang="en-US" sz="1050" dirty="0">
+                <a:solidFill>
+                  <a:srgbClr val="8FA6B8"/>
+                </a:solidFill>
+                <a:latin typeface="Arial" pitchFamily="34" charset="0"/>
+                <a:ea typeface="Arial" pitchFamily="34" charset="-122"/>
+                <a:cs typeface="Arial" pitchFamily="34" charset="-120"/>
+              </a:rPr>
+              <a:t>Years from founding a company to the listing, sale or valuation that made its founders wealthy</a:t>
+            </a:r>
+            <a:endParaRPr lang="en-US" sz="1050" dirty="0"/>
+          </a:p>
+        </p:txBody>
+      </p:sp>
+      <p:sp>
+        <p:nvSpPr>
+          <p:cNvPr id="5" name="Shape 3"/>
+          <p:cNvSpPr/>
+          <p:nvPr/>
+        </p:nvSpPr>
+        <p:spPr>
+          <a:xfrm>
+            <a:off x="365760" y="1188720"/>
+            <a:ext cx="2697480" cy="2194560"/>
+          </a:xfrm>
+          <a:prstGeom prst="roundRect">
+            <a:avLst>
+              <a:gd name="adj" fmla="val 3333"/>
+            </a:avLst>
+          </a:prstGeom>
+          <a:solidFill>
+            <a:srgbClr val="13283A"/>
+          </a:solidFill>
+          <a:ln w="9525">
+            <a:solidFill>
+              <a:srgbClr val="22384A"/>
+            </a:solidFill>
+            <a:prstDash val="solid"/>
+          </a:ln>
+        </p:spPr>
+      </p:sp>
+      <p:sp>
+        <p:nvSpPr>
+          <p:cNvPr id="6" name="Shape 4"/>
+          <p:cNvSpPr/>
+          <p:nvPr/>
+        </p:nvSpPr>
+        <p:spPr>
+          <a:xfrm>
+            <a:off x="365760" y="1298448"/>
+            <a:ext cx="45720" cy="1975104"/>
+          </a:xfrm>
+          <a:prstGeom prst="rect">
+            <a:avLst/>
+          </a:prstGeom>
+          <a:solidFill>
+            <a:srgbClr val="A891FF"/>
+          </a:solidFill>
+          <a:ln w="12700">
+            <a:solidFill>
+              <a:srgbClr val="A891FF"/>
+            </a:solidFill>
+            <a:prstDash val="solid"/>
+          </a:ln>
+        </p:spPr>
+      </p:sp>
+      <p:sp>
+        <p:nvSpPr>
+          <p:cNvPr id="7" name="Text 5"/>
+          <p:cNvSpPr txBox="1"/>
+          <p:nvPr/>
+        </p:nvSpPr>
+        <p:spPr>
+          <a:xfrm>
+            <a:off x="548640" y="1325880"/>
+            <a:ext cx="2423160" cy="822960"/>
+          </a:xfrm>
+          <a:prstGeom prst="rect">
+            <a:avLst/>
+          </a:prstGeom>
+          <a:noFill/>
+          <a:ln/>
+        </p:spPr>
+        <p:txBody>
+          <a:bodyPr wrap="square" lIns="0" tIns="0" rIns="0" bIns="0" rtlCol="0" anchor="ctr"/>
+          <a:lstStyle/>
+          <a:p>
+            <a:pPr indent="0" marL="0">
+              <a:buNone/>
+            </a:pPr>
+            <a:r>
+              <a:rPr lang="en-US" sz="2800" dirty="0">
+                <a:solidFill>
+                  <a:srgbClr val="A891FF"/>
+                </a:solidFill>
+                <a:latin typeface="Georgia" pitchFamily="34" charset="0"/>
+                <a:ea typeface="Georgia" pitchFamily="34" charset="-122"/>
+                <a:cs typeface="Georgia" pitchFamily="34" charset="-120"/>
+              </a:rPr>
+              <a:t>38 of 86</a:t>
+            </a:r>
+            <a:endParaRPr lang="en-US" sz="2800" dirty="0"/>
+          </a:p>
+        </p:txBody>
+      </p:sp>
+      <p:sp>
+        <p:nvSpPr>
+          <p:cNvPr id="8" name="Text 6"/>
+          <p:cNvSpPr txBox="1"/>
+          <p:nvPr/>
+        </p:nvSpPr>
+        <p:spPr>
+          <a:xfrm>
+            <a:off x="548640" y="2194560"/>
+            <a:ext cx="2423160" cy="1097280"/>
+          </a:xfrm>
+          <a:prstGeom prst="rect">
+            <a:avLst/>
+          </a:prstGeom>
+          <a:noFill/>
+          <a:ln/>
+        </p:spPr>
+        <p:txBody>
+          <a:bodyPr wrap="square" lIns="0" tIns="0" rIns="0" bIns="0" rtlCol="0" anchor="t"/>
+          <a:lstStyle/>
+          <a:p>
+            <a:pPr indent="0" marL="0">
+              <a:buNone/>
+            </a:pPr>
+            <a:r>
+              <a:rPr lang="en-US" sz="1000" dirty="0">
+                <a:solidFill>
+                  <a:srgbClr val="E9F2FF"/>
+                </a:solidFill>
+                <a:latin typeface="Arial" pitchFamily="34" charset="0"/>
+                <a:ea typeface="Arial" pitchFamily="34" charset="-122"/>
+                <a:cs typeface="Arial" pitchFamily="34" charset="-120"/>
+              </a:rPr>
+              <a:t>fortunes began in a university or research lab</a:t>
+            </a:r>
+            <a:endParaRPr lang="en-US" sz="1000" dirty="0"/>
+          </a:p>
+        </p:txBody>
+      </p:sp>
+      <p:sp>
+        <p:nvSpPr>
+          <p:cNvPr id="9" name="Shape 7"/>
+          <p:cNvSpPr/>
+          <p:nvPr/>
+        </p:nvSpPr>
+        <p:spPr>
+          <a:xfrm>
+            <a:off x="3200400" y="1188720"/>
+            <a:ext cx="2697480" cy="2194560"/>
+          </a:xfrm>
+          <a:prstGeom prst="roundRect">
+            <a:avLst>
+              <a:gd name="adj" fmla="val 3333"/>
+            </a:avLst>
+          </a:prstGeom>
+          <a:solidFill>
+            <a:srgbClr val="13283A"/>
+          </a:solidFill>
+          <a:ln w="9525">
+            <a:solidFill>
+              <a:srgbClr val="22384A"/>
+            </a:solidFill>
+            <a:prstDash val="solid"/>
+          </a:ln>
+        </p:spPr>
+      </p:sp>
+      <p:sp>
+        <p:nvSpPr>
+          <p:cNvPr id="10" name="Shape 8"/>
+          <p:cNvSpPr/>
+          <p:nvPr/>
+        </p:nvSpPr>
+        <p:spPr>
+          <a:xfrm>
+            <a:off x="3200400" y="1298448"/>
+            <a:ext cx="45720" cy="1975104"/>
+          </a:xfrm>
+          <a:prstGeom prst="rect">
+            <a:avLst/>
+          </a:prstGeom>
+          <a:solidFill>
+            <a:srgbClr val="A891FF"/>
+          </a:solidFill>
+          <a:ln w="12700">
+            <a:solidFill>
+              <a:srgbClr val="A891FF"/>
+            </a:solidFill>
+            <a:prstDash val="solid"/>
+          </a:ln>
+        </p:spPr>
+      </p:sp>
+      <p:sp>
+        <p:nvSpPr>
+          <p:cNvPr id="11" name="Text 9"/>
+          <p:cNvSpPr txBox="1"/>
+          <p:nvPr/>
+        </p:nvSpPr>
+        <p:spPr>
+          <a:xfrm>
+            <a:off x="3383280" y="1325880"/>
+            <a:ext cx="2423160" cy="822960"/>
+          </a:xfrm>
+          <a:prstGeom prst="rect">
+            <a:avLst/>
+          </a:prstGeom>
+          <a:noFill/>
+          <a:ln/>
+        </p:spPr>
+        <p:txBody>
+          <a:bodyPr wrap="square" lIns="0" tIns="0" rIns="0" bIns="0" rtlCol="0" anchor="ctr"/>
+          <a:lstStyle/>
+          <a:p>
+            <a:pPr indent="0" marL="0">
+              <a:buNone/>
+            </a:pPr>
+            <a:r>
+              <a:rPr lang="en-US" sz="2800" dirty="0">
+                <a:solidFill>
+                  <a:srgbClr val="A891FF"/>
+                </a:solidFill>
+                <a:latin typeface="Georgia" pitchFamily="34" charset="0"/>
+                <a:ea typeface="Georgia" pitchFamily="34" charset="-122"/>
+                <a:cs typeface="Georgia" pitchFamily="34" charset="-120"/>
+              </a:rPr>
+              <a:t>12 → 3 yrs</a:t>
+            </a:r>
+            <a:endParaRPr lang="en-US" sz="2800" dirty="0"/>
+          </a:p>
+        </p:txBody>
+      </p:sp>
+      <p:sp>
+        <p:nvSpPr>
+          <p:cNvPr id="12" name="Text 10"/>
+          <p:cNvSpPr txBox="1"/>
+          <p:nvPr/>
+        </p:nvSpPr>
+        <p:spPr>
+          <a:xfrm>
+            <a:off x="3383280" y="2194560"/>
+            <a:ext cx="2423160" cy="1097280"/>
+          </a:xfrm>
+          <a:prstGeom prst="rect">
+            <a:avLst/>
+          </a:prstGeom>
+          <a:noFill/>
+          <a:ln/>
+        </p:spPr>
+        <p:txBody>
+          <a:bodyPr wrap="square" lIns="0" tIns="0" rIns="0" bIns="0" rtlCol="0" anchor="t"/>
+          <a:lstStyle/>
+          <a:p>
+            <a:pPr indent="0" marL="0">
+              <a:buNone/>
+            </a:pPr>
+            <a:r>
+              <a:rPr lang="en-US" sz="1000" dirty="0">
+                <a:solidFill>
+                  <a:srgbClr val="E9F2FF"/>
+                </a:solidFill>
+                <a:latin typeface="Arial" pitchFamily="34" charset="0"/>
+                <a:ea typeface="Arial" pitchFamily="34" charset="-122"/>
+                <a:cs typeface="Arial" pitchFamily="34" charset="-120"/>
+              </a:rPr>
+              <a:t>typical time to a fortune: companies founded before 1970, against since 2015</a:t>
+            </a:r>
+            <a:endParaRPr lang="en-US" sz="1000" dirty="0"/>
+          </a:p>
+        </p:txBody>
+      </p:sp>
+      <p:sp>
+        <p:nvSpPr>
+          <p:cNvPr id="13" name="Shape 11"/>
+          <p:cNvSpPr/>
+          <p:nvPr/>
+        </p:nvSpPr>
+        <p:spPr>
+          <a:xfrm>
+            <a:off x="6035040" y="1188720"/>
+            <a:ext cx="2697480" cy="2194560"/>
+          </a:xfrm>
+          <a:prstGeom prst="roundRect">
+            <a:avLst>
+              <a:gd name="adj" fmla="val 3333"/>
+            </a:avLst>
+          </a:prstGeom>
+          <a:solidFill>
+            <a:srgbClr val="13283A"/>
+          </a:solidFill>
+          <a:ln w="9525">
+            <a:solidFill>
+              <a:srgbClr val="22384A"/>
+            </a:solidFill>
+            <a:prstDash val="solid"/>
+          </a:ln>
+        </p:spPr>
+      </p:sp>
+      <p:sp>
+        <p:nvSpPr>
+          <p:cNvPr id="14" name="Shape 12"/>
+          <p:cNvSpPr/>
+          <p:nvPr/>
+        </p:nvSpPr>
+        <p:spPr>
+          <a:xfrm>
+            <a:off x="6035040" y="1298448"/>
+            <a:ext cx="45720" cy="1975104"/>
+          </a:xfrm>
+          <a:prstGeom prst="rect">
+            <a:avLst/>
+          </a:prstGeom>
+          <a:solidFill>
+            <a:srgbClr val="A891FF"/>
+          </a:solidFill>
+          <a:ln w="12700">
+            <a:solidFill>
+              <a:srgbClr val="A891FF"/>
+            </a:solidFill>
+            <a:prstDash val="solid"/>
+          </a:ln>
+        </p:spPr>
+      </p:sp>
+      <p:sp>
+        <p:nvSpPr>
+          <p:cNvPr id="15" name="Text 13"/>
+          <p:cNvSpPr txBox="1"/>
+          <p:nvPr/>
+        </p:nvSpPr>
+        <p:spPr>
+          <a:xfrm>
+            <a:off x="6217920" y="1325880"/>
+            <a:ext cx="2423160" cy="822960"/>
+          </a:xfrm>
+          <a:prstGeom prst="rect">
+            <a:avLst/>
+          </a:prstGeom>
+          <a:noFill/>
+          <a:ln/>
+        </p:spPr>
+        <p:txBody>
+          <a:bodyPr wrap="square" lIns="0" tIns="0" rIns="0" bIns="0" rtlCol="0" anchor="ctr"/>
+          <a:lstStyle/>
+          <a:p>
+            <a:pPr indent="0" marL="0">
+              <a:buNone/>
+            </a:pPr>
+            <a:r>
+              <a:rPr lang="en-US" sz="2000" dirty="0">
+                <a:solidFill>
+                  <a:srgbClr val="A891FF"/>
+                </a:solidFill>
+                <a:latin typeface="Georgia" pitchFamily="34" charset="0"/>
+                <a:ea typeface="Georgia" pitchFamily="34" charset="-122"/>
+                <a:cs typeface="Georgia" pitchFamily="34" charset="-120"/>
+              </a:rPr>
+              <a:t>Thinking Machines Lab</a:t>
+            </a:r>
+            <a:endParaRPr lang="en-US" sz="2000" dirty="0"/>
+          </a:p>
+        </p:txBody>
+      </p:sp>
+      <p:sp>
+        <p:nvSpPr>
+          <p:cNvPr id="16" name="Text 14"/>
+          <p:cNvSpPr txBox="1"/>
+          <p:nvPr/>
+        </p:nvSpPr>
+        <p:spPr>
+          <a:xfrm>
+            <a:off x="6217920" y="2194560"/>
+            <a:ext cx="2423160" cy="1097280"/>
+          </a:xfrm>
+          <a:prstGeom prst="rect">
+            <a:avLst/>
+          </a:prstGeom>
+          <a:noFill/>
+          <a:ln/>
+        </p:spPr>
+        <p:txBody>
+          <a:bodyPr wrap="square" lIns="0" tIns="0" rIns="0" bIns="0" rtlCol="0" anchor="t"/>
+          <a:lstStyle/>
+          <a:p>
+            <a:pPr indent="0" marL="0">
+              <a:buNone/>
+            </a:pPr>
+            <a:r>
+              <a:rPr lang="en-US" sz="1000" dirty="0">
+                <a:solidFill>
+                  <a:srgbClr val="E9F2FF"/>
+                </a:solidFill>
+                <a:latin typeface="Arial" pitchFamily="34" charset="0"/>
+                <a:ea typeface="Arial" pitchFamily="34" charset="-122"/>
+                <a:cs typeface="Arial" pitchFamily="34" charset="-120"/>
+              </a:rPr>
+              <a:t>the fastest so far: under a year, from founding in 2025</a:t>
+            </a:r>
+            <a:endParaRPr lang="en-US" sz="1000" dirty="0"/>
+          </a:p>
+        </p:txBody>
+      </p:sp>
+      <p:sp>
+        <p:nvSpPr>
+          <p:cNvPr id="17" name="Text 15"/>
+          <p:cNvSpPr txBox="1"/>
+          <p:nvPr/>
+        </p:nvSpPr>
+        <p:spPr>
+          <a:xfrm>
+            <a:off x="365760" y="3657600"/>
+            <a:ext cx="8412480" cy="457200"/>
+          </a:xfrm>
+          <a:prstGeom prst="rect">
+            <a:avLst/>
+          </a:prstGeom>
+          <a:noFill/>
+          <a:ln/>
+        </p:spPr>
+        <p:txBody>
+          <a:bodyPr wrap="square" lIns="0" tIns="0" rIns="0" bIns="0" rtlCol="0" anchor="ctr"/>
+          <a:lstStyle/>
+          <a:p>
+            <a:pPr indent="0" marL="0">
+              <a:buNone/>
+            </a:pPr>
+            <a:r>
+              <a:rPr lang="en-US" sz="1300" i="1" dirty="0">
+                <a:solidFill>
+                  <a:srgbClr val="A891FF"/>
+                </a:solidFill>
+                <a:latin typeface="Georgia" pitchFamily="34" charset="0"/>
+                <a:ea typeface="Georgia" pitchFamily="34" charset="-122"/>
+                <a:cs typeface="Georgia" pitchFamily="34" charset="-120"/>
+              </a:rPr>
+              <a:t>From lab to fortune: the journey is getting faster.</a:t>
+            </a:r>
+            <a:endParaRPr lang="en-US" sz="1300" dirty="0"/>
+          </a:p>
+        </p:txBody>
+      </p:sp>
+      <p:sp>
+        <p:nvSpPr>
+          <p:cNvPr id="19" name="Text 16"/>
+          <p:cNvSpPr txBox="1"/>
+          <p:nvPr/>
+        </p:nvSpPr>
+        <p:spPr>
+          <a:xfrm>
+            <a:off x="365760" y="4846320"/>
+            <a:ext cx="7955280" cy="201168"/>
+          </a:xfrm>
+          <a:prstGeom prst="rect">
+            <a:avLst/>
+          </a:prstGeom>
+          <a:noFill/>
+          <a:ln/>
+        </p:spPr>
+        <p:txBody>
+          <a:bodyPr wrap="square" lIns="0" tIns="0" rIns="0" bIns="0" rtlCol="0" anchor="ctr"/>
+          <a:lstStyle/>
+          <a:p>
+            <a:pPr indent="0" marL="0">
+              <a:buNone/>
+            </a:pPr>
+            <a:r>
+              <a:rPr lang="en-US" sz="650" dirty="0">
+                <a:solidFill>
+                  <a:srgbClr val="8FA6B8"/>
+                </a:solidFill>
+                <a:latin typeface="Arial" pitchFamily="34" charset="0"/>
+                <a:ea typeface="Arial" pitchFamily="34" charset="-122"/>
+                <a:cs typeface="Arial" pitchFamily="34" charset="-120"/>
+              </a:rPr>
+              <a:t>Stuart Okin, personal project. Data revision 20 (2026-10-29), narrative version 12. AI-maintained data and narrative, no human review; may contain errors. Selection: All fields.</a:t>
+            </a:r>
+            <a:endParaRPr lang="en-US" sz="650" dirty="0"/>
+          </a:p>
+        </p:txBody>
+      </p:sp>
+      <p:sp>
+        <p:nvSpPr>
+          <p:cNvPr id="20" name="Text 17"/>
+          <p:cNvSpPr txBox="1"/>
+          <p:nvPr/>
+        </p:nvSpPr>
+        <p:spPr>
+          <a:xfrm>
+            <a:off x="8412480" y="4846320"/>
+            <a:ext cx="365760" cy="201168"/>
+          </a:xfrm>
+          <a:prstGeom prst="rect">
+            <a:avLst/>
+          </a:prstGeom>
+          <a:noFill/>
+          <a:ln/>
+        </p:spPr>
+        <p:txBody>
+          <a:bodyPr wrap="square" lIns="0" tIns="0" rIns="0" bIns="0" rtlCol="0" anchor="ctr"/>
+          <a:lstStyle/>
+          <a:p>
+            <a:pPr algn="r" indent="0" marL="0">
+              <a:buNone/>
+            </a:pPr>
+            <a:r>
+              <a:rPr lang="en-US" sz="700" dirty="0">
+                <a:solidFill>
+                  <a:srgbClr val="8FA6B8"/>
+                </a:solidFill>
+                <a:latin typeface="Arial" pitchFamily="34" charset="0"/>
+                <a:ea typeface="Arial" pitchFamily="34" charset="-122"/>
+                <a:cs typeface="Arial" pitchFamily="34" charset="-120"/>
+              </a:rPr>
+              <a:t>7</a:t>
+            </a:r>
+            <a:endParaRPr lang="en-US" sz="700" dirty="0"/>
           </a:p>
         </p:txBody>
       </p:sp>
